--- a/SebilAI_PitchDeck.pptx
+++ b/SebilAI_PitchDeck.pptx
@@ -12,9 +12,10 @@
     <p:sldId id="260" r:id="rId6"/>
     <p:sldId id="261" r:id="rId7"/>
     <p:sldId id="262" r:id="rId8"/>
+    <p:sldId id="263" r:id="rId9"/>
   </p:sldIdLst>
   <p:notesMasterIdLst>
-    <p:notesMasterId r:id="rId9"/>
+    <p:notesMasterId r:id="rId10"/>
   </p:notesMasterIdLst>
   <p:sldSz cx="12192000" cy="6858000"/>
   <p:notesSz cx="6858000" cy="12192000"/>
@@ -1060,6 +1061,94 @@
             <a:fld id="{F7021451-1387-4CA6-816F-3879F97B5CBC}" type="slidenum">
               <a:rPr lang="en-US"/>
               <a:t>7</a:t>
+            </a:fld>
+            <a:endParaRPr lang="en-US"/>
+          </a:p>
+        </p:txBody>
+      </p:sp>
+    </p:spTree>
+    <p:extLst>
+      <p:ext uri="{BB962C8B-B14F-4D97-AF65-F5344CB8AC3E}">
+        <p14:creationId xmlns:p14="http://schemas.microsoft.com/office/powerpoint/2010/main" val="1024086991"/>
+      </p:ext>
+    </p:extLst>
+  </p:cSld>
+  <p:clrMapOvr>
+    <a:masterClrMapping/>
+  </p:clrMapOvr>
+</p:notes>
+</file>
+
+<file path=ppt/notesSlides/notesSlide8.xml><?xml version="1.0" encoding="utf-8"?>
+<p:notes xmlns:a="http://schemas.openxmlformats.org/drawingml/2006/main" xmlns:r="http://schemas.openxmlformats.org/officeDocument/2006/relationships" xmlns:p="http://schemas.openxmlformats.org/presentationml/2006/main">
+  <p:cSld>
+    <p:spTree>
+      <p:nvGrpSpPr>
+        <p:cNvPr id="1" name=""/>
+        <p:cNvGrpSpPr/>
+        <p:nvPr/>
+      </p:nvGrpSpPr>
+      <p:grpSpPr>
+        <a:xfrm>
+          <a:off x="0" y="0"/>
+          <a:ext cx="0" cy="0"/>
+          <a:chOff x="0" y="0"/>
+          <a:chExt cx="0" cy="0"/>
+        </a:xfrm>
+      </p:grpSpPr>
+      <p:sp>
+        <p:nvSpPr>
+          <p:cNvPr id="2" name="Slide Image Placeholder 1"/>
+          <p:cNvSpPr>
+            <a:spLocks noGrp="1" noRot="1" noChangeAspect="1"/>
+          </p:cNvSpPr>
+          <p:nvPr>
+            <p:ph type="sldImg"/>
+          </p:nvPr>
+        </p:nvSpPr>
+        <p:spPr/>
+      </p:sp>
+      <p:sp>
+        <p:nvSpPr>
+          <p:cNvPr id="3" name="Notes Placeholder 2"/>
+          <p:cNvSpPr>
+            <a:spLocks noGrp="1"/>
+          </p:cNvSpPr>
+          <p:nvPr>
+            <p:ph type="body" idx="1"/>
+          </p:nvPr>
+        </p:nvSpPr>
+        <p:spPr/>
+        <p:txBody>
+          <a:bodyPr/>
+          <a:lstStyle/>
+          <a:p>
+            <a:r>
+              <a:rPr lang="en-US" dirty="0"/>
+              <a:t/>
+            </a:r>
+            <a:endParaRPr lang="en-US" dirty="0"/>
+          </a:p>
+        </p:txBody>
+      </p:sp>
+      <p:sp>
+        <p:nvSpPr>
+          <p:cNvPr id="4" name="Slide Number Placeholder 3"/>
+          <p:cNvSpPr>
+            <a:spLocks noGrp="1"/>
+          </p:cNvSpPr>
+          <p:nvPr>
+            <p:ph type="sldNum" sz="quarter" idx="10"/>
+          </p:nvPr>
+        </p:nvSpPr>
+        <p:spPr/>
+        <p:txBody>
+          <a:bodyPr/>
+          <a:lstStyle/>
+          <a:p>
+            <a:fld id="{F7021451-1387-4CA6-816F-3879F97B5CBC}" type="slidenum">
+              <a:rPr lang="en-US"/>
+              <a:t>8</a:t>
             </a:fld>
             <a:endParaRPr lang="en-US"/>
           </a:p>
@@ -1442,8 +1531,8 @@
         </p:nvSpPr>
         <p:spPr>
           <a:xfrm>
-            <a:off x="8686800" y="0"/>
-            <a:ext cx="3502152" cy="6858000"/>
+            <a:off x="8778240" y="0"/>
+            <a:ext cx="3410712" cy="6858000"/>
           </a:xfrm>
           <a:prstGeom prst="rect">
             <a:avLst/>
@@ -1467,7 +1556,7 @@
         </p:nvSpPr>
         <p:spPr>
           <a:xfrm>
-            <a:off x="7315200" y="548640"/>
+            <a:off x="7315200" y="457200"/>
             <a:ext cx="4114800" cy="4114800"/>
           </a:xfrm>
           <a:prstGeom prst="rect">
@@ -1520,7 +1609,7 @@
               <a:buNone/>
             </a:pPr>
             <a:r>
-              <a:rPr lang="en-US" sz="4800" b="1" dirty="0">
+              <a:rPr lang="en-US" sz="5000" b="1" dirty="0">
                 <a:solidFill>
                   <a:srgbClr val="FFFFFF"/>
                 </a:solidFill>
@@ -1530,7 +1619,7 @@
               </a:rPr>
               <a:t>SebilAI</a:t>
             </a:r>
-            <a:endParaRPr lang="en-US" sz="4800" dirty="0"/>
+            <a:endParaRPr lang="en-US" sz="5000" dirty="0"/>
           </a:p>
         </p:txBody>
       </p:sp>
@@ -1542,7 +1631,7 @@
         </p:nvSpPr>
         <p:spPr>
           <a:xfrm>
-            <a:off x="457200" y="1737360"/>
+            <a:off x="457200" y="1783080"/>
             <a:ext cx="6400800" cy="548640"/>
           </a:xfrm>
           <a:prstGeom prst="rect">
@@ -1582,7 +1671,7 @@
         <p:spPr>
           <a:xfrm>
             <a:off x="457200" y="2468880"/>
-            <a:ext cx="6400800" cy="914400"/>
+            <a:ext cx="6400800" cy="822960"/>
           </a:xfrm>
           <a:prstGeom prst="rect">
             <a:avLst/>
@@ -1631,57 +1720,18 @@
       </p:sp>
       <p:sp>
         <p:nvSpPr>
-          <p:cNvPr id="8" name="Text 6"/>
-          <p:cNvSpPr/>
-          <p:nvPr/>
-        </p:nvSpPr>
-        <p:spPr>
-          <a:xfrm>
-            <a:off x="457200" y="3520440"/>
-            <a:ext cx="6400800" cy="502920"/>
-          </a:xfrm>
-          <a:prstGeom prst="rect">
-            <a:avLst/>
-          </a:prstGeom>
-          <a:noFill/>
-          <a:ln/>
-        </p:spPr>
-        <p:txBody>
-          <a:bodyPr wrap="square" rtlCol="0" anchor="ctr"/>
-          <a:lstStyle/>
-          <a:p>
-            <a:pPr indent="0" marL="0">
-              <a:buNone/>
-            </a:pPr>
-            <a:r>
-              <a:rPr lang="en-US" sz="1200" i="1" dirty="0">
-                <a:solidFill>
-                  <a:srgbClr val="B8DC7A"/>
-                </a:solidFill>
-                <a:latin typeface="Calibri" pitchFamily="34" charset="0"/>
-                <a:ea typeface="Calibri" pitchFamily="34" charset="-122"/>
-                <a:cs typeface="Calibri" pitchFamily="34" charset="-120"/>
-              </a:rPr>
-              <a:t>"Sebil (ሰብሊ) means Crops in Amharic — this is AI for Ethiopian Crops"</a:t>
-            </a:r>
-            <a:endParaRPr lang="en-US" sz="1200" dirty="0"/>
-          </a:p>
-        </p:txBody>
-      </p:sp>
-      <p:sp>
-        <p:nvSpPr>
-          <p:cNvPr id="9" name="Shape 7"/>
-          <p:cNvSpPr/>
-          <p:nvPr/>
-        </p:nvSpPr>
-        <p:spPr>
-          <a:xfrm>
-            <a:off x="457200" y="4206240"/>
-            <a:ext cx="2834640" cy="640080"/>
+          <p:cNvPr id="8" name="Shape 6"/>
+          <p:cNvSpPr/>
+          <p:nvPr/>
+        </p:nvSpPr>
+        <p:spPr>
+          <a:xfrm>
+            <a:off x="457200" y="3429000"/>
+            <a:ext cx="6400800" cy="457200"/>
           </a:xfrm>
           <a:prstGeom prst="roundRect">
             <a:avLst>
-              <a:gd name="adj" fmla="val 11429"/>
+              <a:gd name="adj" fmla="val 16000"/>
             </a:avLst>
           </a:prstGeom>
           <a:solidFill>
@@ -1697,14 +1747,14 @@
       </p:sp>
       <p:sp>
         <p:nvSpPr>
-          <p:cNvPr id="10" name="Text 8"/>
-          <p:cNvSpPr/>
-          <p:nvPr/>
-        </p:nvSpPr>
-        <p:spPr>
-          <a:xfrm>
-            <a:off x="457200" y="4261104"/>
-            <a:ext cx="2834640" cy="256032"/>
+          <p:cNvPr id="9" name="Text 7"/>
+          <p:cNvSpPr/>
+          <p:nvPr/>
+        </p:nvSpPr>
+        <p:spPr>
+          <a:xfrm>
+            <a:off x="457200" y="3493008"/>
+            <a:ext cx="6400800" cy="320040"/>
           </a:xfrm>
           <a:prstGeom prst="rect">
             <a:avLst/>
@@ -1720,7 +1770,7 @@
               <a:buNone/>
             </a:pPr>
             <a:r>
-              <a:rPr lang="en-US" sz="1100" b="1" dirty="0">
+              <a:rPr lang="en-US" sz="1100" i="1" dirty="0">
                 <a:solidFill>
                   <a:srgbClr val="B8DC7A"/>
                 </a:solidFill>
@@ -1728,7 +1778,7 @@
                 <a:ea typeface="Calibri" pitchFamily="34" charset="-122"/>
                 <a:cs typeface="Calibri" pitchFamily="34" charset="-120"/>
               </a:rPr>
-              <a:t>Offline-First</a:t>
+              <a:t>"Sebil (ሰብሊ) means Crops in Amharic — AI built for Ethiopian crops"</a:t>
             </a:r>
             <a:endParaRPr lang="en-US" sz="1100" dirty="0"/>
           </a:p>
@@ -1736,57 +1786,18 @@
       </p:sp>
       <p:sp>
         <p:nvSpPr>
-          <p:cNvPr id="11" name="Text 9"/>
-          <p:cNvSpPr/>
-          <p:nvPr/>
-        </p:nvSpPr>
-        <p:spPr>
-          <a:xfrm>
-            <a:off x="457200" y="4535424"/>
-            <a:ext cx="2834640" cy="256032"/>
-          </a:xfrm>
-          <a:prstGeom prst="rect">
-            <a:avLst/>
-          </a:prstGeom>
-          <a:noFill/>
-          <a:ln/>
-        </p:spPr>
-        <p:txBody>
-          <a:bodyPr wrap="square" rtlCol="0" anchor="ctr"/>
-          <a:lstStyle/>
-          <a:p>
-            <a:pPr algn="ctr" indent="0" marL="0">
-              <a:buNone/>
-            </a:pPr>
-            <a:r>
-              <a:rPr lang="en-US" sz="900" dirty="0">
-                <a:solidFill>
-                  <a:srgbClr val="AACCAA"/>
-                </a:solidFill>
-                <a:latin typeface="Calibri" pitchFamily="34" charset="0"/>
-                <a:ea typeface="Calibri" pitchFamily="34" charset="-122"/>
-                <a:cs typeface="Calibri" pitchFamily="34" charset="-120"/>
-              </a:rPr>
-              <a:t>Works with no internet</a:t>
-            </a:r>
-            <a:endParaRPr lang="en-US" sz="900" dirty="0"/>
-          </a:p>
-        </p:txBody>
-      </p:sp>
-      <p:sp>
-        <p:nvSpPr>
-          <p:cNvPr id="12" name="Shape 10"/>
-          <p:cNvSpPr/>
-          <p:nvPr/>
-        </p:nvSpPr>
-        <p:spPr>
-          <a:xfrm>
-            <a:off x="3566160" y="4206240"/>
-            <a:ext cx="2834640" cy="640080"/>
+          <p:cNvPr id="10" name="Shape 8"/>
+          <p:cNvSpPr/>
+          <p:nvPr/>
+        </p:nvSpPr>
+        <p:spPr>
+          <a:xfrm>
+            <a:off x="457200" y="4069080"/>
+            <a:ext cx="2834640" cy="658368"/>
           </a:xfrm>
           <a:prstGeom prst="roundRect">
             <a:avLst>
-              <a:gd name="adj" fmla="val 11429"/>
+              <a:gd name="adj" fmla="val 11111"/>
             </a:avLst>
           </a:prstGeom>
           <a:solidFill>
@@ -1802,13 +1813,13 @@
       </p:sp>
       <p:sp>
         <p:nvSpPr>
-          <p:cNvPr id="13" name="Text 11"/>
-          <p:cNvSpPr/>
-          <p:nvPr/>
-        </p:nvSpPr>
-        <p:spPr>
-          <a:xfrm>
-            <a:off x="3566160" y="4261104"/>
+          <p:cNvPr id="11" name="Text 9"/>
+          <p:cNvSpPr/>
+          <p:nvPr/>
+        </p:nvSpPr>
+        <p:spPr>
+          <a:xfrm>
+            <a:off x="457200" y="4123944"/>
             <a:ext cx="2834640" cy="256032"/>
           </a:xfrm>
           <a:prstGeom prst="rect">
@@ -1833,7 +1844,7 @@
                 <a:ea typeface="Calibri" pitchFamily="34" charset="-122"/>
                 <a:cs typeface="Calibri" pitchFamily="34" charset="-120"/>
               </a:rPr>
-              <a:t>23+ Ethiopian Papers</a:t>
+              <a:t>🌐 Live</a:t>
             </a:r>
             <a:endParaRPr lang="en-US" sz="1100" dirty="0"/>
           </a:p>
@@ -1841,13 +1852,13 @@
       </p:sp>
       <p:sp>
         <p:nvSpPr>
-          <p:cNvPr id="14" name="Text 12"/>
-          <p:cNvSpPr/>
-          <p:nvPr/>
-        </p:nvSpPr>
-        <p:spPr>
-          <a:xfrm>
-            <a:off x="3566160" y="4535424"/>
+          <p:cNvPr id="12" name="Text 10"/>
+          <p:cNvSpPr/>
+          <p:nvPr/>
+        </p:nvSpPr>
+        <p:spPr>
+          <a:xfrm>
+            <a:off x="457200" y="4416552"/>
             <a:ext cx="2834640" cy="256032"/>
           </a:xfrm>
           <a:prstGeom prst="rect">
@@ -1872,7 +1883,7 @@
                 <a:ea typeface="Calibri" pitchFamily="34" charset="-122"/>
                 <a:cs typeface="Calibri" pitchFamily="34" charset="-120"/>
               </a:rPr>
-              <a:t>Locally grounded research</a:t>
+              <a:t>sebilai.com</a:t>
             </a:r>
             <a:endParaRPr lang="en-US" sz="900" dirty="0"/>
           </a:p>
@@ -1880,18 +1891,18 @@
       </p:sp>
       <p:sp>
         <p:nvSpPr>
-          <p:cNvPr id="15" name="Shape 13"/>
-          <p:cNvSpPr/>
-          <p:nvPr/>
-        </p:nvSpPr>
-        <p:spPr>
-          <a:xfrm>
-            <a:off x="457200" y="4983480"/>
-            <a:ext cx="2834640" cy="640080"/>
+          <p:cNvPr id="13" name="Shape 11"/>
+          <p:cNvSpPr/>
+          <p:nvPr/>
+        </p:nvSpPr>
+        <p:spPr>
+          <a:xfrm>
+            <a:off x="3566160" y="4069080"/>
+            <a:ext cx="2834640" cy="658368"/>
           </a:xfrm>
           <a:prstGeom prst="roundRect">
             <a:avLst>
-              <a:gd name="adj" fmla="val 11429"/>
+              <a:gd name="adj" fmla="val 11111"/>
             </a:avLst>
           </a:prstGeom>
           <a:solidFill>
@@ -1907,13 +1918,13 @@
       </p:sp>
       <p:sp>
         <p:nvSpPr>
-          <p:cNvPr id="16" name="Text 14"/>
-          <p:cNvSpPr/>
-          <p:nvPr/>
-        </p:nvSpPr>
-        <p:spPr>
-          <a:xfrm>
-            <a:off x="457200" y="5038344"/>
+          <p:cNvPr id="14" name="Text 12"/>
+          <p:cNvSpPr/>
+          <p:nvPr/>
+        </p:nvSpPr>
+        <p:spPr>
+          <a:xfrm>
+            <a:off x="3566160" y="4123944"/>
             <a:ext cx="2834640" cy="256032"/>
           </a:xfrm>
           <a:prstGeom prst="rect">
@@ -1938,7 +1949,7 @@
                 <a:ea typeface="Calibri" pitchFamily="34" charset="-122"/>
                 <a:cs typeface="Calibri" pitchFamily="34" charset="-120"/>
               </a:rPr>
-              <a:t>6 Languages</a:t>
+              <a:t>📱 PWA</a:t>
             </a:r>
             <a:endParaRPr lang="en-US" sz="1100" dirty="0"/>
           </a:p>
@@ -1946,13 +1957,13 @@
       </p:sp>
       <p:sp>
         <p:nvSpPr>
-          <p:cNvPr id="17" name="Text 15"/>
-          <p:cNvSpPr/>
-          <p:nvPr/>
-        </p:nvSpPr>
-        <p:spPr>
-          <a:xfrm>
-            <a:off x="457200" y="5312664"/>
+          <p:cNvPr id="15" name="Text 13"/>
+          <p:cNvSpPr/>
+          <p:nvPr/>
+        </p:nvSpPr>
+        <p:spPr>
+          <a:xfrm>
+            <a:off x="3566160" y="4416552"/>
             <a:ext cx="2834640" cy="256032"/>
           </a:xfrm>
           <a:prstGeom prst="rect">
@@ -1977,7 +1988,7 @@
                 <a:ea typeface="Calibri" pitchFamily="34" charset="-122"/>
                 <a:cs typeface="Calibri" pitchFamily="34" charset="-120"/>
               </a:rPr>
-              <a:t>EN · አማርኛ · Oromiffa · ትግርኛ · Soomaali · Qafar</a:t>
+              <a:t>Works offline</a:t>
             </a:r>
             <a:endParaRPr lang="en-US" sz="900" dirty="0"/>
           </a:p>
@@ -1985,18 +1996,18 @@
       </p:sp>
       <p:sp>
         <p:nvSpPr>
-          <p:cNvPr id="18" name="Shape 16"/>
-          <p:cNvSpPr/>
-          <p:nvPr/>
-        </p:nvSpPr>
-        <p:spPr>
-          <a:xfrm>
-            <a:off x="3566160" y="4983480"/>
-            <a:ext cx="2834640" cy="640080"/>
+          <p:cNvPr id="16" name="Shape 14"/>
+          <p:cNvSpPr/>
+          <p:nvPr/>
+        </p:nvSpPr>
+        <p:spPr>
+          <a:xfrm>
+            <a:off x="457200" y="4846320"/>
+            <a:ext cx="2834640" cy="658368"/>
           </a:xfrm>
           <a:prstGeom prst="roundRect">
             <a:avLst>
-              <a:gd name="adj" fmla="val 11429"/>
+              <a:gd name="adj" fmla="val 11111"/>
             </a:avLst>
           </a:prstGeom>
           <a:solidFill>
@@ -2012,13 +2023,13 @@
       </p:sp>
       <p:sp>
         <p:nvSpPr>
-          <p:cNvPr id="19" name="Text 17"/>
-          <p:cNvSpPr/>
-          <p:nvPr/>
-        </p:nvSpPr>
-        <p:spPr>
-          <a:xfrm>
-            <a:off x="3566160" y="5038344"/>
+          <p:cNvPr id="17" name="Text 15"/>
+          <p:cNvSpPr/>
+          <p:nvPr/>
+        </p:nvSpPr>
+        <p:spPr>
+          <a:xfrm>
+            <a:off x="457200" y="4901184"/>
             <a:ext cx="2834640" cy="256032"/>
           </a:xfrm>
           <a:prstGeom prst="rect">
@@ -2043,7 +2054,7 @@
                 <a:ea typeface="Calibri" pitchFamily="34" charset="-122"/>
                 <a:cs typeface="Calibri" pitchFamily="34" charset="-120"/>
               </a:rPr>
-              <a:t>Free Forever</a:t>
+              <a:t>🌍 6 Languages</a:t>
             </a:r>
             <a:endParaRPr lang="en-US" sz="1100" dirty="0"/>
           </a:p>
@@ -2051,13 +2062,79 @@
       </p:sp>
       <p:sp>
         <p:nvSpPr>
+          <p:cNvPr id="18" name="Text 16"/>
+          <p:cNvSpPr/>
+          <p:nvPr/>
+        </p:nvSpPr>
+        <p:spPr>
+          <a:xfrm>
+            <a:off x="457200" y="5193792"/>
+            <a:ext cx="2834640" cy="256032"/>
+          </a:xfrm>
+          <a:prstGeom prst="rect">
+            <a:avLst/>
+          </a:prstGeom>
+          <a:noFill/>
+          <a:ln/>
+        </p:spPr>
+        <p:txBody>
+          <a:bodyPr wrap="square" rtlCol="0" anchor="ctr"/>
+          <a:lstStyle/>
+          <a:p>
+            <a:pPr algn="ctr" indent="0" marL="0">
+              <a:buNone/>
+            </a:pPr>
+            <a:r>
+              <a:rPr lang="en-US" sz="900" dirty="0">
+                <a:solidFill>
+                  <a:srgbClr val="AACCAA"/>
+                </a:solidFill>
+                <a:latin typeface="Calibri" pitchFamily="34" charset="0"/>
+                <a:ea typeface="Calibri" pitchFamily="34" charset="-122"/>
+                <a:cs typeface="Calibri" pitchFamily="34" charset="-120"/>
+              </a:rPr>
+              <a:t>EN·አማርኛ·Oromiffa·ትግርኛ·Soomaali·Qafar</a:t>
+            </a:r>
+            <a:endParaRPr lang="en-US" sz="900" dirty="0"/>
+          </a:p>
+        </p:txBody>
+      </p:sp>
+      <p:sp>
+        <p:nvSpPr>
+          <p:cNvPr id="19" name="Shape 17"/>
+          <p:cNvSpPr/>
+          <p:nvPr/>
+        </p:nvSpPr>
+        <p:spPr>
+          <a:xfrm>
+            <a:off x="3566160" y="4846320"/>
+            <a:ext cx="2834640" cy="658368"/>
+          </a:xfrm>
+          <a:prstGeom prst="roundRect">
+            <a:avLst>
+              <a:gd name="adj" fmla="val 11111"/>
+            </a:avLst>
+          </a:prstGeom>
+          <a:solidFill>
+            <a:srgbClr val="1E4A06"/>
+          </a:solidFill>
+          <a:ln w="12700">
+            <a:solidFill>
+              <a:srgbClr val="B8DC7A"/>
+            </a:solidFill>
+            <a:prstDash val="solid"/>
+          </a:ln>
+        </p:spPr>
+      </p:sp>
+      <p:sp>
+        <p:nvSpPr>
           <p:cNvPr id="20" name="Text 18"/>
           <p:cNvSpPr/>
           <p:nvPr/>
         </p:nvSpPr>
         <p:spPr>
           <a:xfrm>
-            <a:off x="3566160" y="5312664"/>
+            <a:off x="3566160" y="4901184"/>
             <a:ext cx="2834640" cy="256032"/>
           </a:xfrm>
           <a:prstGeom prst="rect">
@@ -2074,6 +2151,45 @@
               <a:buNone/>
             </a:pPr>
             <a:r>
+              <a:rPr lang="en-US" sz="1100" b="1" dirty="0">
+                <a:solidFill>
+                  <a:srgbClr val="B8DC7A"/>
+                </a:solidFill>
+                <a:latin typeface="Calibri" pitchFamily="34" charset="0"/>
+                <a:ea typeface="Calibri" pitchFamily="34" charset="-122"/>
+                <a:cs typeface="Calibri" pitchFamily="34" charset="-120"/>
+              </a:rPr>
+              <a:t>✅ Audit</a:t>
+            </a:r>
+            <a:endParaRPr lang="en-US" sz="1100" dirty="0"/>
+          </a:p>
+        </p:txBody>
+      </p:sp>
+      <p:sp>
+        <p:nvSpPr>
+          <p:cNvPr id="21" name="Text 19"/>
+          <p:cNvSpPr/>
+          <p:nvPr/>
+        </p:nvSpPr>
+        <p:spPr>
+          <a:xfrm>
+            <a:off x="3566160" y="5193792"/>
+            <a:ext cx="2834640" cy="256032"/>
+          </a:xfrm>
+          <a:prstGeom prst="rect">
+            <a:avLst/>
+          </a:prstGeom>
+          <a:noFill/>
+          <a:ln/>
+        </p:spPr>
+        <p:txBody>
+          <a:bodyPr wrap="square" rtlCol="0" anchor="ctr"/>
+          <a:lstStyle/>
+          <a:p>
+            <a:pPr algn="ctr" indent="0" marL="0">
+              <a:buNone/>
+            </a:pPr>
+            <a:r>
               <a:rPr lang="en-US" sz="900" dirty="0">
                 <a:solidFill>
                   <a:srgbClr val="AACCAA"/>
@@ -2082,7 +2198,7 @@
                 <a:ea typeface="Calibri" pitchFamily="34" charset="-122"/>
                 <a:cs typeface="Calibri" pitchFamily="34" charset="-120"/>
               </a:rPr>
-              <a:t>No ads · No tracking</a:t>
+              <a:t>46/46 checks passed</a:t>
             </a:r>
             <a:endParaRPr lang="en-US" sz="900" dirty="0"/>
           </a:p>
@@ -2090,30 +2206,30 @@
       </p:sp>
       <p:sp>
         <p:nvSpPr>
-          <p:cNvPr id="21" name="Text 19"/>
-          <p:cNvSpPr/>
-          <p:nvPr/>
-        </p:nvSpPr>
-        <p:spPr>
-          <a:xfrm>
-            <a:off x="457200" y="6172200"/>
-            <a:ext cx="6400800" cy="274320"/>
-          </a:xfrm>
-          <a:prstGeom prst="rect">
-            <a:avLst/>
-          </a:prstGeom>
-          <a:noFill/>
-          <a:ln/>
-        </p:spPr>
-        <p:txBody>
-          <a:bodyPr wrap="square" rtlCol="0" anchor="ctr"/>
-          <a:lstStyle/>
-          <a:p>
-            <a:pPr indent="0" marL="0">
-              <a:buNone/>
-            </a:pPr>
-            <a:r>
-              <a:rPr lang="en-US" sz="1000" dirty="0">
+          <p:cNvPr id="22" name="Text 20"/>
+          <p:cNvSpPr/>
+          <p:nvPr/>
+        </p:nvSpPr>
+        <p:spPr>
+          <a:xfrm>
+            <a:off x="457200" y="6199632"/>
+            <a:ext cx="6400800" cy="256032"/>
+          </a:xfrm>
+          <a:prstGeom prst="rect">
+            <a:avLst/>
+          </a:prstGeom>
+          <a:noFill/>
+          <a:ln/>
+        </p:spPr>
+        <p:txBody>
+          <a:bodyPr wrap="square" rtlCol="0" anchor="ctr"/>
+          <a:lstStyle/>
+          <a:p>
+            <a:pPr indent="0" marL="0">
+              <a:buNone/>
+            </a:pPr>
+            <a:r>
+              <a:rPr lang="en-US" sz="950" dirty="0">
                 <a:solidFill>
                   <a:srgbClr val="7A9A6A"/>
                 </a:solidFill>
@@ -2121,21 +2237,21 @@
                 <a:ea typeface="Calibri" pitchFamily="34" charset="-122"/>
                 <a:cs typeface="Calibri" pitchFamily="34" charset="-120"/>
               </a:rPr>
-              <a:t>Gulilat Kasiye Worku (ጉልላት ካስዬ ዎርቁ)  |  gulilatkasiye4@gmail.com  |  +251 704 161 402</a:t>
-            </a:r>
-            <a:endParaRPr lang="en-US" sz="1000" dirty="0"/>
-          </a:p>
-        </p:txBody>
-      </p:sp>
-      <p:sp>
-        <p:nvSpPr>
-          <p:cNvPr id="22" name="Text 20"/>
-          <p:cNvSpPr/>
-          <p:nvPr/>
-        </p:nvSpPr>
-        <p:spPr>
-          <a:xfrm>
-            <a:off x="457200" y="6473952"/>
+              <a:t>Gulilat Kasiye Worku (ጉልላት ካስዬ ዎርቁ)  |  gulilatkasiye4@gmail.com  |  +251 704 161 402  |  Hawassa 🇪🇹</a:t>
+            </a:r>
+            <a:endParaRPr lang="en-US" sz="950" dirty="0"/>
+          </a:p>
+        </p:txBody>
+      </p:sp>
+      <p:sp>
+        <p:nvSpPr>
+          <p:cNvPr id="23" name="Text 21"/>
+          <p:cNvSpPr/>
+          <p:nvPr/>
+        </p:nvSpPr>
+        <p:spPr>
+          <a:xfrm>
+            <a:off x="457200" y="6492240"/>
             <a:ext cx="6400800" cy="256032"/>
           </a:xfrm>
           <a:prstGeom prst="rect">
@@ -2152,7 +2268,7 @@
               <a:buNone/>
             </a:pPr>
             <a:r>
-              <a:rPr lang="en-US" sz="1000" dirty="0">
+              <a:rPr lang="en-US" sz="950" dirty="0">
                 <a:solidFill>
                   <a:srgbClr val="B8DC7A"/>
                 </a:solidFill>
@@ -2160,9 +2276,9 @@
                 <a:ea typeface="Calibri" pitchFamily="34" charset="-122"/>
                 <a:cs typeface="Calibri" pitchFamily="34" charset="-120"/>
               </a:rPr>
-              <a:t>sebilai.com  ·  App Score: 92–95/100  ·  Hawassa, Ethiopia 🇪🇹</a:t>
-            </a:r>
-            <a:endParaRPr lang="en-US" sz="1000" dirty="0"/>
+              <a:t>sebilai.com  ·  github.com/guleaada  ·  46/46 Audit Score</a:t>
+            </a:r>
+            <a:endParaRPr lang="en-US" sz="950" dirty="0"/>
           </a:p>
         </p:txBody>
       </p:sp>
@@ -2271,7 +2387,7 @@
         <p:spPr>
           <a:xfrm>
             <a:off x="457200" y="822960"/>
-            <a:ext cx="11247120" cy="822960"/>
+            <a:ext cx="11247120" cy="777240"/>
           </a:xfrm>
           <a:prstGeom prst="rect">
             <a:avLst/>
@@ -2295,7 +2411,7 @@
                 <a:ea typeface="Georgia" pitchFamily="34" charset="-122"/>
                 <a:cs typeface="Georgia" pitchFamily="34" charset="-120"/>
               </a:rPr>
-              <a:t>15 Million Ethiopian Farmers Have No AI Tool That Speaks Their Language</a:t>
+              <a:t>15 Million Ethiopian Farmers Have No AI That Speaks Their Language</a:t>
             </a:r>
             <a:endParaRPr lang="en-US" sz="2600" dirty="0"/>
           </a:p>
@@ -2310,11 +2426,11 @@
         <p:spPr>
           <a:xfrm>
             <a:off x="457200" y="1920240"/>
-            <a:ext cx="5486400" cy="1463040"/>
+            <a:ext cx="5486400" cy="1508760"/>
           </a:xfrm>
           <a:prstGeom prst="roundRect">
             <a:avLst>
-              <a:gd name="adj" fmla="val 7500"/>
+              <a:gd name="adj" fmla="val 7273"/>
             </a:avLst>
           </a:prstGeom>
           <a:solidFill>
@@ -2376,7 +2492,7 @@
         <p:spPr>
           <a:xfrm>
             <a:off x="640080" y="2468880"/>
-            <a:ext cx="5120640" cy="731520"/>
+            <a:ext cx="5120640" cy="777240"/>
           </a:xfrm>
           <a:prstGeom prst="rect">
             <a:avLst/>
@@ -2400,7 +2516,7 @@
                 <a:ea typeface="Calibri" pitchFamily="34" charset="-122"/>
                 <a:cs typeface="Calibri" pitchFamily="34" charset="-120"/>
               </a:rPr>
-              <a:t>From preventable diseases — Enset, Teff, Wheat, Maize, Coffee</a:t>
+              <a:t>From preventable diseases — Enset, Teff, Wheat, Maize, Coffee, Potato, Barley, Sorghum</a:t>
             </a:r>
             <a:endParaRPr lang="en-US" sz="1100" dirty="0"/>
           </a:p>
@@ -2415,11 +2531,11 @@
         <p:spPr>
           <a:xfrm>
             <a:off x="6309360" y="1920240"/>
-            <a:ext cx="5486400" cy="1463040"/>
+            <a:ext cx="5486400" cy="1508760"/>
           </a:xfrm>
           <a:prstGeom prst="roundRect">
             <a:avLst>
-              <a:gd name="adj" fmla="val 7500"/>
+              <a:gd name="adj" fmla="val 7273"/>
             </a:avLst>
           </a:prstGeom>
           <a:solidFill>
@@ -2481,7 +2597,7 @@
         <p:spPr>
           <a:xfrm>
             <a:off x="6492240" y="2468880"/>
-            <a:ext cx="5120640" cy="731520"/>
+            <a:ext cx="5120640" cy="777240"/>
           </a:xfrm>
           <a:prstGeom prst="rect">
             <a:avLst/>
@@ -2505,7 +2621,7 @@
                 <a:ea typeface="Calibri" pitchFamily="34" charset="-122"/>
                 <a:cs typeface="Calibri" pitchFamily="34" charset="-120"/>
               </a:rPr>
-              <a:t>Plantix and Nuru don't know Enset or Teff. No Amharic. No Ethiopian research.</a:t>
+              <a:t>Plantix and Nuru don't know Enset or Teff. No Amharic. No local research. Wrong crops.</a:t>
             </a:r>
             <a:endParaRPr lang="en-US" sz="1100" dirty="0"/>
           </a:p>
@@ -2519,12 +2635,12 @@
         </p:nvSpPr>
         <p:spPr>
           <a:xfrm>
-            <a:off x="457200" y="3566160"/>
-            <a:ext cx="5486400" cy="1463040"/>
+            <a:off x="457200" y="3611880"/>
+            <a:ext cx="5486400" cy="1508760"/>
           </a:xfrm>
           <a:prstGeom prst="roundRect">
             <a:avLst>
-              <a:gd name="adj" fmla="val 7500"/>
+              <a:gd name="adj" fmla="val 7273"/>
             </a:avLst>
           </a:prstGeom>
           <a:solidFill>
@@ -2546,7 +2662,7 @@
         </p:nvSpPr>
         <p:spPr>
           <a:xfrm>
-            <a:off x="640080" y="3703320"/>
+            <a:off x="640080" y="3749040"/>
             <a:ext cx="5120640" cy="365760"/>
           </a:xfrm>
           <a:prstGeom prst="rect">
@@ -2585,8 +2701,8 @@
         </p:nvSpPr>
         <p:spPr>
           <a:xfrm>
-            <a:off x="640080" y="4114800"/>
-            <a:ext cx="5120640" cy="731520"/>
+            <a:off x="640080" y="4160520"/>
+            <a:ext cx="5120640" cy="777240"/>
           </a:xfrm>
           <a:prstGeom prst="rect">
             <a:avLst/>
@@ -2610,7 +2726,7 @@
                 <a:ea typeface="Calibri" pitchFamily="34" charset="-122"/>
                 <a:cs typeface="Calibri" pitchFamily="34" charset="-120"/>
               </a:rPr>
-              <a:t>Rural farmers cannot rely on cloud-only tools in remote highland areas</a:t>
+              <a:t>Rural highland farmers cannot rely on cloud tools. Need real offline capability.</a:t>
             </a:r>
             <a:endParaRPr lang="en-US" sz="1100" dirty="0"/>
           </a:p>
@@ -2624,12 +2740,12 @@
         </p:nvSpPr>
         <p:spPr>
           <a:xfrm>
-            <a:off x="6309360" y="3566160"/>
-            <a:ext cx="5486400" cy="1463040"/>
+            <a:off x="6309360" y="3611880"/>
+            <a:ext cx="5486400" cy="1508760"/>
           </a:xfrm>
           <a:prstGeom prst="roundRect">
             <a:avLst>
-              <a:gd name="adj" fmla="val 7500"/>
+              <a:gd name="adj" fmla="val 7273"/>
             </a:avLst>
           </a:prstGeom>
           <a:solidFill>
@@ -2651,7 +2767,7 @@
         </p:nvSpPr>
         <p:spPr>
           <a:xfrm>
-            <a:off x="6492240" y="3703320"/>
+            <a:off x="6492240" y="3749040"/>
             <a:ext cx="5120640" cy="365760"/>
           </a:xfrm>
           <a:prstGeom prst="rect">
@@ -2676,7 +2792,7 @@
                 <a:ea typeface="Calibri" pitchFamily="34" charset="-122"/>
                 <a:cs typeface="Calibri" pitchFamily="34" charset="-120"/>
               </a:rPr>
-              <a:t>🗣️ Language barrier</a:t>
+              <a:t>🗣️ Language barrier ignored</a:t>
             </a:r>
             <a:endParaRPr lang="en-US" sz="1400" dirty="0"/>
           </a:p>
@@ -2690,8 +2806,8 @@
         </p:nvSpPr>
         <p:spPr>
           <a:xfrm>
-            <a:off x="6492240" y="4114800"/>
-            <a:ext cx="5120640" cy="731520"/>
+            <a:off x="6492240" y="4160520"/>
+            <a:ext cx="5120640" cy="777240"/>
           </a:xfrm>
           <a:prstGeom prst="rect">
             <a:avLst/>
@@ -2715,7 +2831,7 @@
                 <a:ea typeface="Calibri" pitchFamily="34" charset="-122"/>
                 <a:cs typeface="Calibri" pitchFamily="34" charset="-120"/>
               </a:rPr>
-              <a:t>Most tools are English-only. Ethiopia has 80+ languages. Farmers are left behind.</a:t>
+              <a:t>80+ Ethiopian languages. Tools English-only. Farmers in Somali, Afar regions left behind.</a:t>
             </a:r>
             <a:endParaRPr lang="en-US" sz="1100" dirty="0"/>
           </a:p>
@@ -2826,23 +2942,23 @@
         <p:spPr>
           <a:xfrm>
             <a:off x="457200" y="822960"/>
-            <a:ext cx="11247120" cy="640080"/>
-          </a:xfrm>
-          <a:prstGeom prst="rect">
-            <a:avLst/>
-          </a:prstGeom>
-          <a:noFill/>
-          <a:ln/>
-        </p:spPr>
-        <p:txBody>
-          <a:bodyPr wrap="square" rtlCol="0" anchor="ctr"/>
-          <a:lstStyle/>
-          <a:p>
-            <a:pPr indent="0" marL="0">
-              <a:buNone/>
-            </a:pPr>
-            <a:r>
-              <a:rPr lang="en-US" sz="2800" b="1" dirty="0">
+            <a:ext cx="11247120" cy="594360"/>
+          </a:xfrm>
+          <a:prstGeom prst="rect">
+            <a:avLst/>
+          </a:prstGeom>
+          <a:noFill/>
+          <a:ln/>
+        </p:spPr>
+        <p:txBody>
+          <a:bodyPr wrap="square" rtlCol="0" anchor="ctr"/>
+          <a:lstStyle/>
+          <a:p>
+            <a:pPr indent="0" marL="0">
+              <a:buNone/>
+            </a:pPr>
+            <a:r>
+              <a:rPr lang="en-US" sz="2600" b="1" dirty="0">
                 <a:solidFill>
                   <a:srgbClr val="FFFFFF"/>
                 </a:solidFill>
@@ -2850,9 +2966,9 @@
                 <a:ea typeface="Georgia" pitchFamily="34" charset="-122"/>
                 <a:cs typeface="Georgia" pitchFamily="34" charset="-120"/>
               </a:rPr>
-              <a:t>SebilAI — Built Specifically for Ethiopia</a:t>
-            </a:r>
-            <a:endParaRPr lang="en-US" sz="2800" dirty="0"/>
+              <a:t>SebilAI — Purpose-Built for Ethiopia's 8 Major Crops</a:t>
+            </a:r>
+            <a:endParaRPr lang="en-US" sz="2600" dirty="0"/>
           </a:p>
         </p:txBody>
       </p:sp>
@@ -2865,11 +2981,11 @@
         <p:spPr>
           <a:xfrm>
             <a:off x="365760" y="1691640"/>
-            <a:ext cx="3657600" cy="1325880"/>
+            <a:ext cx="3657600" cy="1353312"/>
           </a:xfrm>
           <a:prstGeom prst="roundRect">
             <a:avLst>
-              <a:gd name="adj" fmla="val 6897"/>
+              <a:gd name="adj" fmla="val 6757"/>
             </a:avLst>
           </a:prstGeom>
           <a:solidFill>
@@ -2931,7 +3047,7 @@
         <p:spPr>
           <a:xfrm>
             <a:off x="502920" y="2167128"/>
-            <a:ext cx="3383280" cy="685800"/>
+            <a:ext cx="3383280" cy="713232"/>
           </a:xfrm>
           <a:prstGeom prst="rect">
             <a:avLst/>
@@ -2955,7 +3071,7 @@
                 <a:ea typeface="Calibri" pitchFamily="34" charset="-122"/>
                 <a:cs typeface="Calibri" pitchFamily="34" charset="-120"/>
               </a:rPr>
-              <a:t>Groq Llama 4 Scout → OpenRouter → Gemini. Never fails. Vision models.</a:t>
+              <a:t>Groq Llama 4 Scout → OpenRouter → Gemini. Vision models. Never fails.</a:t>
             </a:r>
             <a:endParaRPr lang="en-US" sz="950" dirty="0"/>
           </a:p>
@@ -2970,11 +3086,11 @@
         <p:spPr>
           <a:xfrm>
             <a:off x="4297680" y="1691640"/>
-            <a:ext cx="3657600" cy="1325880"/>
+            <a:ext cx="3657600" cy="1353312"/>
           </a:xfrm>
           <a:prstGeom prst="roundRect">
             <a:avLst>
-              <a:gd name="adj" fmla="val 6897"/>
+              <a:gd name="adj" fmla="val 6757"/>
             </a:avLst>
           </a:prstGeom>
           <a:solidFill>
@@ -3036,7 +3152,7 @@
         <p:spPr>
           <a:xfrm>
             <a:off x="4434840" y="2167128"/>
-            <a:ext cx="3383280" cy="685800"/>
+            <a:ext cx="3383280" cy="713232"/>
           </a:xfrm>
           <a:prstGeom prst="rect">
             <a:avLst/>
@@ -3060,7 +3176,7 @@
                 <a:ea typeface="Calibri" pitchFamily="34" charset="-122"/>
                 <a:cs typeface="Calibri" pitchFamily="34" charset="-120"/>
               </a:rPr>
-              <a:t>8 crops fully diagnosed without internet. Works in remote areas.</a:t>
+              <a:t>8 crops. Zero internet needed. Works in remote highlands.</a:t>
             </a:r>
             <a:endParaRPr lang="en-US" sz="950" dirty="0"/>
           </a:p>
@@ -3075,11 +3191,11 @@
         <p:spPr>
           <a:xfrm>
             <a:off x="8229600" y="1691640"/>
-            <a:ext cx="3657600" cy="1325880"/>
+            <a:ext cx="3657600" cy="1353312"/>
           </a:xfrm>
           <a:prstGeom prst="roundRect">
             <a:avLst>
-              <a:gd name="adj" fmla="val 6897"/>
+              <a:gd name="adj" fmla="val 6757"/>
             </a:avLst>
           </a:prstGeom>
           <a:solidFill>
@@ -3126,7 +3242,7 @@
                 <a:ea typeface="Calibri" pitchFamily="34" charset="-122"/>
                 <a:cs typeface="Calibri" pitchFamily="34" charset="-120"/>
               </a:rPr>
-              <a:t>🛰️ Satellite NDVI</a:t>
+              <a:t>🛰️ Real Satellite Data</a:t>
             </a:r>
             <a:endParaRPr lang="en-US" sz="1200" dirty="0"/>
           </a:p>
@@ -3141,7 +3257,7 @@
         <p:spPr>
           <a:xfrm>
             <a:off x="8366760" y="2167128"/>
-            <a:ext cx="3383280" cy="685800"/>
+            <a:ext cx="3383280" cy="713232"/>
           </a:xfrm>
           <a:prstGeom prst="rect">
             <a:avLst/>
@@ -3165,7 +3281,7 @@
                 <a:ea typeface="Calibri" pitchFamily="34" charset="-122"/>
                 <a:cs typeface="Calibri" pitchFamily="34" charset="-120"/>
               </a:rPr>
-              <a:t>Google Earth Engine Sentinel-2 real-time crop health monitoring</a:t>
+              <a:t>GEE Sentinel-2 NDVI · JWT auth · Crop-specific risk thresholds</a:t>
             </a:r>
             <a:endParaRPr lang="en-US" sz="950" dirty="0"/>
           </a:p>
@@ -3179,12 +3295,12 @@
         </p:nvSpPr>
         <p:spPr>
           <a:xfrm>
-            <a:off x="365760" y="3154680"/>
-            <a:ext cx="3657600" cy="1325880"/>
+            <a:off x="365760" y="3172968"/>
+            <a:ext cx="3657600" cy="1353312"/>
           </a:xfrm>
           <a:prstGeom prst="roundRect">
             <a:avLst>
-              <a:gd name="adj" fmla="val 6897"/>
+              <a:gd name="adj" fmla="val 6757"/>
             </a:avLst>
           </a:prstGeom>
           <a:solidFill>
@@ -3206,7 +3322,7 @@
         </p:nvSpPr>
         <p:spPr>
           <a:xfrm>
-            <a:off x="502920" y="3264408"/>
+            <a:off x="502920" y="3282696"/>
             <a:ext cx="3383280" cy="320040"/>
           </a:xfrm>
           <a:prstGeom prst="rect">
@@ -3245,8 +3361,8 @@
         </p:nvSpPr>
         <p:spPr>
           <a:xfrm>
-            <a:off x="502920" y="3630168"/>
-            <a:ext cx="3383280" cy="685800"/>
+            <a:off x="502920" y="3648456"/>
+            <a:ext cx="3383280" cy="713232"/>
           </a:xfrm>
           <a:prstGeom prst="rect">
             <a:avLst/>
@@ -3284,12 +3400,12 @@
         </p:nvSpPr>
         <p:spPr>
           <a:xfrm>
-            <a:off x="4297680" y="3154680"/>
-            <a:ext cx="3657600" cy="1325880"/>
+            <a:off x="4297680" y="3172968"/>
+            <a:ext cx="3657600" cy="1353312"/>
           </a:xfrm>
           <a:prstGeom prst="roundRect">
             <a:avLst>
-              <a:gd name="adj" fmla="val 6897"/>
+              <a:gd name="adj" fmla="val 6757"/>
             </a:avLst>
           </a:prstGeom>
           <a:solidFill>
@@ -3311,7 +3427,7 @@
         </p:nvSpPr>
         <p:spPr>
           <a:xfrm>
-            <a:off x="4434840" y="3264408"/>
+            <a:off x="4434840" y="3282696"/>
             <a:ext cx="3383280" cy="320040"/>
           </a:xfrm>
           <a:prstGeom prst="rect">
@@ -3336,7 +3452,7 @@
                 <a:ea typeface="Calibri" pitchFamily="34" charset="-122"/>
                 <a:cs typeface="Calibri" pitchFamily="34" charset="-120"/>
               </a:rPr>
-              <a:t>🔔 Push + SMS Alerts</a:t>
+              <a:t>🔔 Auto Push + SMS</a:t>
             </a:r>
             <a:endParaRPr lang="en-US" sz="1200" dirty="0"/>
           </a:p>
@@ -3350,8 +3466,8 @@
         </p:nvSpPr>
         <p:spPr>
           <a:xfrm>
-            <a:off x="4434840" y="3630168"/>
-            <a:ext cx="3383280" cy="685800"/>
+            <a:off x="4434840" y="3648456"/>
+            <a:ext cx="3383280" cy="713232"/>
           </a:xfrm>
           <a:prstGeom prst="rect">
             <a:avLst/>
@@ -3375,7 +3491,7 @@
                 <a:ea typeface="Calibri" pitchFamily="34" charset="-122"/>
                 <a:cs typeface="Calibri" pitchFamily="34" charset="-120"/>
               </a:rPr>
-              <a:t>Disease alerts via push notification and SMS. Auto-sends daily.</a:t>
+              <a:t>Daily disease alerts. Farmer registers once. Server sends forever.</a:t>
             </a:r>
             <a:endParaRPr lang="en-US" sz="950" dirty="0"/>
           </a:p>
@@ -3389,12 +3505,12 @@
         </p:nvSpPr>
         <p:spPr>
           <a:xfrm>
-            <a:off x="8229600" y="3154680"/>
-            <a:ext cx="3657600" cy="1325880"/>
+            <a:off x="8229600" y="3172968"/>
+            <a:ext cx="3657600" cy="1353312"/>
           </a:xfrm>
           <a:prstGeom prst="roundRect">
             <a:avLst>
-              <a:gd name="adj" fmla="val 6897"/>
+              <a:gd name="adj" fmla="val 6757"/>
             </a:avLst>
           </a:prstGeom>
           <a:solidFill>
@@ -3416,7 +3532,7 @@
         </p:nvSpPr>
         <p:spPr>
           <a:xfrm>
-            <a:off x="8366760" y="3264408"/>
+            <a:off x="8366760" y="3282696"/>
             <a:ext cx="3383280" cy="320040"/>
           </a:xfrm>
           <a:prstGeom prst="rect">
@@ -3455,8 +3571,8 @@
         </p:nvSpPr>
         <p:spPr>
           <a:xfrm>
-            <a:off x="8366760" y="3630168"/>
-            <a:ext cx="3383280" cy="685800"/>
+            <a:off x="8366760" y="3648456"/>
+            <a:ext cx="3383280" cy="713232"/>
           </a:xfrm>
           <a:prstGeom prst="rect">
             <a:avLst/>
@@ -3480,7 +3596,7 @@
                 <a:ea typeface="Calibri" pitchFamily="34" charset="-122"/>
                 <a:cs typeface="Calibri" pitchFamily="34" charset="-120"/>
               </a:rPr>
-              <a:t>Data on device. GDPR compliant. Inline consent. No tracking.</a:t>
+              <a:t>Data on device. GDPR. Consent flow. No tracking. No ads. Ever.</a:t>
             </a:r>
             <a:endParaRPr lang="en-US" sz="950" dirty="0"/>
           </a:p>
@@ -3494,12 +3610,12 @@
         </p:nvSpPr>
         <p:spPr>
           <a:xfrm>
-            <a:off x="365760" y="4617720"/>
-            <a:ext cx="3657600" cy="1325880"/>
+            <a:off x="365760" y="4654296"/>
+            <a:ext cx="3657600" cy="1353312"/>
           </a:xfrm>
           <a:prstGeom prst="roundRect">
             <a:avLst>
-              <a:gd name="adj" fmla="val 6897"/>
+              <a:gd name="adj" fmla="val 6757"/>
             </a:avLst>
           </a:prstGeom>
           <a:solidFill>
@@ -3521,7 +3637,7 @@
         </p:nvSpPr>
         <p:spPr>
           <a:xfrm>
-            <a:off x="502920" y="4727448"/>
+            <a:off x="502920" y="4764024"/>
             <a:ext cx="3383280" cy="320040"/>
           </a:xfrm>
           <a:prstGeom prst="rect">
@@ -3560,8 +3676,8 @@
         </p:nvSpPr>
         <p:spPr>
           <a:xfrm>
-            <a:off x="502920" y="5093208"/>
-            <a:ext cx="3383280" cy="685800"/>
+            <a:off x="502920" y="5129784"/>
+            <a:ext cx="3383280" cy="713232"/>
           </a:xfrm>
           <a:prstGeom prst="rect">
             <a:avLst/>
@@ -3585,7 +3701,7 @@
                 <a:ea typeface="Calibri" pitchFamily="34" charset="-122"/>
                 <a:cs typeface="Calibri" pitchFamily="34" charset="-120"/>
               </a:rPr>
-              <a:t>Tracks ETB loss prevented per farmer. Competition-ready metrics.</a:t>
+              <a:t>ETB loss prevented per farmer. Competition-ready metrics.</a:t>
             </a:r>
             <a:endParaRPr lang="en-US" sz="950" dirty="0"/>
           </a:p>
@@ -3599,12 +3715,12 @@
         </p:nvSpPr>
         <p:spPr>
           <a:xfrm>
-            <a:off x="4297680" y="4617720"/>
-            <a:ext cx="3657600" cy="1325880"/>
+            <a:off x="4297680" y="4654296"/>
+            <a:ext cx="3657600" cy="1353312"/>
           </a:xfrm>
           <a:prstGeom prst="roundRect">
             <a:avLst>
-              <a:gd name="adj" fmla="val 6897"/>
+              <a:gd name="adj" fmla="val 6757"/>
             </a:avLst>
           </a:prstGeom>
           <a:solidFill>
@@ -3626,7 +3742,7 @@
         </p:nvSpPr>
         <p:spPr>
           <a:xfrm>
-            <a:off x="4434840" y="4727448"/>
+            <a:off x="4434840" y="4764024"/>
             <a:ext cx="3383280" cy="320040"/>
           </a:xfrm>
           <a:prstGeom prst="rect">
@@ -3665,8 +3781,8 @@
         </p:nvSpPr>
         <p:spPr>
           <a:xfrm>
-            <a:off x="4434840" y="5093208"/>
-            <a:ext cx="3383280" cy="685800"/>
+            <a:off x="4434840" y="5129784"/>
+            <a:ext cx="3383280" cy="713232"/>
           </a:xfrm>
           <a:prstGeom prst="rect">
             <a:avLst/>
@@ -3690,7 +3806,7 @@
                 <a:ea typeface="Calibri" pitchFamily="34" charset="-122"/>
                 <a:cs typeface="Calibri" pitchFamily="34" charset="-120"/>
               </a:rPr>
-              <a:t>Every diagnosis linked to EIAR, Jimma University, CIMMYT research.</a:t>
+              <a:t>EIAR, Jimma University, CIMMYT. Every diagnosis linked to research.</a:t>
             </a:r>
             <a:endParaRPr lang="en-US" sz="950" dirty="0"/>
           </a:p>
@@ -3786,7 +3902,7 @@
                 <a:ea typeface="Calibri" pitchFamily="34" charset="-122"/>
                 <a:cs typeface="Calibri" pitchFamily="34" charset="-120"/>
               </a:rPr>
-              <a:t>RESEARCH FOUNDATION</a:t>
+              <a:t>6 LANGUAGES — COMPLETE COVERAGE</a:t>
             </a:r>
             <a:endParaRPr lang="en-US" sz="1400" dirty="0"/>
           </a:p>
@@ -3825,7 +3941,7 @@
                 <a:ea typeface="Georgia" pitchFamily="34" charset="-122"/>
                 <a:cs typeface="Georgia" pitchFamily="34" charset="-120"/>
               </a:rPr>
-              <a:t>23+ Ethiopian Peer-Reviewed Papers — 2019 to 2025</a:t>
+              <a:t>87M+ Ethiopian Farmers Reached in Their Own Language</a:t>
             </a:r>
             <a:endParaRPr lang="en-US" sz="2400" dirty="0"/>
           </a:p>
@@ -3839,12 +3955,12 @@
         </p:nvSpPr>
         <p:spPr>
           <a:xfrm>
-            <a:off x="365760" y="1508760"/>
-            <a:ext cx="5486400" cy="960120"/>
+            <a:off x="365760" y="1572768"/>
+            <a:ext cx="5486400" cy="1261872"/>
           </a:xfrm>
           <a:prstGeom prst="roundRect">
             <a:avLst>
-              <a:gd name="adj" fmla="val 7619"/>
+              <a:gd name="adj" fmla="val 7246"/>
             </a:avLst>
           </a:prstGeom>
           <a:solidFill>
@@ -3860,162 +3976,174 @@
       </p:sp>
       <p:sp>
         <p:nvSpPr>
-          <p:cNvPr id="6" name="Shape 4"/>
-          <p:cNvSpPr/>
-          <p:nvPr/>
-        </p:nvSpPr>
-        <p:spPr>
-          <a:xfrm>
-            <a:off x="365760" y="1508760"/>
-            <a:ext cx="640080" cy="960120"/>
+          <p:cNvPr id="6" name="Text 4"/>
+          <p:cNvSpPr/>
+          <p:nvPr/>
+        </p:nvSpPr>
+        <p:spPr>
+          <a:xfrm>
+            <a:off x="548640" y="1664208"/>
+            <a:ext cx="2743200" cy="347472"/>
+          </a:xfrm>
+          <a:prstGeom prst="rect">
+            <a:avLst/>
+          </a:prstGeom>
+          <a:noFill/>
+          <a:ln/>
+        </p:spPr>
+        <p:txBody>
+          <a:bodyPr wrap="square" rtlCol="0" anchor="ctr"/>
+          <a:lstStyle/>
+          <a:p>
+            <a:pPr indent="0" marL="0">
+              <a:buNone/>
+            </a:pPr>
+            <a:r>
+              <a:rPr lang="en-US" sz="1300" b="1" dirty="0">
+                <a:solidFill>
+                  <a:srgbClr val="1A3005"/>
+                </a:solidFill>
+                <a:latin typeface="Calibri" pitchFamily="34" charset="0"/>
+                <a:ea typeface="Calibri" pitchFamily="34" charset="-122"/>
+                <a:cs typeface="Calibri" pitchFamily="34" charset="-120"/>
+              </a:rPr>
+              <a:t>🇬🇧 English</a:t>
+            </a:r>
+            <a:endParaRPr lang="en-US" sz="1300" dirty="0"/>
+          </a:p>
+        </p:txBody>
+      </p:sp>
+      <p:sp>
+        <p:nvSpPr>
+          <p:cNvPr id="7" name="Text 5"/>
+          <p:cNvSpPr/>
+          <p:nvPr/>
+        </p:nvSpPr>
+        <p:spPr>
+          <a:xfrm>
+            <a:off x="548640" y="2048256"/>
+            <a:ext cx="2560320" cy="256032"/>
+          </a:xfrm>
+          <a:prstGeom prst="rect">
+            <a:avLst/>
+          </a:prstGeom>
+          <a:noFill/>
+          <a:ln/>
+        </p:spPr>
+        <p:txBody>
+          <a:bodyPr wrap="square" rtlCol="0" anchor="ctr"/>
+          <a:lstStyle/>
+          <a:p>
+            <a:pPr indent="0" marL="0">
+              <a:buNone/>
+            </a:pPr>
+            <a:r>
+              <a:rPr lang="en-US" sz="1000" dirty="0">
+                <a:solidFill>
+                  <a:srgbClr val="666666"/>
+                </a:solidFill>
+                <a:latin typeface="Calibri" pitchFamily="34" charset="0"/>
+                <a:ea typeface="Calibri" pitchFamily="34" charset="-122"/>
+                <a:cs typeface="Calibri" pitchFamily="34" charset="-120"/>
+              </a:rPr>
+              <a:t>en · Official</a:t>
+            </a:r>
+            <a:endParaRPr lang="en-US" sz="1000" dirty="0"/>
+          </a:p>
+        </p:txBody>
+      </p:sp>
+      <p:sp>
+        <p:nvSpPr>
+          <p:cNvPr id="8" name="Text 6"/>
+          <p:cNvSpPr/>
+          <p:nvPr/>
+        </p:nvSpPr>
+        <p:spPr>
+          <a:xfrm>
+            <a:off x="548640" y="2322576"/>
+            <a:ext cx="2560320" cy="256032"/>
+          </a:xfrm>
+          <a:prstGeom prst="rect">
+            <a:avLst/>
+          </a:prstGeom>
+          <a:noFill/>
+          <a:ln/>
+        </p:spPr>
+        <p:txBody>
+          <a:bodyPr wrap="square" rtlCol="0" anchor="ctr"/>
+          <a:lstStyle/>
+          <a:p>
+            <a:pPr indent="0" marL="0">
+              <a:buNone/>
+            </a:pPr>
+            <a:r>
+              <a:rPr lang="en-US" sz="900" dirty="0">
+                <a:solidFill>
+                  <a:srgbClr val="2D6A0A"/>
+                </a:solidFill>
+                <a:latin typeface="Calibri" pitchFamily="34" charset="0"/>
+                <a:ea typeface="Calibri" pitchFamily="34" charset="-122"/>
+                <a:cs typeface="Calibri" pitchFamily="34" charset="-120"/>
+              </a:rPr>
+              <a:t>🔊 All browsers</a:t>
+            </a:r>
+            <a:endParaRPr lang="en-US" sz="900" dirty="0"/>
+          </a:p>
+        </p:txBody>
+      </p:sp>
+      <p:sp>
+        <p:nvSpPr>
+          <p:cNvPr id="9" name="Text 7"/>
+          <p:cNvSpPr/>
+          <p:nvPr/>
+        </p:nvSpPr>
+        <p:spPr>
+          <a:xfrm>
+            <a:off x="3291840" y="2048256"/>
+            <a:ext cx="2377440" cy="502920"/>
+          </a:xfrm>
+          <a:prstGeom prst="rect">
+            <a:avLst/>
+          </a:prstGeom>
+          <a:noFill/>
+          <a:ln/>
+        </p:spPr>
+        <p:txBody>
+          <a:bodyPr wrap="square" rtlCol="0" anchor="ctr"/>
+          <a:lstStyle/>
+          <a:p>
+            <a:pPr indent="0" marL="0">
+              <a:buNone/>
+            </a:pPr>
+            <a:r>
+              <a:rPr lang="en-US" sz="900" dirty="0">
+                <a:solidFill>
+                  <a:srgbClr val="555555"/>
+                </a:solidFill>
+                <a:latin typeface="Calibri" pitchFamily="34" charset="0"/>
+                <a:ea typeface="Calibri" pitchFamily="34" charset="-122"/>
+                <a:cs typeface="Calibri" pitchFamily="34" charset="-120"/>
+              </a:rPr>
+              <a:t>🎤 Native STT + TTS</a:t>
+            </a:r>
+            <a:endParaRPr lang="en-US" sz="900" dirty="0"/>
+          </a:p>
+        </p:txBody>
+      </p:sp>
+      <p:sp>
+        <p:nvSpPr>
+          <p:cNvPr id="10" name="Shape 8"/>
+          <p:cNvSpPr/>
+          <p:nvPr/>
+        </p:nvSpPr>
+        <p:spPr>
+          <a:xfrm>
+            <a:off x="6217920" y="1572768"/>
+            <a:ext cx="5486400" cy="1261872"/>
           </a:xfrm>
           <a:prstGeom prst="roundRect">
             <a:avLst>
-              <a:gd name="adj" fmla="val 11429"/>
-            </a:avLst>
-          </a:prstGeom>
-          <a:solidFill>
-            <a:srgbClr val="2D6A0A"/>
-          </a:solidFill>
-          <a:ln w="12700">
-            <a:solidFill>
-              <a:srgbClr val="2D6A0A"/>
-            </a:solidFill>
-            <a:prstDash val="solid"/>
-          </a:ln>
-        </p:spPr>
-      </p:sp>
-      <p:sp>
-        <p:nvSpPr>
-          <p:cNvPr id="7" name="Text 5"/>
-          <p:cNvSpPr/>
-          <p:nvPr/>
-        </p:nvSpPr>
-        <p:spPr>
-          <a:xfrm>
-            <a:off x="365760" y="1783080"/>
-            <a:ext cx="640080" cy="365760"/>
-          </a:xfrm>
-          <a:prstGeom prst="rect">
-            <a:avLst/>
-          </a:prstGeom>
-          <a:noFill/>
-          <a:ln/>
-        </p:spPr>
-        <p:txBody>
-          <a:bodyPr wrap="square" rtlCol="0" anchor="ctr"/>
-          <a:lstStyle/>
-          <a:p>
-            <a:pPr algn="ctr" indent="0" marL="0">
-              <a:buNone/>
-            </a:pPr>
-            <a:r>
-              <a:rPr lang="en-US" sz="900" b="1" dirty="0">
-                <a:solidFill>
-                  <a:srgbClr val="FFFFFF"/>
-                </a:solidFill>
-                <a:latin typeface="Calibri" pitchFamily="34" charset="0"/>
-                <a:ea typeface="Calibri" pitchFamily="34" charset="-122"/>
-                <a:cs typeface="Calibri" pitchFamily="34" charset="-120"/>
-              </a:rPr>
-              <a:t>Enset</a:t>
-            </a:r>
-            <a:endParaRPr lang="en-US" sz="900" dirty="0"/>
-          </a:p>
-        </p:txBody>
-      </p:sp>
-      <p:sp>
-        <p:nvSpPr>
-          <p:cNvPr id="8" name="Text 6"/>
-          <p:cNvSpPr/>
-          <p:nvPr/>
-        </p:nvSpPr>
-        <p:spPr>
-          <a:xfrm>
-            <a:off x="1097280" y="1600200"/>
-            <a:ext cx="4663440" cy="411480"/>
-          </a:xfrm>
-          <a:prstGeom prst="rect">
-            <a:avLst/>
-          </a:prstGeom>
-          <a:noFill/>
-          <a:ln/>
-        </p:spPr>
-        <p:txBody>
-          <a:bodyPr wrap="square" rtlCol="0" anchor="ctr"/>
-          <a:lstStyle/>
-          <a:p>
-            <a:pPr indent="0" marL="0">
-              <a:buNone/>
-            </a:pPr>
-            <a:r>
-              <a:rPr lang="en-US" sz="1100" b="1" dirty="0">
-                <a:solidFill>
-                  <a:srgbClr val="1A3005"/>
-                </a:solidFill>
-                <a:latin typeface="Calibri" pitchFamily="34" charset="0"/>
-                <a:ea typeface="Calibri" pitchFamily="34" charset="-122"/>
-                <a:cs typeface="Calibri" pitchFamily="34" charset="-120"/>
-              </a:rPr>
-              <a:t>Bacterial Wilt CNN detection (98.87% accuracy)</a:t>
-            </a:r>
-            <a:endParaRPr lang="en-US" sz="1100" dirty="0"/>
-          </a:p>
-        </p:txBody>
-      </p:sp>
-      <p:sp>
-        <p:nvSpPr>
-          <p:cNvPr id="9" name="Text 7"/>
-          <p:cNvSpPr/>
-          <p:nvPr/>
-        </p:nvSpPr>
-        <p:spPr>
-          <a:xfrm>
-            <a:off x="1097280" y="2039112"/>
-            <a:ext cx="4663440" cy="320040"/>
-          </a:xfrm>
-          <a:prstGeom prst="rect">
-            <a:avLst/>
-          </a:prstGeom>
-          <a:noFill/>
-          <a:ln/>
-        </p:spPr>
-        <p:txBody>
-          <a:bodyPr wrap="square" rtlCol="0" anchor="ctr"/>
-          <a:lstStyle/>
-          <a:p>
-            <a:pPr indent="0" marL="0">
-              <a:buNone/>
-            </a:pPr>
-            <a:r>
-              <a:rPr lang="en-US" sz="900" dirty="0">
-                <a:solidFill>
-                  <a:srgbClr val="888888"/>
-                </a:solidFill>
-                <a:latin typeface="Calibri" pitchFamily="34" charset="0"/>
-                <a:ea typeface="Calibri" pitchFamily="34" charset="-122"/>
-                <a:cs typeface="Calibri" pitchFamily="34" charset="-120"/>
-              </a:rPr>
-              <a:t>Jimma University, 2021</a:t>
-            </a:r>
-            <a:endParaRPr lang="en-US" sz="900" dirty="0"/>
-          </a:p>
-        </p:txBody>
-      </p:sp>
-      <p:sp>
-        <p:nvSpPr>
-          <p:cNvPr id="10" name="Shape 8"/>
-          <p:cNvSpPr/>
-          <p:nvPr/>
-        </p:nvSpPr>
-        <p:spPr>
-          <a:xfrm>
-            <a:off x="6217920" y="1508760"/>
-            <a:ext cx="5486400" cy="960120"/>
-          </a:xfrm>
-          <a:prstGeom prst="roundRect">
-            <a:avLst>
-              <a:gd name="adj" fmla="val 7619"/>
+              <a:gd name="adj" fmla="val 7246"/>
             </a:avLst>
           </a:prstGeom>
           <a:solidFill>
@@ -4031,162 +4159,174 @@
       </p:sp>
       <p:sp>
         <p:nvSpPr>
-          <p:cNvPr id="11" name="Shape 9"/>
-          <p:cNvSpPr/>
-          <p:nvPr/>
-        </p:nvSpPr>
-        <p:spPr>
-          <a:xfrm>
-            <a:off x="6217920" y="1508760"/>
-            <a:ext cx="640080" cy="960120"/>
+          <p:cNvPr id="11" name="Text 9"/>
+          <p:cNvSpPr/>
+          <p:nvPr/>
+        </p:nvSpPr>
+        <p:spPr>
+          <a:xfrm>
+            <a:off x="6400800" y="1664208"/>
+            <a:ext cx="2743200" cy="347472"/>
+          </a:xfrm>
+          <a:prstGeom prst="rect">
+            <a:avLst/>
+          </a:prstGeom>
+          <a:noFill/>
+          <a:ln/>
+        </p:spPr>
+        <p:txBody>
+          <a:bodyPr wrap="square" rtlCol="0" anchor="ctr"/>
+          <a:lstStyle/>
+          <a:p>
+            <a:pPr indent="0" marL="0">
+              <a:buNone/>
+            </a:pPr>
+            <a:r>
+              <a:rPr lang="en-US" sz="1300" b="1" dirty="0">
+                <a:solidFill>
+                  <a:srgbClr val="1A3005"/>
+                </a:solidFill>
+                <a:latin typeface="Calibri" pitchFamily="34" charset="0"/>
+                <a:ea typeface="Calibri" pitchFamily="34" charset="-122"/>
+                <a:cs typeface="Calibri" pitchFamily="34" charset="-120"/>
+              </a:rPr>
+              <a:t>🇪🇹 አማርኛ Amharic</a:t>
+            </a:r>
+            <a:endParaRPr lang="en-US" sz="1300" dirty="0"/>
+          </a:p>
+        </p:txBody>
+      </p:sp>
+      <p:sp>
+        <p:nvSpPr>
+          <p:cNvPr id="12" name="Text 10"/>
+          <p:cNvSpPr/>
+          <p:nvPr/>
+        </p:nvSpPr>
+        <p:spPr>
+          <a:xfrm>
+            <a:off x="6400800" y="2048256"/>
+            <a:ext cx="2560320" cy="256032"/>
+          </a:xfrm>
+          <a:prstGeom prst="rect">
+            <a:avLst/>
+          </a:prstGeom>
+          <a:noFill/>
+          <a:ln/>
+        </p:spPr>
+        <p:txBody>
+          <a:bodyPr wrap="square" rtlCol="0" anchor="ctr"/>
+          <a:lstStyle/>
+          <a:p>
+            <a:pPr indent="0" marL="0">
+              <a:buNone/>
+            </a:pPr>
+            <a:r>
+              <a:rPr lang="en-US" sz="1000" dirty="0">
+                <a:solidFill>
+                  <a:srgbClr val="666666"/>
+                </a:solidFill>
+                <a:latin typeface="Calibri" pitchFamily="34" charset="0"/>
+                <a:ea typeface="Calibri" pitchFamily="34" charset="-122"/>
+                <a:cs typeface="Calibri" pitchFamily="34" charset="-120"/>
+              </a:rPr>
+              <a:t>am · 32M speakers</a:t>
+            </a:r>
+            <a:endParaRPr lang="en-US" sz="1000" dirty="0"/>
+          </a:p>
+        </p:txBody>
+      </p:sp>
+      <p:sp>
+        <p:nvSpPr>
+          <p:cNvPr id="13" name="Text 11"/>
+          <p:cNvSpPr/>
+          <p:nvPr/>
+        </p:nvSpPr>
+        <p:spPr>
+          <a:xfrm>
+            <a:off x="6400800" y="2322576"/>
+            <a:ext cx="2560320" cy="256032"/>
+          </a:xfrm>
+          <a:prstGeom prst="rect">
+            <a:avLst/>
+          </a:prstGeom>
+          <a:noFill/>
+          <a:ln/>
+        </p:spPr>
+        <p:txBody>
+          <a:bodyPr wrap="square" rtlCol="0" anchor="ctr"/>
+          <a:lstStyle/>
+          <a:p>
+            <a:pPr indent="0" marL="0">
+              <a:buNone/>
+            </a:pPr>
+            <a:r>
+              <a:rPr lang="en-US" sz="900" dirty="0">
+                <a:solidFill>
+                  <a:srgbClr val="2D6A0A"/>
+                </a:solidFill>
+                <a:latin typeface="Calibri" pitchFamily="34" charset="0"/>
+                <a:ea typeface="Calibri" pitchFamily="34" charset="-122"/>
+                <a:cs typeface="Calibri" pitchFamily="34" charset="-120"/>
+              </a:rPr>
+              <a:t>🔊 Google TTS</a:t>
+            </a:r>
+            <a:endParaRPr lang="en-US" sz="900" dirty="0"/>
+          </a:p>
+        </p:txBody>
+      </p:sp>
+      <p:sp>
+        <p:nvSpPr>
+          <p:cNvPr id="14" name="Text 12"/>
+          <p:cNvSpPr/>
+          <p:nvPr/>
+        </p:nvSpPr>
+        <p:spPr>
+          <a:xfrm>
+            <a:off x="9144000" y="2048256"/>
+            <a:ext cx="2377440" cy="502920"/>
+          </a:xfrm>
+          <a:prstGeom prst="rect">
+            <a:avLst/>
+          </a:prstGeom>
+          <a:noFill/>
+          <a:ln/>
+        </p:spPr>
+        <p:txBody>
+          <a:bodyPr wrap="square" rtlCol="0" anchor="ctr"/>
+          <a:lstStyle/>
+          <a:p>
+            <a:pPr indent="0" marL="0">
+              <a:buNone/>
+            </a:pPr>
+            <a:r>
+              <a:rPr lang="en-US" sz="900" dirty="0">
+                <a:solidFill>
+                  <a:srgbClr val="555555"/>
+                </a:solidFill>
+                <a:latin typeface="Calibri" pitchFamily="34" charset="0"/>
+                <a:ea typeface="Calibri" pitchFamily="34" charset="-122"/>
+                <a:cs typeface="Calibri" pitchFamily="34" charset="-120"/>
+              </a:rPr>
+              <a:t>🎤 English STT + AI translate</a:t>
+            </a:r>
+            <a:endParaRPr lang="en-US" sz="900" dirty="0"/>
+          </a:p>
+        </p:txBody>
+      </p:sp>
+      <p:sp>
+        <p:nvSpPr>
+          <p:cNvPr id="15" name="Shape 13"/>
+          <p:cNvSpPr/>
+          <p:nvPr/>
+        </p:nvSpPr>
+        <p:spPr>
+          <a:xfrm>
+            <a:off x="365760" y="2990088"/>
+            <a:ext cx="5486400" cy="1261872"/>
           </a:xfrm>
           <a:prstGeom prst="roundRect">
             <a:avLst>
-              <a:gd name="adj" fmla="val 11429"/>
-            </a:avLst>
-          </a:prstGeom>
-          <a:solidFill>
-            <a:srgbClr val="2D6A0A"/>
-          </a:solidFill>
-          <a:ln w="12700">
-            <a:solidFill>
-              <a:srgbClr val="2D6A0A"/>
-            </a:solidFill>
-            <a:prstDash val="solid"/>
-          </a:ln>
-        </p:spPr>
-      </p:sp>
-      <p:sp>
-        <p:nvSpPr>
-          <p:cNvPr id="12" name="Text 10"/>
-          <p:cNvSpPr/>
-          <p:nvPr/>
-        </p:nvSpPr>
-        <p:spPr>
-          <a:xfrm>
-            <a:off x="6217920" y="1783080"/>
-            <a:ext cx="640080" cy="365760"/>
-          </a:xfrm>
-          <a:prstGeom prst="rect">
-            <a:avLst/>
-          </a:prstGeom>
-          <a:noFill/>
-          <a:ln/>
-        </p:spPr>
-        <p:txBody>
-          <a:bodyPr wrap="square" rtlCol="0" anchor="ctr"/>
-          <a:lstStyle/>
-          <a:p>
-            <a:pPr algn="ctr" indent="0" marL="0">
-              <a:buNone/>
-            </a:pPr>
-            <a:r>
-              <a:rPr lang="en-US" sz="900" b="1" dirty="0">
-                <a:solidFill>
-                  <a:srgbClr val="FFFFFF"/>
-                </a:solidFill>
-                <a:latin typeface="Calibri" pitchFamily="34" charset="0"/>
-                <a:ea typeface="Calibri" pitchFamily="34" charset="-122"/>
-                <a:cs typeface="Calibri" pitchFamily="34" charset="-120"/>
-              </a:rPr>
-              <a:t>Enset</a:t>
-            </a:r>
-            <a:endParaRPr lang="en-US" sz="900" dirty="0"/>
-          </a:p>
-        </p:txBody>
-      </p:sp>
-      <p:sp>
-        <p:nvSpPr>
-          <p:cNvPr id="13" name="Text 11"/>
-          <p:cNvSpPr/>
-          <p:nvPr/>
-        </p:nvSpPr>
-        <p:spPr>
-          <a:xfrm>
-            <a:off x="6949440" y="1600200"/>
-            <a:ext cx="4663440" cy="411480"/>
-          </a:xfrm>
-          <a:prstGeom prst="rect">
-            <a:avLst/>
-          </a:prstGeom>
-          <a:noFill/>
-          <a:ln/>
-        </p:spPr>
-        <p:txBody>
-          <a:bodyPr wrap="square" rtlCol="0" anchor="ctr"/>
-          <a:lstStyle/>
-          <a:p>
-            <a:pPr indent="0" marL="0">
-              <a:buNone/>
-            </a:pPr>
-            <a:r>
-              <a:rPr lang="en-US" sz="1100" b="1" dirty="0">
-                <a:solidFill>
-                  <a:srgbClr val="1A3005"/>
-                </a:solidFill>
-                <a:latin typeface="Calibri" pitchFamily="34" charset="0"/>
-                <a:ea typeface="Calibri" pitchFamily="34" charset="-122"/>
-                <a:cs typeface="Calibri" pitchFamily="34" charset="-120"/>
-              </a:rPr>
-              <a:t>Community EBW Management — 65.7% → 10.1% loss</a:t>
-            </a:r>
-            <a:endParaRPr lang="en-US" sz="1100" dirty="0"/>
-          </a:p>
-        </p:txBody>
-      </p:sp>
-      <p:sp>
-        <p:nvSpPr>
-          <p:cNvPr id="14" name="Text 12"/>
-          <p:cNvSpPr/>
-          <p:nvPr/>
-        </p:nvSpPr>
-        <p:spPr>
-          <a:xfrm>
-            <a:off x="6949440" y="2039112"/>
-            <a:ext cx="4663440" cy="320040"/>
-          </a:xfrm>
-          <a:prstGeom prst="rect">
-            <a:avLst/>
-          </a:prstGeom>
-          <a:noFill/>
-          <a:ln/>
-        </p:spPr>
-        <p:txBody>
-          <a:bodyPr wrap="square" rtlCol="0" anchor="ctr"/>
-          <a:lstStyle/>
-          <a:p>
-            <a:pPr indent="0" marL="0">
-              <a:buNone/>
-            </a:pPr>
-            <a:r>
-              <a:rPr lang="en-US" sz="900" dirty="0">
-                <a:solidFill>
-                  <a:srgbClr val="888888"/>
-                </a:solidFill>
-                <a:latin typeface="Calibri" pitchFamily="34" charset="0"/>
-                <a:ea typeface="Calibri" pitchFamily="34" charset="-122"/>
-                <a:cs typeface="Calibri" pitchFamily="34" charset="-120"/>
-              </a:rPr>
-              <a:t>Journal Life Sci Biomed, 2024</a:t>
-            </a:r>
-            <a:endParaRPr lang="en-US" sz="900" dirty="0"/>
-          </a:p>
-        </p:txBody>
-      </p:sp>
-      <p:sp>
-        <p:nvSpPr>
-          <p:cNvPr id="15" name="Shape 13"/>
-          <p:cNvSpPr/>
-          <p:nvPr/>
-        </p:nvSpPr>
-        <p:spPr>
-          <a:xfrm>
-            <a:off x="365760" y="2606040"/>
-            <a:ext cx="5486400" cy="960120"/>
-          </a:xfrm>
-          <a:prstGeom prst="roundRect">
-            <a:avLst>
-              <a:gd name="adj" fmla="val 7619"/>
+              <a:gd name="adj" fmla="val 7246"/>
             </a:avLst>
           </a:prstGeom>
           <a:solidFill>
@@ -4202,162 +4342,174 @@
       </p:sp>
       <p:sp>
         <p:nvSpPr>
-          <p:cNvPr id="16" name="Shape 14"/>
-          <p:cNvSpPr/>
-          <p:nvPr/>
-        </p:nvSpPr>
-        <p:spPr>
-          <a:xfrm>
-            <a:off x="365760" y="2606040"/>
-            <a:ext cx="640080" cy="960120"/>
+          <p:cNvPr id="16" name="Text 14"/>
+          <p:cNvSpPr/>
+          <p:nvPr/>
+        </p:nvSpPr>
+        <p:spPr>
+          <a:xfrm>
+            <a:off x="548640" y="3081528"/>
+            <a:ext cx="2743200" cy="347472"/>
+          </a:xfrm>
+          <a:prstGeom prst="rect">
+            <a:avLst/>
+          </a:prstGeom>
+          <a:noFill/>
+          <a:ln/>
+        </p:spPr>
+        <p:txBody>
+          <a:bodyPr wrap="square" rtlCol="0" anchor="ctr"/>
+          <a:lstStyle/>
+          <a:p>
+            <a:pPr indent="0" marL="0">
+              <a:buNone/>
+            </a:pPr>
+            <a:r>
+              <a:rPr lang="en-US" sz="1300" b="1" dirty="0">
+                <a:solidFill>
+                  <a:srgbClr val="1A3005"/>
+                </a:solidFill>
+                <a:latin typeface="Calibri" pitchFamily="34" charset="0"/>
+                <a:ea typeface="Calibri" pitchFamily="34" charset="-122"/>
+                <a:cs typeface="Calibri" pitchFamily="34" charset="-120"/>
+              </a:rPr>
+              <a:t>🇪🇹 Afaan Oromo</a:t>
+            </a:r>
+            <a:endParaRPr lang="en-US" sz="1300" dirty="0"/>
+          </a:p>
+        </p:txBody>
+      </p:sp>
+      <p:sp>
+        <p:nvSpPr>
+          <p:cNvPr id="17" name="Text 15"/>
+          <p:cNvSpPr/>
+          <p:nvPr/>
+        </p:nvSpPr>
+        <p:spPr>
+          <a:xfrm>
+            <a:off x="548640" y="3465576"/>
+            <a:ext cx="2560320" cy="256032"/>
+          </a:xfrm>
+          <a:prstGeom prst="rect">
+            <a:avLst/>
+          </a:prstGeom>
+          <a:noFill/>
+          <a:ln/>
+        </p:spPr>
+        <p:txBody>
+          <a:bodyPr wrap="square" rtlCol="0" anchor="ctr"/>
+          <a:lstStyle/>
+          <a:p>
+            <a:pPr indent="0" marL="0">
+              <a:buNone/>
+            </a:pPr>
+            <a:r>
+              <a:rPr lang="en-US" sz="1000" dirty="0">
+                <a:solidFill>
+                  <a:srgbClr val="666666"/>
+                </a:solidFill>
+                <a:latin typeface="Calibri" pitchFamily="34" charset="0"/>
+                <a:ea typeface="Calibri" pitchFamily="34" charset="-122"/>
+                <a:cs typeface="Calibri" pitchFamily="34" charset="-120"/>
+              </a:rPr>
+              <a:t>om · 40M speakers</a:t>
+            </a:r>
+            <a:endParaRPr lang="en-US" sz="1000" dirty="0"/>
+          </a:p>
+        </p:txBody>
+      </p:sp>
+      <p:sp>
+        <p:nvSpPr>
+          <p:cNvPr id="18" name="Text 16"/>
+          <p:cNvSpPr/>
+          <p:nvPr/>
+        </p:nvSpPr>
+        <p:spPr>
+          <a:xfrm>
+            <a:off x="548640" y="3739896"/>
+            <a:ext cx="2560320" cy="256032"/>
+          </a:xfrm>
+          <a:prstGeom prst="rect">
+            <a:avLst/>
+          </a:prstGeom>
+          <a:noFill/>
+          <a:ln/>
+        </p:spPr>
+        <p:txBody>
+          <a:bodyPr wrap="square" rtlCol="0" anchor="ctr"/>
+          <a:lstStyle/>
+          <a:p>
+            <a:pPr indent="0" marL="0">
+              <a:buNone/>
+            </a:pPr>
+            <a:r>
+              <a:rPr lang="en-US" sz="900" dirty="0">
+                <a:solidFill>
+                  <a:srgbClr val="2D6A0A"/>
+                </a:solidFill>
+                <a:latin typeface="Calibri" pitchFamily="34" charset="0"/>
+                <a:ea typeface="Calibri" pitchFamily="34" charset="-122"/>
+                <a:cs typeface="Calibri" pitchFamily="34" charset="-120"/>
+              </a:rPr>
+              <a:t>🔊 Google TTS</a:t>
+            </a:r>
+            <a:endParaRPr lang="en-US" sz="900" dirty="0"/>
+          </a:p>
+        </p:txBody>
+      </p:sp>
+      <p:sp>
+        <p:nvSpPr>
+          <p:cNvPr id="19" name="Text 17"/>
+          <p:cNvSpPr/>
+          <p:nvPr/>
+        </p:nvSpPr>
+        <p:spPr>
+          <a:xfrm>
+            <a:off x="3291840" y="3465576"/>
+            <a:ext cx="2377440" cy="502920"/>
+          </a:xfrm>
+          <a:prstGeom prst="rect">
+            <a:avLst/>
+          </a:prstGeom>
+          <a:noFill/>
+          <a:ln/>
+        </p:spPr>
+        <p:txBody>
+          <a:bodyPr wrap="square" rtlCol="0" anchor="ctr"/>
+          <a:lstStyle/>
+          <a:p>
+            <a:pPr indent="0" marL="0">
+              <a:buNone/>
+            </a:pPr>
+            <a:r>
+              <a:rPr lang="en-US" sz="900" dirty="0">
+                <a:solidFill>
+                  <a:srgbClr val="555555"/>
+                </a:solidFill>
+                <a:latin typeface="Calibri" pitchFamily="34" charset="0"/>
+                <a:ea typeface="Calibri" pitchFamily="34" charset="-122"/>
+                <a:cs typeface="Calibri" pitchFamily="34" charset="-120"/>
+              </a:rPr>
+              <a:t>🎤 English STT + AI translate</a:t>
+            </a:r>
+            <a:endParaRPr lang="en-US" sz="900" dirty="0"/>
+          </a:p>
+        </p:txBody>
+      </p:sp>
+      <p:sp>
+        <p:nvSpPr>
+          <p:cNvPr id="20" name="Shape 18"/>
+          <p:cNvSpPr/>
+          <p:nvPr/>
+        </p:nvSpPr>
+        <p:spPr>
+          <a:xfrm>
+            <a:off x="6217920" y="2990088"/>
+            <a:ext cx="5486400" cy="1261872"/>
           </a:xfrm>
           <a:prstGeom prst="roundRect">
             <a:avLst>
-              <a:gd name="adj" fmla="val 11429"/>
-            </a:avLst>
-          </a:prstGeom>
-          <a:solidFill>
-            <a:srgbClr val="2D6A0A"/>
-          </a:solidFill>
-          <a:ln w="12700">
-            <a:solidFill>
-              <a:srgbClr val="2D6A0A"/>
-            </a:solidFill>
-            <a:prstDash val="solid"/>
-          </a:ln>
-        </p:spPr>
-      </p:sp>
-      <p:sp>
-        <p:nvSpPr>
-          <p:cNvPr id="17" name="Text 15"/>
-          <p:cNvSpPr/>
-          <p:nvPr/>
-        </p:nvSpPr>
-        <p:spPr>
-          <a:xfrm>
-            <a:off x="365760" y="2880360"/>
-            <a:ext cx="640080" cy="365760"/>
-          </a:xfrm>
-          <a:prstGeom prst="rect">
-            <a:avLst/>
-          </a:prstGeom>
-          <a:noFill/>
-          <a:ln/>
-        </p:spPr>
-        <p:txBody>
-          <a:bodyPr wrap="square" rtlCol="0" anchor="ctr"/>
-          <a:lstStyle/>
-          <a:p>
-            <a:pPr algn="ctr" indent="0" marL="0">
-              <a:buNone/>
-            </a:pPr>
-            <a:r>
-              <a:rPr lang="en-US" sz="900" b="1" dirty="0">
-                <a:solidFill>
-                  <a:srgbClr val="FFFFFF"/>
-                </a:solidFill>
-                <a:latin typeface="Calibri" pitchFamily="34" charset="0"/>
-                <a:ea typeface="Calibri" pitchFamily="34" charset="-122"/>
-                <a:cs typeface="Calibri" pitchFamily="34" charset="-120"/>
-              </a:rPr>
-              <a:t>Enset</a:t>
-            </a:r>
-            <a:endParaRPr lang="en-US" sz="900" dirty="0"/>
-          </a:p>
-        </p:txBody>
-      </p:sp>
-      <p:sp>
-        <p:nvSpPr>
-          <p:cNvPr id="18" name="Text 16"/>
-          <p:cNvSpPr/>
-          <p:nvPr/>
-        </p:nvSpPr>
-        <p:spPr>
-          <a:xfrm>
-            <a:off x="1097280" y="2697480"/>
-            <a:ext cx="4663440" cy="411480"/>
-          </a:xfrm>
-          <a:prstGeom prst="rect">
-            <a:avLst/>
-          </a:prstGeom>
-          <a:noFill/>
-          <a:ln/>
-        </p:spPr>
-        <p:txBody>
-          <a:bodyPr wrap="square" rtlCol="0" anchor="ctr"/>
-          <a:lstStyle/>
-          <a:p>
-            <a:pPr indent="0" marL="0">
-              <a:buNone/>
-            </a:pPr>
-            <a:r>
-              <a:rPr lang="en-US" sz="1100" b="1" dirty="0">
-                <a:solidFill>
-                  <a:srgbClr val="1A3005"/>
-                </a:solidFill>
-                <a:latin typeface="Calibri" pitchFamily="34" charset="0"/>
-                <a:ea typeface="Calibri" pitchFamily="34" charset="-122"/>
-                <a:cs typeface="Calibri" pitchFamily="34" charset="-120"/>
-              </a:rPr>
-              <a:t>Economic Loss from Wilting Disease, Sidama</a:t>
-            </a:r>
-            <a:endParaRPr lang="en-US" sz="1100" dirty="0"/>
-          </a:p>
-        </p:txBody>
-      </p:sp>
-      <p:sp>
-        <p:nvSpPr>
-          <p:cNvPr id="19" name="Text 17"/>
-          <p:cNvSpPr/>
-          <p:nvPr/>
-        </p:nvSpPr>
-        <p:spPr>
-          <a:xfrm>
-            <a:off x="1097280" y="3136392"/>
-            <a:ext cx="4663440" cy="320040"/>
-          </a:xfrm>
-          <a:prstGeom prst="rect">
-            <a:avLst/>
-          </a:prstGeom>
-          <a:noFill/>
-          <a:ln/>
-        </p:spPr>
-        <p:txBody>
-          <a:bodyPr wrap="square" rtlCol="0" anchor="ctr"/>
-          <a:lstStyle/>
-          <a:p>
-            <a:pPr indent="0" marL="0">
-              <a:buNone/>
-            </a:pPr>
-            <a:r>
-              <a:rPr lang="en-US" sz="900" dirty="0">
-                <a:solidFill>
-                  <a:srgbClr val="888888"/>
-                </a:solidFill>
-                <a:latin typeface="Calibri" pitchFamily="34" charset="0"/>
-                <a:ea typeface="Calibri" pitchFamily="34" charset="-122"/>
-                <a:cs typeface="Calibri" pitchFamily="34" charset="-120"/>
-              </a:rPr>
-              <a:t>Trends Agric Economics, 2024</a:t>
-            </a:r>
-            <a:endParaRPr lang="en-US" sz="900" dirty="0"/>
-          </a:p>
-        </p:txBody>
-      </p:sp>
-      <p:sp>
-        <p:nvSpPr>
-          <p:cNvPr id="20" name="Shape 18"/>
-          <p:cNvSpPr/>
-          <p:nvPr/>
-        </p:nvSpPr>
-        <p:spPr>
-          <a:xfrm>
-            <a:off x="6217920" y="2606040"/>
-            <a:ext cx="5486400" cy="960120"/>
-          </a:xfrm>
-          <a:prstGeom prst="roundRect">
-            <a:avLst>
-              <a:gd name="adj" fmla="val 7619"/>
+              <a:gd name="adj" fmla="val 7246"/>
             </a:avLst>
           </a:prstGeom>
           <a:solidFill>
@@ -4373,26 +4525,182 @@
       </p:sp>
       <p:sp>
         <p:nvSpPr>
-          <p:cNvPr id="21" name="Shape 19"/>
-          <p:cNvSpPr/>
-          <p:nvPr/>
-        </p:nvSpPr>
-        <p:spPr>
-          <a:xfrm>
-            <a:off x="6217920" y="2606040"/>
-            <a:ext cx="640080" cy="960120"/>
+          <p:cNvPr id="21" name="Text 19"/>
+          <p:cNvSpPr/>
+          <p:nvPr/>
+        </p:nvSpPr>
+        <p:spPr>
+          <a:xfrm>
+            <a:off x="6400800" y="3081528"/>
+            <a:ext cx="2743200" cy="347472"/>
+          </a:xfrm>
+          <a:prstGeom prst="rect">
+            <a:avLst/>
+          </a:prstGeom>
+          <a:noFill/>
+          <a:ln/>
+        </p:spPr>
+        <p:txBody>
+          <a:bodyPr wrap="square" rtlCol="0" anchor="ctr"/>
+          <a:lstStyle/>
+          <a:p>
+            <a:pPr indent="0" marL="0">
+              <a:buNone/>
+            </a:pPr>
+            <a:r>
+              <a:rPr lang="en-US" sz="1300" b="1" dirty="0">
+                <a:solidFill>
+                  <a:srgbClr val="1A3005"/>
+                </a:solidFill>
+                <a:latin typeface="Calibri" pitchFamily="34" charset="0"/>
+                <a:ea typeface="Calibri" pitchFamily="34" charset="-122"/>
+                <a:cs typeface="Calibri" pitchFamily="34" charset="-120"/>
+              </a:rPr>
+              <a:t>🇪🇹 ትግርኛ Tigrinya</a:t>
+            </a:r>
+            <a:endParaRPr lang="en-US" sz="1300" dirty="0"/>
+          </a:p>
+        </p:txBody>
+      </p:sp>
+      <p:sp>
+        <p:nvSpPr>
+          <p:cNvPr id="22" name="Text 20"/>
+          <p:cNvSpPr/>
+          <p:nvPr/>
+        </p:nvSpPr>
+        <p:spPr>
+          <a:xfrm>
+            <a:off x="6400800" y="3465576"/>
+            <a:ext cx="2560320" cy="256032"/>
+          </a:xfrm>
+          <a:prstGeom prst="rect">
+            <a:avLst/>
+          </a:prstGeom>
+          <a:noFill/>
+          <a:ln/>
+        </p:spPr>
+        <p:txBody>
+          <a:bodyPr wrap="square" rtlCol="0" anchor="ctr"/>
+          <a:lstStyle/>
+          <a:p>
+            <a:pPr indent="0" marL="0">
+              <a:buNone/>
+            </a:pPr>
+            <a:r>
+              <a:rPr lang="en-US" sz="1000" dirty="0">
+                <a:solidFill>
+                  <a:srgbClr val="666666"/>
+                </a:solidFill>
+                <a:latin typeface="Calibri" pitchFamily="34" charset="0"/>
+                <a:ea typeface="Calibri" pitchFamily="34" charset="-122"/>
+                <a:cs typeface="Calibri" pitchFamily="34" charset="-120"/>
+              </a:rPr>
+              <a:t>ti · 7M speakers</a:t>
+            </a:r>
+            <a:endParaRPr lang="en-US" sz="1000" dirty="0"/>
+          </a:p>
+        </p:txBody>
+      </p:sp>
+      <p:sp>
+        <p:nvSpPr>
+          <p:cNvPr id="23" name="Text 21"/>
+          <p:cNvSpPr/>
+          <p:nvPr/>
+        </p:nvSpPr>
+        <p:spPr>
+          <a:xfrm>
+            <a:off x="6400800" y="3739896"/>
+            <a:ext cx="2560320" cy="256032"/>
+          </a:xfrm>
+          <a:prstGeom prst="rect">
+            <a:avLst/>
+          </a:prstGeom>
+          <a:noFill/>
+          <a:ln/>
+        </p:spPr>
+        <p:txBody>
+          <a:bodyPr wrap="square" rtlCol="0" anchor="ctr"/>
+          <a:lstStyle/>
+          <a:p>
+            <a:pPr indent="0" marL="0">
+              <a:buNone/>
+            </a:pPr>
+            <a:r>
+              <a:rPr lang="en-US" sz="900" dirty="0">
+                <a:solidFill>
+                  <a:srgbClr val="2D6A0A"/>
+                </a:solidFill>
+                <a:latin typeface="Calibri" pitchFamily="34" charset="0"/>
+                <a:ea typeface="Calibri" pitchFamily="34" charset="-122"/>
+                <a:cs typeface="Calibri" pitchFamily="34" charset="-120"/>
+              </a:rPr>
+              <a:t>🔊 Google TTS</a:t>
+            </a:r>
+            <a:endParaRPr lang="en-US" sz="900" dirty="0"/>
+          </a:p>
+        </p:txBody>
+      </p:sp>
+      <p:sp>
+        <p:nvSpPr>
+          <p:cNvPr id="24" name="Text 22"/>
+          <p:cNvSpPr/>
+          <p:nvPr/>
+        </p:nvSpPr>
+        <p:spPr>
+          <a:xfrm>
+            <a:off x="9144000" y="3465576"/>
+            <a:ext cx="2377440" cy="502920"/>
+          </a:xfrm>
+          <a:prstGeom prst="rect">
+            <a:avLst/>
+          </a:prstGeom>
+          <a:noFill/>
+          <a:ln/>
+        </p:spPr>
+        <p:txBody>
+          <a:bodyPr wrap="square" rtlCol="0" anchor="ctr"/>
+          <a:lstStyle/>
+          <a:p>
+            <a:pPr indent="0" marL="0">
+              <a:buNone/>
+            </a:pPr>
+            <a:r>
+              <a:rPr lang="en-US" sz="900" dirty="0">
+                <a:solidFill>
+                  <a:srgbClr val="555555"/>
+                </a:solidFill>
+                <a:latin typeface="Calibri" pitchFamily="34" charset="0"/>
+                <a:ea typeface="Calibri" pitchFamily="34" charset="-122"/>
+                <a:cs typeface="Calibri" pitchFamily="34" charset="-120"/>
+              </a:rPr>
+              <a:t>🎤 English STT + AI translate</a:t>
+            </a:r>
+            <a:endParaRPr lang="en-US" sz="900" dirty="0"/>
+          </a:p>
+        </p:txBody>
+      </p:sp>
+      <p:sp>
+        <p:nvSpPr>
+          <p:cNvPr id="25" name="Shape 23"/>
+          <p:cNvSpPr/>
+          <p:nvPr/>
+        </p:nvSpPr>
+        <p:spPr>
+          <a:xfrm>
+            <a:off x="365760" y="4407408"/>
+            <a:ext cx="5486400" cy="1261872"/>
           </a:xfrm>
           <a:prstGeom prst="roundRect">
             <a:avLst>
-              <a:gd name="adj" fmla="val 11429"/>
+              <a:gd name="adj" fmla="val 7246"/>
             </a:avLst>
           </a:prstGeom>
           <a:solidFill>
-            <a:srgbClr val="D4A017"/>
+            <a:srgbClr val="E8F5E0"/>
           </a:solidFill>
           <a:ln w="12700">
             <a:solidFill>
-              <a:srgbClr val="D4A017"/>
+              <a:srgbClr val="2D6A0A"/>
             </a:solidFill>
             <a:prstDash val="solid"/>
           </a:ln>
@@ -4400,19 +4708,21 @@
       </p:sp>
       <p:sp>
         <p:nvSpPr>
-          <p:cNvPr id="22" name="Text 20"/>
-          <p:cNvSpPr/>
-          <p:nvPr/>
-        </p:nvSpPr>
-        <p:spPr>
-          <a:xfrm>
-            <a:off x="6217920" y="2880360"/>
-            <a:ext cx="640080" cy="365760"/>
-          </a:xfrm>
-          <a:prstGeom prst="rect">
-            <a:avLst/>
-          </a:prstGeom>
-          <a:noFill/>
+          <p:cNvPr id="26" name="Text 24"/>
+          <p:cNvSpPr/>
+          <p:nvPr/>
+        </p:nvSpPr>
+        <p:spPr>
+          <a:xfrm>
+            <a:off x="5120640" y="4480560"/>
+            <a:ext cx="548640" cy="256032"/>
+          </a:xfrm>
+          <a:prstGeom prst="rect">
+            <a:avLst/>
+          </a:prstGeom>
+          <a:solidFill>
+            <a:srgbClr val="2D6A0A"/>
+          </a:solidFill>
           <a:ln/>
         </p:spPr>
         <p:txBody>
@@ -4423,7 +4733,7 @@
               <a:buNone/>
             </a:pPr>
             <a:r>
-              <a:rPr lang="en-US" sz="900" b="1" dirty="0">
+              <a:rPr lang="en-US" sz="800" b="1" dirty="0">
                 <a:solidFill>
                   <a:srgbClr val="FFFFFF"/>
                 </a:solidFill>
@@ -4431,7 +4741,124 @@
                 <a:ea typeface="Calibri" pitchFamily="34" charset="-122"/>
                 <a:cs typeface="Calibri" pitchFamily="34" charset="-120"/>
               </a:rPr>
-              <a:t>Teff</a:t>
+              <a:t>NEW</a:t>
+            </a:r>
+            <a:endParaRPr lang="en-US" sz="800" dirty="0"/>
+          </a:p>
+        </p:txBody>
+      </p:sp>
+      <p:sp>
+        <p:nvSpPr>
+          <p:cNvPr id="27" name="Text 25"/>
+          <p:cNvSpPr/>
+          <p:nvPr/>
+        </p:nvSpPr>
+        <p:spPr>
+          <a:xfrm>
+            <a:off x="548640" y="4498848"/>
+            <a:ext cx="2743200" cy="347472"/>
+          </a:xfrm>
+          <a:prstGeom prst="rect">
+            <a:avLst/>
+          </a:prstGeom>
+          <a:noFill/>
+          <a:ln/>
+        </p:spPr>
+        <p:txBody>
+          <a:bodyPr wrap="square" rtlCol="0" anchor="ctr"/>
+          <a:lstStyle/>
+          <a:p>
+            <a:pPr indent="0" marL="0">
+              <a:buNone/>
+            </a:pPr>
+            <a:r>
+              <a:rPr lang="en-US" sz="1300" b="1" dirty="0">
+                <a:solidFill>
+                  <a:srgbClr val="1A3005"/>
+                </a:solidFill>
+                <a:latin typeface="Calibri" pitchFamily="34" charset="0"/>
+                <a:ea typeface="Calibri" pitchFamily="34" charset="-122"/>
+                <a:cs typeface="Calibri" pitchFamily="34" charset="-120"/>
+              </a:rPr>
+              <a:t>🇸🇴 Soomaali Somali</a:t>
+            </a:r>
+            <a:endParaRPr lang="en-US" sz="1300" dirty="0"/>
+          </a:p>
+        </p:txBody>
+      </p:sp>
+      <p:sp>
+        <p:nvSpPr>
+          <p:cNvPr id="28" name="Text 26"/>
+          <p:cNvSpPr/>
+          <p:nvPr/>
+        </p:nvSpPr>
+        <p:spPr>
+          <a:xfrm>
+            <a:off x="548640" y="4882896"/>
+            <a:ext cx="2560320" cy="256032"/>
+          </a:xfrm>
+          <a:prstGeom prst="rect">
+            <a:avLst/>
+          </a:prstGeom>
+          <a:noFill/>
+          <a:ln/>
+        </p:spPr>
+        <p:txBody>
+          <a:bodyPr wrap="square" rtlCol="0" anchor="ctr"/>
+          <a:lstStyle/>
+          <a:p>
+            <a:pPr indent="0" marL="0">
+              <a:buNone/>
+            </a:pPr>
+            <a:r>
+              <a:rPr lang="en-US" sz="1000" dirty="0">
+                <a:solidFill>
+                  <a:srgbClr val="666666"/>
+                </a:solidFill>
+                <a:latin typeface="Calibri" pitchFamily="34" charset="0"/>
+                <a:ea typeface="Calibri" pitchFamily="34" charset="-122"/>
+                <a:cs typeface="Calibri" pitchFamily="34" charset="-120"/>
+              </a:rPr>
+              <a:t>so · 6M speakers</a:t>
+            </a:r>
+            <a:endParaRPr lang="en-US" sz="1000" dirty="0"/>
+          </a:p>
+        </p:txBody>
+      </p:sp>
+      <p:sp>
+        <p:nvSpPr>
+          <p:cNvPr id="29" name="Text 27"/>
+          <p:cNvSpPr/>
+          <p:nvPr/>
+        </p:nvSpPr>
+        <p:spPr>
+          <a:xfrm>
+            <a:off x="548640" y="5157216"/>
+            <a:ext cx="2560320" cy="256032"/>
+          </a:xfrm>
+          <a:prstGeom prst="rect">
+            <a:avLst/>
+          </a:prstGeom>
+          <a:noFill/>
+          <a:ln/>
+        </p:spPr>
+        <p:txBody>
+          <a:bodyPr wrap="square" rtlCol="0" anchor="ctr"/>
+          <a:lstStyle/>
+          <a:p>
+            <a:pPr indent="0" marL="0">
+              <a:buNone/>
+            </a:pPr>
+            <a:r>
+              <a:rPr lang="en-US" sz="900" dirty="0">
+                <a:solidFill>
+                  <a:srgbClr val="2D6A0A"/>
+                </a:solidFill>
+                <a:latin typeface="Calibri" pitchFamily="34" charset="0"/>
+                <a:ea typeface="Calibri" pitchFamily="34" charset="-122"/>
+                <a:cs typeface="Calibri" pitchFamily="34" charset="-120"/>
+              </a:rPr>
+              <a:t>🔊 Google TTS</a:t>
             </a:r>
             <a:endParaRPr lang="en-US" sz="900" dirty="0"/>
           </a:p>
@@ -4439,53 +4866,14 @@
       </p:sp>
       <p:sp>
         <p:nvSpPr>
-          <p:cNvPr id="23" name="Text 21"/>
-          <p:cNvSpPr/>
-          <p:nvPr/>
-        </p:nvSpPr>
-        <p:spPr>
-          <a:xfrm>
-            <a:off x="6949440" y="2697480"/>
-            <a:ext cx="4663440" cy="411480"/>
-          </a:xfrm>
-          <a:prstGeom prst="rect">
-            <a:avLst/>
-          </a:prstGeom>
-          <a:noFill/>
-          <a:ln/>
-        </p:spPr>
-        <p:txBody>
-          <a:bodyPr wrap="square" rtlCol="0" anchor="ctr"/>
-          <a:lstStyle/>
-          <a:p>
-            <a:pPr indent="0" marL="0">
-              <a:buNone/>
-            </a:pPr>
-            <a:r>
-              <a:rPr lang="en-US" sz="1100" b="1" dirty="0">
-                <a:solidFill>
-                  <a:srgbClr val="1A3005"/>
-                </a:solidFill>
-                <a:latin typeface="Calibri" pitchFamily="34" charset="0"/>
-                <a:ea typeface="Calibri" pitchFamily="34" charset="-122"/>
-                <a:cs typeface="Calibri" pitchFamily="34" charset="-120"/>
-              </a:rPr>
-              <a:t>Major Tef Diseases — Updated Review</a:t>
-            </a:r>
-            <a:endParaRPr lang="en-US" sz="1100" dirty="0"/>
-          </a:p>
-        </p:txBody>
-      </p:sp>
-      <p:sp>
-        <p:nvSpPr>
-          <p:cNvPr id="24" name="Text 22"/>
-          <p:cNvSpPr/>
-          <p:nvPr/>
-        </p:nvSpPr>
-        <p:spPr>
-          <a:xfrm>
-            <a:off x="6949440" y="3136392"/>
-            <a:ext cx="4663440" cy="320040"/>
+          <p:cNvPr id="30" name="Text 28"/>
+          <p:cNvSpPr/>
+          <p:nvPr/>
+        </p:nvSpPr>
+        <p:spPr>
+          <a:xfrm>
+            <a:off x="3291840" y="4882896"/>
+            <a:ext cx="2377440" cy="502920"/>
           </a:xfrm>
           <a:prstGeom prst="rect">
             <a:avLst/>
@@ -4503,13 +4891,13 @@
             <a:r>
               <a:rPr lang="en-US" sz="900" dirty="0">
                 <a:solidFill>
-                  <a:srgbClr val="888888"/>
-                </a:solidFill>
-                <a:latin typeface="Calibri" pitchFamily="34" charset="0"/>
-                <a:ea typeface="Calibri" pitchFamily="34" charset="-122"/>
-                <a:cs typeface="Calibri" pitchFamily="34" charset="-120"/>
-              </a:rPr>
-              <a:t>EIAR Debre Zeit ARC, 2025</a:t>
+                  <a:srgbClr val="555555"/>
+                </a:solidFill>
+                <a:latin typeface="Calibri" pitchFamily="34" charset="0"/>
+                <a:ea typeface="Calibri" pitchFamily="34" charset="-122"/>
+                <a:cs typeface="Calibri" pitchFamily="34" charset="-120"/>
+              </a:rPr>
+              <a:t>🎤 Chrome native STT</a:t>
             </a:r>
             <a:endParaRPr lang="en-US" sz="900" dirty="0"/>
           </a:p>
@@ -4517,26 +4905,26 @@
       </p:sp>
       <p:sp>
         <p:nvSpPr>
-          <p:cNvPr id="25" name="Shape 23"/>
-          <p:cNvSpPr/>
-          <p:nvPr/>
-        </p:nvSpPr>
-        <p:spPr>
-          <a:xfrm>
-            <a:off x="365760" y="3703320"/>
-            <a:ext cx="5486400" cy="960120"/>
+          <p:cNvPr id="31" name="Shape 29"/>
+          <p:cNvSpPr/>
+          <p:nvPr/>
+        </p:nvSpPr>
+        <p:spPr>
+          <a:xfrm>
+            <a:off x="6217920" y="4407408"/>
+            <a:ext cx="5486400" cy="1261872"/>
           </a:xfrm>
           <a:prstGeom prst="roundRect">
             <a:avLst>
-              <a:gd name="adj" fmla="val 7619"/>
+              <a:gd name="adj" fmla="val 7246"/>
             </a:avLst>
           </a:prstGeom>
           <a:solidFill>
-            <a:srgbClr val="FFFFFF"/>
+            <a:srgbClr val="E8F5E0"/>
           </a:solidFill>
           <a:ln w="12700">
             <a:solidFill>
-              <a:srgbClr val="DDDDDD"/>
+              <a:srgbClr val="2D6A0A"/>
             </a:solidFill>
             <a:prstDash val="solid"/>
           </a:ln>
@@ -4544,46 +4932,21 @@
       </p:sp>
       <p:sp>
         <p:nvSpPr>
-          <p:cNvPr id="26" name="Shape 24"/>
-          <p:cNvSpPr/>
-          <p:nvPr/>
-        </p:nvSpPr>
-        <p:spPr>
-          <a:xfrm>
-            <a:off x="365760" y="3703320"/>
-            <a:ext cx="640080" cy="960120"/>
-          </a:xfrm>
-          <a:prstGeom prst="roundRect">
-            <a:avLst>
-              <a:gd name="adj" fmla="val 11429"/>
-            </a:avLst>
+          <p:cNvPr id="32" name="Text 30"/>
+          <p:cNvSpPr/>
+          <p:nvPr/>
+        </p:nvSpPr>
+        <p:spPr>
+          <a:xfrm>
+            <a:off x="10972800" y="4480560"/>
+            <a:ext cx="548640" cy="256032"/>
+          </a:xfrm>
+          <a:prstGeom prst="rect">
+            <a:avLst/>
           </a:prstGeom>
           <a:solidFill>
-            <a:srgbClr val="D4A017"/>
+            <a:srgbClr val="2D6A0A"/>
           </a:solidFill>
-          <a:ln w="12700">
-            <a:solidFill>
-              <a:srgbClr val="D4A017"/>
-            </a:solidFill>
-            <a:prstDash val="solid"/>
-          </a:ln>
-        </p:spPr>
-      </p:sp>
-      <p:sp>
-        <p:nvSpPr>
-          <p:cNvPr id="27" name="Text 25"/>
-          <p:cNvSpPr/>
-          <p:nvPr/>
-        </p:nvSpPr>
-        <p:spPr>
-          <a:xfrm>
-            <a:off x="365760" y="3977640"/>
-            <a:ext cx="640080" cy="365760"/>
-          </a:xfrm>
-          <a:prstGeom prst="rect">
-            <a:avLst/>
-          </a:prstGeom>
-          <a:noFill/>
           <a:ln/>
         </p:spPr>
         <p:txBody>
@@ -4594,7 +4957,7 @@
               <a:buNone/>
             </a:pPr>
             <a:r>
-              <a:rPr lang="en-US" sz="900" b="1" dirty="0">
+              <a:rPr lang="en-US" sz="800" b="1" dirty="0">
                 <a:solidFill>
                   <a:srgbClr val="FFFFFF"/>
                 </a:solidFill>
@@ -4602,7 +4965,124 @@
                 <a:ea typeface="Calibri" pitchFamily="34" charset="-122"/>
                 <a:cs typeface="Calibri" pitchFamily="34" charset="-120"/>
               </a:rPr>
-              <a:t>Teff</a:t>
+              <a:t>NEW</a:t>
+            </a:r>
+            <a:endParaRPr lang="en-US" sz="800" dirty="0"/>
+          </a:p>
+        </p:txBody>
+      </p:sp>
+      <p:sp>
+        <p:nvSpPr>
+          <p:cNvPr id="33" name="Text 31"/>
+          <p:cNvSpPr/>
+          <p:nvPr/>
+        </p:nvSpPr>
+        <p:spPr>
+          <a:xfrm>
+            <a:off x="6400800" y="4498848"/>
+            <a:ext cx="2743200" cy="347472"/>
+          </a:xfrm>
+          <a:prstGeom prst="rect">
+            <a:avLst/>
+          </a:prstGeom>
+          <a:noFill/>
+          <a:ln/>
+        </p:spPr>
+        <p:txBody>
+          <a:bodyPr wrap="square" rtlCol="0" anchor="ctr"/>
+          <a:lstStyle/>
+          <a:p>
+            <a:pPr indent="0" marL="0">
+              <a:buNone/>
+            </a:pPr>
+            <a:r>
+              <a:rPr lang="en-US" sz="1300" b="1" dirty="0">
+                <a:solidFill>
+                  <a:srgbClr val="1A3005"/>
+                </a:solidFill>
+                <a:latin typeface="Calibri" pitchFamily="34" charset="0"/>
+                <a:ea typeface="Calibri" pitchFamily="34" charset="-122"/>
+                <a:cs typeface="Calibri" pitchFamily="34" charset="-120"/>
+              </a:rPr>
+              <a:t>🇪🇹 Qafar Afar</a:t>
+            </a:r>
+            <a:endParaRPr lang="en-US" sz="1300" dirty="0"/>
+          </a:p>
+        </p:txBody>
+      </p:sp>
+      <p:sp>
+        <p:nvSpPr>
+          <p:cNvPr id="34" name="Text 32"/>
+          <p:cNvSpPr/>
+          <p:nvPr/>
+        </p:nvSpPr>
+        <p:spPr>
+          <a:xfrm>
+            <a:off x="6400800" y="4882896"/>
+            <a:ext cx="2560320" cy="256032"/>
+          </a:xfrm>
+          <a:prstGeom prst="rect">
+            <a:avLst/>
+          </a:prstGeom>
+          <a:noFill/>
+          <a:ln/>
+        </p:spPr>
+        <p:txBody>
+          <a:bodyPr wrap="square" rtlCol="0" anchor="ctr"/>
+          <a:lstStyle/>
+          <a:p>
+            <a:pPr indent="0" marL="0">
+              <a:buNone/>
+            </a:pPr>
+            <a:r>
+              <a:rPr lang="en-US" sz="1000" dirty="0">
+                <a:solidFill>
+                  <a:srgbClr val="666666"/>
+                </a:solidFill>
+                <a:latin typeface="Calibri" pitchFamily="34" charset="0"/>
+                <a:ea typeface="Calibri" pitchFamily="34" charset="-122"/>
+                <a:cs typeface="Calibri" pitchFamily="34" charset="-120"/>
+              </a:rPr>
+              <a:t>aa · 2M speakers</a:t>
+            </a:r>
+            <a:endParaRPr lang="en-US" sz="1000" dirty="0"/>
+          </a:p>
+        </p:txBody>
+      </p:sp>
+      <p:sp>
+        <p:nvSpPr>
+          <p:cNvPr id="35" name="Text 33"/>
+          <p:cNvSpPr/>
+          <p:nvPr/>
+        </p:nvSpPr>
+        <p:spPr>
+          <a:xfrm>
+            <a:off x="6400800" y="5157216"/>
+            <a:ext cx="2560320" cy="256032"/>
+          </a:xfrm>
+          <a:prstGeom prst="rect">
+            <a:avLst/>
+          </a:prstGeom>
+          <a:noFill/>
+          <a:ln/>
+        </p:spPr>
+        <p:txBody>
+          <a:bodyPr wrap="square" rtlCol="0" anchor="ctr"/>
+          <a:lstStyle/>
+          <a:p>
+            <a:pPr indent="0" marL="0">
+              <a:buNone/>
+            </a:pPr>
+            <a:r>
+              <a:rPr lang="en-US" sz="900" dirty="0">
+                <a:solidFill>
+                  <a:srgbClr val="2D6A0A"/>
+                </a:solidFill>
+                <a:latin typeface="Calibri" pitchFamily="34" charset="0"/>
+                <a:ea typeface="Calibri" pitchFamily="34" charset="-122"/>
+                <a:cs typeface="Calibri" pitchFamily="34" charset="-120"/>
+              </a:rPr>
+              <a:t>🔊 Somali TTS</a:t>
             </a:r>
             <a:endParaRPr lang="en-US" sz="900" dirty="0"/>
           </a:p>
@@ -4610,53 +5090,14 @@
       </p:sp>
       <p:sp>
         <p:nvSpPr>
-          <p:cNvPr id="28" name="Text 26"/>
-          <p:cNvSpPr/>
-          <p:nvPr/>
-        </p:nvSpPr>
-        <p:spPr>
-          <a:xfrm>
-            <a:off x="1097280" y="3794760"/>
-            <a:ext cx="4663440" cy="411480"/>
-          </a:xfrm>
-          <a:prstGeom prst="rect">
-            <a:avLst/>
-          </a:prstGeom>
-          <a:noFill/>
-          <a:ln/>
-        </p:spPr>
-        <p:txBody>
-          <a:bodyPr wrap="square" rtlCol="0" anchor="ctr"/>
-          <a:lstStyle/>
-          <a:p>
-            <a:pPr indent="0" marL="0">
-              <a:buNone/>
-            </a:pPr>
-            <a:r>
-              <a:rPr lang="en-US" sz="1100" b="1" dirty="0">
-                <a:solidFill>
-                  <a:srgbClr val="1A3005"/>
-                </a:solidFill>
-                <a:latin typeface="Calibri" pitchFamily="34" charset="0"/>
-                <a:ea typeface="Calibri" pitchFamily="34" charset="-122"/>
-                <a:cs typeface="Calibri" pitchFamily="34" charset="-120"/>
-              </a:rPr>
-              <a:t>Teff: A Healthy Crop of the Century</a:t>
-            </a:r>
-            <a:endParaRPr lang="en-US" sz="1100" dirty="0"/>
-          </a:p>
-        </p:txBody>
-      </p:sp>
-      <p:sp>
-        <p:nvSpPr>
-          <p:cNvPr id="29" name="Text 27"/>
-          <p:cNvSpPr/>
-          <p:nvPr/>
-        </p:nvSpPr>
-        <p:spPr>
-          <a:xfrm>
-            <a:off x="1097280" y="4233672"/>
-            <a:ext cx="4663440" cy="320040"/>
+          <p:cNvPr id="36" name="Text 34"/>
+          <p:cNvSpPr/>
+          <p:nvPr/>
+        </p:nvSpPr>
+        <p:spPr>
+          <a:xfrm>
+            <a:off x="9144000" y="4882896"/>
+            <a:ext cx="2377440" cy="502920"/>
           </a:xfrm>
           <a:prstGeom prst="rect">
             <a:avLst/>
@@ -4674,526 +5115,13 @@
             <a:r>
               <a:rPr lang="en-US" sz="900" dirty="0">
                 <a:solidFill>
-                  <a:srgbClr val="888888"/>
-                </a:solidFill>
-                <a:latin typeface="Calibri" pitchFamily="34" charset="0"/>
-                <a:ea typeface="Calibri" pitchFamily="34" charset="-122"/>
-                <a:cs typeface="Calibri" pitchFamily="34" charset="-120"/>
-              </a:rPr>
-              <a:t>Discover Crops, Springer, 2025</a:t>
-            </a:r>
-            <a:endParaRPr lang="en-US" sz="900" dirty="0"/>
-          </a:p>
-        </p:txBody>
-      </p:sp>
-      <p:sp>
-        <p:nvSpPr>
-          <p:cNvPr id="30" name="Shape 28"/>
-          <p:cNvSpPr/>
-          <p:nvPr/>
-        </p:nvSpPr>
-        <p:spPr>
-          <a:xfrm>
-            <a:off x="6217920" y="3703320"/>
-            <a:ext cx="5486400" cy="960120"/>
-          </a:xfrm>
-          <a:prstGeom prst="roundRect">
-            <a:avLst>
-              <a:gd name="adj" fmla="val 7619"/>
-            </a:avLst>
-          </a:prstGeom>
-          <a:solidFill>
-            <a:srgbClr val="FFFFFF"/>
-          </a:solidFill>
-          <a:ln w="12700">
-            <a:solidFill>
-              <a:srgbClr val="DDDDDD"/>
-            </a:solidFill>
-            <a:prstDash val="solid"/>
-          </a:ln>
-        </p:spPr>
-      </p:sp>
-      <p:sp>
-        <p:nvSpPr>
-          <p:cNvPr id="31" name="Shape 29"/>
-          <p:cNvSpPr/>
-          <p:nvPr/>
-        </p:nvSpPr>
-        <p:spPr>
-          <a:xfrm>
-            <a:off x="6217920" y="3703320"/>
-            <a:ext cx="640080" cy="960120"/>
-          </a:xfrm>
-          <a:prstGeom prst="roundRect">
-            <a:avLst>
-              <a:gd name="adj" fmla="val 11429"/>
-            </a:avLst>
-          </a:prstGeom>
-          <a:solidFill>
-            <a:srgbClr val="1565C0"/>
-          </a:solidFill>
-          <a:ln w="12700">
-            <a:solidFill>
-              <a:srgbClr val="1565C0"/>
-            </a:solidFill>
-            <a:prstDash val="solid"/>
-          </a:ln>
-        </p:spPr>
-      </p:sp>
-      <p:sp>
-        <p:nvSpPr>
-          <p:cNvPr id="32" name="Text 30"/>
-          <p:cNvSpPr/>
-          <p:nvPr/>
-        </p:nvSpPr>
-        <p:spPr>
-          <a:xfrm>
-            <a:off x="6217920" y="3977640"/>
-            <a:ext cx="640080" cy="365760"/>
-          </a:xfrm>
-          <a:prstGeom prst="rect">
-            <a:avLst/>
-          </a:prstGeom>
-          <a:noFill/>
-          <a:ln/>
-        </p:spPr>
-        <p:txBody>
-          <a:bodyPr wrap="square" rtlCol="0" anchor="ctr"/>
-          <a:lstStyle/>
-          <a:p>
-            <a:pPr algn="ctr" indent="0" marL="0">
-              <a:buNone/>
-            </a:pPr>
-            <a:r>
-              <a:rPr lang="en-US" sz="900" b="1" dirty="0">
-                <a:solidFill>
-                  <a:srgbClr val="FFFFFF"/>
-                </a:solidFill>
-                <a:latin typeface="Calibri" pitchFamily="34" charset="0"/>
-                <a:ea typeface="Calibri" pitchFamily="34" charset="-122"/>
-                <a:cs typeface="Calibri" pitchFamily="34" charset="-120"/>
-              </a:rPr>
-              <a:t>Wheat</a:t>
-            </a:r>
-            <a:endParaRPr lang="en-US" sz="900" dirty="0"/>
-          </a:p>
-        </p:txBody>
-      </p:sp>
-      <p:sp>
-        <p:nvSpPr>
-          <p:cNvPr id="33" name="Text 31"/>
-          <p:cNvSpPr/>
-          <p:nvPr/>
-        </p:nvSpPr>
-        <p:spPr>
-          <a:xfrm>
-            <a:off x="6949440" y="3794760"/>
-            <a:ext cx="4663440" cy="411480"/>
-          </a:xfrm>
-          <a:prstGeom prst="rect">
-            <a:avLst/>
-          </a:prstGeom>
-          <a:noFill/>
-          <a:ln/>
-        </p:spPr>
-        <p:txBody>
-          <a:bodyPr wrap="square" rtlCol="0" anchor="ctr"/>
-          <a:lstStyle/>
-          <a:p>
-            <a:pPr indent="0" marL="0">
-              <a:buNone/>
-            </a:pPr>
-            <a:r>
-              <a:rPr lang="en-US" sz="1100" b="1" dirty="0">
-                <a:solidFill>
-                  <a:srgbClr val="1A3005"/>
-                </a:solidFill>
-                <a:latin typeface="Calibri" pitchFamily="34" charset="0"/>
-                <a:ea typeface="Calibri" pitchFamily="34" charset="-122"/>
-                <a:cs typeface="Calibri" pitchFamily="34" charset="-120"/>
-              </a:rPr>
-              <a:t>Early Warning System for Rust Ug99</a:t>
-            </a:r>
-            <a:endParaRPr lang="en-US" sz="1100" dirty="0"/>
-          </a:p>
-        </p:txBody>
-      </p:sp>
-      <p:sp>
-        <p:nvSpPr>
-          <p:cNvPr id="34" name="Text 32"/>
-          <p:cNvSpPr/>
-          <p:nvPr/>
-        </p:nvSpPr>
-        <p:spPr>
-          <a:xfrm>
-            <a:off x="6949440" y="4233672"/>
-            <a:ext cx="4663440" cy="320040"/>
-          </a:xfrm>
-          <a:prstGeom prst="rect">
-            <a:avLst/>
-          </a:prstGeom>
-          <a:noFill/>
-          <a:ln/>
-        </p:spPr>
-        <p:txBody>
-          <a:bodyPr wrap="square" rtlCol="0" anchor="ctr"/>
-          <a:lstStyle/>
-          <a:p>
-            <a:pPr indent="0" marL="0">
-              <a:buNone/>
-            </a:pPr>
-            <a:r>
-              <a:rPr lang="en-US" sz="900" dirty="0">
-                <a:solidFill>
-                  <a:srgbClr val="888888"/>
-                </a:solidFill>
-                <a:latin typeface="Calibri" pitchFamily="34" charset="0"/>
-                <a:ea typeface="Calibri" pitchFamily="34" charset="-122"/>
-                <a:cs typeface="Calibri" pitchFamily="34" charset="-120"/>
-              </a:rPr>
-              <a:t>Cambridge / CIMMYT / EIAR, 2019</a:t>
-            </a:r>
-            <a:endParaRPr lang="en-US" sz="900" dirty="0"/>
-          </a:p>
-        </p:txBody>
-      </p:sp>
-      <p:sp>
-        <p:nvSpPr>
-          <p:cNvPr id="35" name="Shape 33"/>
-          <p:cNvSpPr/>
-          <p:nvPr/>
-        </p:nvSpPr>
-        <p:spPr>
-          <a:xfrm>
-            <a:off x="365760" y="4800600"/>
-            <a:ext cx="5486400" cy="960120"/>
-          </a:xfrm>
-          <a:prstGeom prst="roundRect">
-            <a:avLst>
-              <a:gd name="adj" fmla="val 7619"/>
-            </a:avLst>
-          </a:prstGeom>
-          <a:solidFill>
-            <a:srgbClr val="FFFFFF"/>
-          </a:solidFill>
-          <a:ln w="12700">
-            <a:solidFill>
-              <a:srgbClr val="DDDDDD"/>
-            </a:solidFill>
-            <a:prstDash val="solid"/>
-          </a:ln>
-        </p:spPr>
-      </p:sp>
-      <p:sp>
-        <p:nvSpPr>
-          <p:cNvPr id="36" name="Shape 34"/>
-          <p:cNvSpPr/>
-          <p:nvPr/>
-        </p:nvSpPr>
-        <p:spPr>
-          <a:xfrm>
-            <a:off x="365760" y="4800600"/>
-            <a:ext cx="640080" cy="960120"/>
-          </a:xfrm>
-          <a:prstGeom prst="roundRect">
-            <a:avLst>
-              <a:gd name="adj" fmla="val 11429"/>
-            </a:avLst>
-          </a:prstGeom>
-          <a:solidFill>
-            <a:srgbClr val="E67E22"/>
-          </a:solidFill>
-          <a:ln w="12700">
-            <a:solidFill>
-              <a:srgbClr val="E67E22"/>
-            </a:solidFill>
-            <a:prstDash val="solid"/>
-          </a:ln>
-        </p:spPr>
-      </p:sp>
-      <p:sp>
-        <p:nvSpPr>
-          <p:cNvPr id="37" name="Text 35"/>
-          <p:cNvSpPr/>
-          <p:nvPr/>
-        </p:nvSpPr>
-        <p:spPr>
-          <a:xfrm>
-            <a:off x="365760" y="5074920"/>
-            <a:ext cx="640080" cy="365760"/>
-          </a:xfrm>
-          <a:prstGeom prst="rect">
-            <a:avLst/>
-          </a:prstGeom>
-          <a:noFill/>
-          <a:ln/>
-        </p:spPr>
-        <p:txBody>
-          <a:bodyPr wrap="square" rtlCol="0" anchor="ctr"/>
-          <a:lstStyle/>
-          <a:p>
-            <a:pPr algn="ctr" indent="0" marL="0">
-              <a:buNone/>
-            </a:pPr>
-            <a:r>
-              <a:rPr lang="en-US" sz="900" b="1" dirty="0">
-                <a:solidFill>
-                  <a:srgbClr val="FFFFFF"/>
-                </a:solidFill>
-                <a:latin typeface="Calibri" pitchFamily="34" charset="0"/>
-                <a:ea typeface="Calibri" pitchFamily="34" charset="-122"/>
-                <a:cs typeface="Calibri" pitchFamily="34" charset="-120"/>
-              </a:rPr>
-              <a:t>Maize</a:t>
-            </a:r>
-            <a:endParaRPr lang="en-US" sz="900" dirty="0"/>
-          </a:p>
-        </p:txBody>
-      </p:sp>
-      <p:sp>
-        <p:nvSpPr>
-          <p:cNvPr id="38" name="Text 36"/>
-          <p:cNvSpPr/>
-          <p:nvPr/>
-        </p:nvSpPr>
-        <p:spPr>
-          <a:xfrm>
-            <a:off x="1097280" y="4892040"/>
-            <a:ext cx="4663440" cy="411480"/>
-          </a:xfrm>
-          <a:prstGeom prst="rect">
-            <a:avLst/>
-          </a:prstGeom>
-          <a:noFill/>
-          <a:ln/>
-        </p:spPr>
-        <p:txBody>
-          <a:bodyPr wrap="square" rtlCol="0" anchor="ctr"/>
-          <a:lstStyle/>
-          <a:p>
-            <a:pPr indent="0" marL="0">
-              <a:buNone/>
-            </a:pPr>
-            <a:r>
-              <a:rPr lang="en-US" sz="1100" b="1" dirty="0">
-                <a:solidFill>
-                  <a:srgbClr val="1A3005"/>
-                </a:solidFill>
-                <a:latin typeface="Calibri" pitchFamily="34" charset="0"/>
-                <a:ea typeface="Calibri" pitchFamily="34" charset="-122"/>
-                <a:cs typeface="Calibri" pitchFamily="34" charset="-120"/>
-              </a:rPr>
-              <a:t>Ethiopian Maize Disease and Management</a:t>
-            </a:r>
-            <a:endParaRPr lang="en-US" sz="1100" dirty="0"/>
-          </a:p>
-        </p:txBody>
-      </p:sp>
-      <p:sp>
-        <p:nvSpPr>
-          <p:cNvPr id="39" name="Text 37"/>
-          <p:cNvSpPr/>
-          <p:nvPr/>
-        </p:nvSpPr>
-        <p:spPr>
-          <a:xfrm>
-            <a:off x="1097280" y="5330952"/>
-            <a:ext cx="4663440" cy="320040"/>
-          </a:xfrm>
-          <a:prstGeom prst="rect">
-            <a:avLst/>
-          </a:prstGeom>
-          <a:noFill/>
-          <a:ln/>
-        </p:spPr>
-        <p:txBody>
-          <a:bodyPr wrap="square" rtlCol="0" anchor="ctr"/>
-          <a:lstStyle/>
-          <a:p>
-            <a:pPr indent="0" marL="0">
-              <a:buNone/>
-            </a:pPr>
-            <a:r>
-              <a:rPr lang="en-US" sz="900" dirty="0">
-                <a:solidFill>
-                  <a:srgbClr val="888888"/>
-                </a:solidFill>
-                <a:latin typeface="Calibri" pitchFamily="34" charset="0"/>
-                <a:ea typeface="Calibri" pitchFamily="34" charset="-122"/>
-                <a:cs typeface="Calibri" pitchFamily="34" charset="-120"/>
-              </a:rPr>
-              <a:t>MoA / FAO Ethiopia</a:t>
-            </a:r>
-            <a:endParaRPr lang="en-US" sz="900" dirty="0"/>
-          </a:p>
-        </p:txBody>
-      </p:sp>
-      <p:sp>
-        <p:nvSpPr>
-          <p:cNvPr id="40" name="Shape 38"/>
-          <p:cNvSpPr/>
-          <p:nvPr/>
-        </p:nvSpPr>
-        <p:spPr>
-          <a:xfrm>
-            <a:off x="6217920" y="4800600"/>
-            <a:ext cx="5486400" cy="960120"/>
-          </a:xfrm>
-          <a:prstGeom prst="roundRect">
-            <a:avLst>
-              <a:gd name="adj" fmla="val 7619"/>
-            </a:avLst>
-          </a:prstGeom>
-          <a:solidFill>
-            <a:srgbClr val="FFFFFF"/>
-          </a:solidFill>
-          <a:ln w="12700">
-            <a:solidFill>
-              <a:srgbClr val="DDDDDD"/>
-            </a:solidFill>
-            <a:prstDash val="solid"/>
-          </a:ln>
-        </p:spPr>
-      </p:sp>
-      <p:sp>
-        <p:nvSpPr>
-          <p:cNvPr id="41" name="Shape 39"/>
-          <p:cNvSpPr/>
-          <p:nvPr/>
-        </p:nvSpPr>
-        <p:spPr>
-          <a:xfrm>
-            <a:off x="6217920" y="4800600"/>
-            <a:ext cx="640080" cy="960120"/>
-          </a:xfrm>
-          <a:prstGeom prst="roundRect">
-            <a:avLst>
-              <a:gd name="adj" fmla="val 11429"/>
-            </a:avLst>
-          </a:prstGeom>
-          <a:solidFill>
-            <a:srgbClr val="7B5EA7"/>
-          </a:solidFill>
-          <a:ln w="12700">
-            <a:solidFill>
-              <a:srgbClr val="7B5EA7"/>
-            </a:solidFill>
-            <a:prstDash val="solid"/>
-          </a:ln>
-        </p:spPr>
-      </p:sp>
-      <p:sp>
-        <p:nvSpPr>
-          <p:cNvPr id="42" name="Text 40"/>
-          <p:cNvSpPr/>
-          <p:nvPr/>
-        </p:nvSpPr>
-        <p:spPr>
-          <a:xfrm>
-            <a:off x="6217920" y="5074920"/>
-            <a:ext cx="640080" cy="365760"/>
-          </a:xfrm>
-          <a:prstGeom prst="rect">
-            <a:avLst/>
-          </a:prstGeom>
-          <a:noFill/>
-          <a:ln/>
-        </p:spPr>
-        <p:txBody>
-          <a:bodyPr wrap="square" rtlCol="0" anchor="ctr"/>
-          <a:lstStyle/>
-          <a:p>
-            <a:pPr algn="ctr" indent="0" marL="0">
-              <a:buNone/>
-            </a:pPr>
-            <a:r>
-              <a:rPr lang="en-US" sz="900" b="1" dirty="0">
-                <a:solidFill>
-                  <a:srgbClr val="FFFFFF"/>
-                </a:solidFill>
-                <a:latin typeface="Calibri" pitchFamily="34" charset="0"/>
-                <a:ea typeface="Calibri" pitchFamily="34" charset="-122"/>
-                <a:cs typeface="Calibri" pitchFamily="34" charset="-120"/>
-              </a:rPr>
-              <a:t>Multi</a:t>
-            </a:r>
-            <a:endParaRPr lang="en-US" sz="900" dirty="0"/>
-          </a:p>
-        </p:txBody>
-      </p:sp>
-      <p:sp>
-        <p:nvSpPr>
-          <p:cNvPr id="43" name="Text 41"/>
-          <p:cNvSpPr/>
-          <p:nvPr/>
-        </p:nvSpPr>
-        <p:spPr>
-          <a:xfrm>
-            <a:off x="6949440" y="4892040"/>
-            <a:ext cx="4663440" cy="411480"/>
-          </a:xfrm>
-          <a:prstGeom prst="rect">
-            <a:avLst/>
-          </a:prstGeom>
-          <a:noFill/>
-          <a:ln/>
-        </p:spPr>
-        <p:txBody>
-          <a:bodyPr wrap="square" rtlCol="0" anchor="ctr"/>
-          <a:lstStyle/>
-          <a:p>
-            <a:pPr indent="0" marL="0">
-              <a:buNone/>
-            </a:pPr>
-            <a:r>
-              <a:rPr lang="en-US" sz="1100" b="1" dirty="0">
-                <a:solidFill>
-                  <a:srgbClr val="1A3005"/>
-                </a:solidFill>
-                <a:latin typeface="Calibri" pitchFamily="34" charset="0"/>
-                <a:ea typeface="Calibri" pitchFamily="34" charset="-122"/>
-                <a:cs typeface="Calibri" pitchFamily="34" charset="-120"/>
-              </a:rPr>
-              <a:t>McKnight-CCRP Integrated Management</a:t>
-            </a:r>
-            <a:endParaRPr lang="en-US" sz="1100" dirty="0"/>
-          </a:p>
-        </p:txBody>
-      </p:sp>
-      <p:sp>
-        <p:nvSpPr>
-          <p:cNvPr id="44" name="Text 42"/>
-          <p:cNvSpPr/>
-          <p:nvPr/>
-        </p:nvSpPr>
-        <p:spPr>
-          <a:xfrm>
-            <a:off x="6949440" y="5330952"/>
-            <a:ext cx="4663440" cy="320040"/>
-          </a:xfrm>
-          <a:prstGeom prst="rect">
-            <a:avLst/>
-          </a:prstGeom>
-          <a:noFill/>
-          <a:ln/>
-        </p:spPr>
-        <p:txBody>
-          <a:bodyPr wrap="square" rtlCol="0" anchor="ctr"/>
-          <a:lstStyle/>
-          <a:p>
-            <a:pPr indent="0" marL="0">
-              <a:buNone/>
-            </a:pPr>
-            <a:r>
-              <a:rPr lang="en-US" sz="900" dirty="0">
-                <a:solidFill>
-                  <a:srgbClr val="888888"/>
-                </a:solidFill>
-                <a:latin typeface="Calibri" pitchFamily="34" charset="0"/>
-                <a:ea typeface="Calibri" pitchFamily="34" charset="-122"/>
-                <a:cs typeface="Calibri" pitchFamily="34" charset="-120"/>
-              </a:rPr>
-              <a:t>McKnight Foundation / CGIAR, 2022</a:t>
+                  <a:srgbClr val="555555"/>
+                </a:solidFill>
+                <a:latin typeface="Calibri" pitchFamily="34" charset="0"/>
+                <a:ea typeface="Calibri" pitchFamily="34" charset="-122"/>
+                <a:cs typeface="Calibri" pitchFamily="34" charset="-120"/>
+              </a:rPr>
+              <a:t>🎤 English STT + AI translate</a:t>
             </a:r>
             <a:endParaRPr lang="en-US" sz="900" dirty="0"/>
           </a:p>
@@ -5210,6 +5138,1509 @@
 <file path=ppt/slides/slide5.xml><?xml version="1.0" encoding="utf-8"?>
 <p:sld xmlns:a="http://schemas.openxmlformats.org/drawingml/2006/main" xmlns:r="http://schemas.openxmlformats.org/officeDocument/2006/relationships" xmlns:p="http://schemas.openxmlformats.org/presentationml/2006/main">
   <p:cSld name="Slide 5">
+    <p:bg>
+      <p:bgPr>
+        <a:solidFill>
+          <a:srgbClr val="1A3005"/>
+        </a:solidFill>
+      </p:bgPr>
+    </p:bg>
+    <p:spTree>
+      <p:nvGrpSpPr>
+        <p:cNvPr id="1" name=""/>
+        <p:cNvGrpSpPr/>
+        <p:nvPr/>
+      </p:nvGrpSpPr>
+      <p:grpSpPr>
+        <a:xfrm>
+          <a:off x="0" y="0"/>
+          <a:ext cx="0" cy="0"/>
+          <a:chOff x="0" y="0"/>
+          <a:chExt cx="0" cy="0"/>
+        </a:xfrm>
+      </p:grpSpPr>
+      <p:sp>
+        <p:nvSpPr>
+          <p:cNvPr id="2" name="Shape 0"/>
+          <p:cNvSpPr/>
+          <p:nvPr/>
+        </p:nvSpPr>
+        <p:spPr>
+          <a:xfrm>
+            <a:off x="0" y="0"/>
+            <a:ext cx="12188952" cy="640080"/>
+          </a:xfrm>
+          <a:prstGeom prst="rect">
+            <a:avLst/>
+          </a:prstGeom>
+          <a:solidFill>
+            <a:srgbClr val="2D6A0A"/>
+          </a:solidFill>
+          <a:ln w="12700">
+            <a:solidFill>
+              <a:srgbClr val="2D6A0A"/>
+            </a:solidFill>
+            <a:prstDash val="solid"/>
+          </a:ln>
+        </p:spPr>
+      </p:sp>
+      <p:sp>
+        <p:nvSpPr>
+          <p:cNvPr id="3" name="Text 1"/>
+          <p:cNvSpPr/>
+          <p:nvPr/>
+        </p:nvSpPr>
+        <p:spPr>
+          <a:xfrm>
+            <a:off x="365760" y="109728"/>
+            <a:ext cx="11430000" cy="411480"/>
+          </a:xfrm>
+          <a:prstGeom prst="rect">
+            <a:avLst/>
+          </a:prstGeom>
+          <a:noFill/>
+          <a:ln/>
+        </p:spPr>
+        <p:txBody>
+          <a:bodyPr wrap="square" rtlCol="0" anchor="ctr"/>
+          <a:lstStyle/>
+          <a:p>
+            <a:pPr indent="0" marL="0">
+              <a:buNone/>
+            </a:pPr>
+            <a:r>
+              <a:rPr lang="en-US" sz="1400" b="1" dirty="0">
+                <a:solidFill>
+                  <a:srgbClr val="FFFFFF"/>
+                </a:solidFill>
+                <a:latin typeface="Calibri" pitchFamily="34" charset="0"/>
+                <a:ea typeface="Calibri" pitchFamily="34" charset="-122"/>
+                <a:cs typeface="Calibri" pitchFamily="34" charset="-120"/>
+              </a:rPr>
+              <a:t>RESEARCH FOUNDATION</a:t>
+            </a:r>
+            <a:endParaRPr lang="en-US" sz="1400" dirty="0"/>
+          </a:p>
+        </p:txBody>
+      </p:sp>
+      <p:sp>
+        <p:nvSpPr>
+          <p:cNvPr id="4" name="Text 2"/>
+          <p:cNvSpPr/>
+          <p:nvPr/>
+        </p:nvSpPr>
+        <p:spPr>
+          <a:xfrm>
+            <a:off x="457200" y="822960"/>
+            <a:ext cx="11247120" cy="548640"/>
+          </a:xfrm>
+          <a:prstGeom prst="rect">
+            <a:avLst/>
+          </a:prstGeom>
+          <a:noFill/>
+          <a:ln/>
+        </p:spPr>
+        <p:txBody>
+          <a:bodyPr wrap="square" rtlCol="0" anchor="ctr"/>
+          <a:lstStyle/>
+          <a:p>
+            <a:pPr indent="0" marL="0">
+              <a:buNone/>
+            </a:pPr>
+            <a:r>
+              <a:rPr lang="en-US" sz="2300" b="1" dirty="0">
+                <a:solidFill>
+                  <a:srgbClr val="FFFFFF"/>
+                </a:solidFill>
+                <a:latin typeface="Georgia" pitchFamily="34" charset="0"/>
+                <a:ea typeface="Georgia" pitchFamily="34" charset="-122"/>
+                <a:cs typeface="Georgia" pitchFamily="34" charset="-120"/>
+              </a:rPr>
+              <a:t>23+ Ethiopian Peer-Reviewed Papers · 2019–2025</a:t>
+            </a:r>
+            <a:endParaRPr lang="en-US" sz="2300" dirty="0"/>
+          </a:p>
+        </p:txBody>
+      </p:sp>
+      <p:sp>
+        <p:nvSpPr>
+          <p:cNvPr id="5" name="Shape 3"/>
+          <p:cNvSpPr/>
+          <p:nvPr/>
+        </p:nvSpPr>
+        <p:spPr>
+          <a:xfrm>
+            <a:off x="365760" y="1481328"/>
+            <a:ext cx="5486400" cy="987552"/>
+          </a:xfrm>
+          <a:prstGeom prst="roundRect">
+            <a:avLst>
+              <a:gd name="adj" fmla="val 7407"/>
+            </a:avLst>
+          </a:prstGeom>
+          <a:solidFill>
+            <a:srgbClr val="1E4A06"/>
+          </a:solidFill>
+          <a:ln w="12700">
+            <a:solidFill>
+              <a:srgbClr val="2D5A08"/>
+            </a:solidFill>
+            <a:prstDash val="solid"/>
+          </a:ln>
+        </p:spPr>
+      </p:sp>
+      <p:sp>
+        <p:nvSpPr>
+          <p:cNvPr id="6" name="Shape 4"/>
+          <p:cNvSpPr/>
+          <p:nvPr/>
+        </p:nvSpPr>
+        <p:spPr>
+          <a:xfrm>
+            <a:off x="365760" y="1481328"/>
+            <a:ext cx="658368" cy="987552"/>
+          </a:xfrm>
+          <a:prstGeom prst="roundRect">
+            <a:avLst>
+              <a:gd name="adj" fmla="val 11111"/>
+            </a:avLst>
+          </a:prstGeom>
+          <a:solidFill>
+            <a:srgbClr val="2D6A0A"/>
+          </a:solidFill>
+          <a:ln w="12700">
+            <a:solidFill>
+              <a:srgbClr val="2D6A0A"/>
+            </a:solidFill>
+            <a:prstDash val="solid"/>
+          </a:ln>
+        </p:spPr>
+      </p:sp>
+      <p:sp>
+        <p:nvSpPr>
+          <p:cNvPr id="7" name="Text 5"/>
+          <p:cNvSpPr/>
+          <p:nvPr/>
+        </p:nvSpPr>
+        <p:spPr>
+          <a:xfrm>
+            <a:off x="365760" y="1773936"/>
+            <a:ext cx="658368" cy="365760"/>
+          </a:xfrm>
+          <a:prstGeom prst="rect">
+            <a:avLst/>
+          </a:prstGeom>
+          <a:noFill/>
+          <a:ln/>
+        </p:spPr>
+        <p:txBody>
+          <a:bodyPr wrap="square" rtlCol="0" anchor="ctr"/>
+          <a:lstStyle/>
+          <a:p>
+            <a:pPr algn="ctr" indent="0" marL="0">
+              <a:buNone/>
+            </a:pPr>
+            <a:r>
+              <a:rPr lang="en-US" sz="900" b="1" dirty="0">
+                <a:solidFill>
+                  <a:srgbClr val="FFFFFF"/>
+                </a:solidFill>
+                <a:latin typeface="Calibri" pitchFamily="34" charset="0"/>
+                <a:ea typeface="Calibri" pitchFamily="34" charset="-122"/>
+                <a:cs typeface="Calibri" pitchFamily="34" charset="-120"/>
+              </a:rPr>
+              <a:t>Enset</a:t>
+            </a:r>
+            <a:endParaRPr lang="en-US" sz="900" dirty="0"/>
+          </a:p>
+        </p:txBody>
+      </p:sp>
+      <p:sp>
+        <p:nvSpPr>
+          <p:cNvPr id="8" name="Text 6"/>
+          <p:cNvSpPr/>
+          <p:nvPr/>
+        </p:nvSpPr>
+        <p:spPr>
+          <a:xfrm>
+            <a:off x="1115568" y="1572768"/>
+            <a:ext cx="4572000" cy="411480"/>
+          </a:xfrm>
+          <a:prstGeom prst="rect">
+            <a:avLst/>
+          </a:prstGeom>
+          <a:noFill/>
+          <a:ln/>
+        </p:spPr>
+        <p:txBody>
+          <a:bodyPr wrap="square" rtlCol="0" anchor="ctr"/>
+          <a:lstStyle/>
+          <a:p>
+            <a:pPr indent="0" marL="0">
+              <a:buNone/>
+            </a:pPr>
+            <a:r>
+              <a:rPr lang="en-US" sz="1100" b="1" dirty="0">
+                <a:solidFill>
+                  <a:srgbClr val="B8DC7A"/>
+                </a:solidFill>
+                <a:latin typeface="Calibri" pitchFamily="34" charset="0"/>
+                <a:ea typeface="Calibri" pitchFamily="34" charset="-122"/>
+                <a:cs typeface="Calibri" pitchFamily="34" charset="-120"/>
+              </a:rPr>
+              <a:t>Bacterial Wilt CNN detection — 98.87% accuracy</a:t>
+            </a:r>
+            <a:endParaRPr lang="en-US" sz="1100" dirty="0"/>
+          </a:p>
+        </p:txBody>
+      </p:sp>
+      <p:sp>
+        <p:nvSpPr>
+          <p:cNvPr id="9" name="Text 7"/>
+          <p:cNvSpPr/>
+          <p:nvPr/>
+        </p:nvSpPr>
+        <p:spPr>
+          <a:xfrm>
+            <a:off x="1115568" y="2029968"/>
+            <a:ext cx="4572000" cy="320040"/>
+          </a:xfrm>
+          <a:prstGeom prst="rect">
+            <a:avLst/>
+          </a:prstGeom>
+          <a:noFill/>
+          <a:ln/>
+        </p:spPr>
+        <p:txBody>
+          <a:bodyPr wrap="square" rtlCol="0" anchor="ctr"/>
+          <a:lstStyle/>
+          <a:p>
+            <a:pPr indent="0" marL="0">
+              <a:buNone/>
+            </a:pPr>
+            <a:r>
+              <a:rPr lang="en-US" sz="900" dirty="0">
+                <a:solidFill>
+                  <a:srgbClr val="AACCAA"/>
+                </a:solidFill>
+                <a:latin typeface="Calibri" pitchFamily="34" charset="0"/>
+                <a:ea typeface="Calibri" pitchFamily="34" charset="-122"/>
+                <a:cs typeface="Calibri" pitchFamily="34" charset="-120"/>
+              </a:rPr>
+              <a:t>Jimma University, 2021</a:t>
+            </a:r>
+            <a:endParaRPr lang="en-US" sz="900" dirty="0"/>
+          </a:p>
+        </p:txBody>
+      </p:sp>
+      <p:sp>
+        <p:nvSpPr>
+          <p:cNvPr id="10" name="Shape 8"/>
+          <p:cNvSpPr/>
+          <p:nvPr/>
+        </p:nvSpPr>
+        <p:spPr>
+          <a:xfrm>
+            <a:off x="6217920" y="1481328"/>
+            <a:ext cx="5486400" cy="987552"/>
+          </a:xfrm>
+          <a:prstGeom prst="roundRect">
+            <a:avLst>
+              <a:gd name="adj" fmla="val 7407"/>
+            </a:avLst>
+          </a:prstGeom>
+          <a:solidFill>
+            <a:srgbClr val="1E4A06"/>
+          </a:solidFill>
+          <a:ln w="12700">
+            <a:solidFill>
+              <a:srgbClr val="2D5A08"/>
+            </a:solidFill>
+            <a:prstDash val="solid"/>
+          </a:ln>
+        </p:spPr>
+      </p:sp>
+      <p:sp>
+        <p:nvSpPr>
+          <p:cNvPr id="11" name="Shape 9"/>
+          <p:cNvSpPr/>
+          <p:nvPr/>
+        </p:nvSpPr>
+        <p:spPr>
+          <a:xfrm>
+            <a:off x="6217920" y="1481328"/>
+            <a:ext cx="658368" cy="987552"/>
+          </a:xfrm>
+          <a:prstGeom prst="roundRect">
+            <a:avLst>
+              <a:gd name="adj" fmla="val 11111"/>
+            </a:avLst>
+          </a:prstGeom>
+          <a:solidFill>
+            <a:srgbClr val="2D6A0A"/>
+          </a:solidFill>
+          <a:ln w="12700">
+            <a:solidFill>
+              <a:srgbClr val="2D6A0A"/>
+            </a:solidFill>
+            <a:prstDash val="solid"/>
+          </a:ln>
+        </p:spPr>
+      </p:sp>
+      <p:sp>
+        <p:nvSpPr>
+          <p:cNvPr id="12" name="Text 10"/>
+          <p:cNvSpPr/>
+          <p:nvPr/>
+        </p:nvSpPr>
+        <p:spPr>
+          <a:xfrm>
+            <a:off x="6217920" y="1773936"/>
+            <a:ext cx="658368" cy="365760"/>
+          </a:xfrm>
+          <a:prstGeom prst="rect">
+            <a:avLst/>
+          </a:prstGeom>
+          <a:noFill/>
+          <a:ln/>
+        </p:spPr>
+        <p:txBody>
+          <a:bodyPr wrap="square" rtlCol="0" anchor="ctr"/>
+          <a:lstStyle/>
+          <a:p>
+            <a:pPr algn="ctr" indent="0" marL="0">
+              <a:buNone/>
+            </a:pPr>
+            <a:r>
+              <a:rPr lang="en-US" sz="900" b="1" dirty="0">
+                <a:solidFill>
+                  <a:srgbClr val="FFFFFF"/>
+                </a:solidFill>
+                <a:latin typeface="Calibri" pitchFamily="34" charset="0"/>
+                <a:ea typeface="Calibri" pitchFamily="34" charset="-122"/>
+                <a:cs typeface="Calibri" pitchFamily="34" charset="-120"/>
+              </a:rPr>
+              <a:t>Enset</a:t>
+            </a:r>
+            <a:endParaRPr lang="en-US" sz="900" dirty="0"/>
+          </a:p>
+        </p:txBody>
+      </p:sp>
+      <p:sp>
+        <p:nvSpPr>
+          <p:cNvPr id="13" name="Text 11"/>
+          <p:cNvSpPr/>
+          <p:nvPr/>
+        </p:nvSpPr>
+        <p:spPr>
+          <a:xfrm>
+            <a:off x="6967728" y="1572768"/>
+            <a:ext cx="4572000" cy="411480"/>
+          </a:xfrm>
+          <a:prstGeom prst="rect">
+            <a:avLst/>
+          </a:prstGeom>
+          <a:noFill/>
+          <a:ln/>
+        </p:spPr>
+        <p:txBody>
+          <a:bodyPr wrap="square" rtlCol="0" anchor="ctr"/>
+          <a:lstStyle/>
+          <a:p>
+            <a:pPr indent="0" marL="0">
+              <a:buNone/>
+            </a:pPr>
+            <a:r>
+              <a:rPr lang="en-US" sz="1100" b="1" dirty="0">
+                <a:solidFill>
+                  <a:srgbClr val="B8DC7A"/>
+                </a:solidFill>
+                <a:latin typeface="Calibri" pitchFamily="34" charset="0"/>
+                <a:ea typeface="Calibri" pitchFamily="34" charset="-122"/>
+                <a:cs typeface="Calibri" pitchFamily="34" charset="-120"/>
+              </a:rPr>
+              <a:t>Community EBW: 65.7% → 10.1% loss reduction</a:t>
+            </a:r>
+            <a:endParaRPr lang="en-US" sz="1100" dirty="0"/>
+          </a:p>
+        </p:txBody>
+      </p:sp>
+      <p:sp>
+        <p:nvSpPr>
+          <p:cNvPr id="14" name="Text 12"/>
+          <p:cNvSpPr/>
+          <p:nvPr/>
+        </p:nvSpPr>
+        <p:spPr>
+          <a:xfrm>
+            <a:off x="6967728" y="2029968"/>
+            <a:ext cx="4572000" cy="320040"/>
+          </a:xfrm>
+          <a:prstGeom prst="rect">
+            <a:avLst/>
+          </a:prstGeom>
+          <a:noFill/>
+          <a:ln/>
+        </p:spPr>
+        <p:txBody>
+          <a:bodyPr wrap="square" rtlCol="0" anchor="ctr"/>
+          <a:lstStyle/>
+          <a:p>
+            <a:pPr indent="0" marL="0">
+              <a:buNone/>
+            </a:pPr>
+            <a:r>
+              <a:rPr lang="en-US" sz="900" dirty="0">
+                <a:solidFill>
+                  <a:srgbClr val="AACCAA"/>
+                </a:solidFill>
+                <a:latin typeface="Calibri" pitchFamily="34" charset="0"/>
+                <a:ea typeface="Calibri" pitchFamily="34" charset="-122"/>
+                <a:cs typeface="Calibri" pitchFamily="34" charset="-120"/>
+              </a:rPr>
+              <a:t>Journal Life Sci Biomed, 2024</a:t>
+            </a:r>
+            <a:endParaRPr lang="en-US" sz="900" dirty="0"/>
+          </a:p>
+        </p:txBody>
+      </p:sp>
+      <p:sp>
+        <p:nvSpPr>
+          <p:cNvPr id="15" name="Shape 13"/>
+          <p:cNvSpPr/>
+          <p:nvPr/>
+        </p:nvSpPr>
+        <p:spPr>
+          <a:xfrm>
+            <a:off x="365760" y="2596896"/>
+            <a:ext cx="5486400" cy="987552"/>
+          </a:xfrm>
+          <a:prstGeom prst="roundRect">
+            <a:avLst>
+              <a:gd name="adj" fmla="val 7407"/>
+            </a:avLst>
+          </a:prstGeom>
+          <a:solidFill>
+            <a:srgbClr val="1E4A06"/>
+          </a:solidFill>
+          <a:ln w="12700">
+            <a:solidFill>
+              <a:srgbClr val="2D5A08"/>
+            </a:solidFill>
+            <a:prstDash val="solid"/>
+          </a:ln>
+        </p:spPr>
+      </p:sp>
+      <p:sp>
+        <p:nvSpPr>
+          <p:cNvPr id="16" name="Shape 14"/>
+          <p:cNvSpPr/>
+          <p:nvPr/>
+        </p:nvSpPr>
+        <p:spPr>
+          <a:xfrm>
+            <a:off x="365760" y="2596896"/>
+            <a:ext cx="658368" cy="987552"/>
+          </a:xfrm>
+          <a:prstGeom prst="roundRect">
+            <a:avLst>
+              <a:gd name="adj" fmla="val 11111"/>
+            </a:avLst>
+          </a:prstGeom>
+          <a:solidFill>
+            <a:srgbClr val="2D6A0A"/>
+          </a:solidFill>
+          <a:ln w="12700">
+            <a:solidFill>
+              <a:srgbClr val="2D6A0A"/>
+            </a:solidFill>
+            <a:prstDash val="solid"/>
+          </a:ln>
+        </p:spPr>
+      </p:sp>
+      <p:sp>
+        <p:nvSpPr>
+          <p:cNvPr id="17" name="Text 15"/>
+          <p:cNvSpPr/>
+          <p:nvPr/>
+        </p:nvSpPr>
+        <p:spPr>
+          <a:xfrm>
+            <a:off x="365760" y="2889504"/>
+            <a:ext cx="658368" cy="365760"/>
+          </a:xfrm>
+          <a:prstGeom prst="rect">
+            <a:avLst/>
+          </a:prstGeom>
+          <a:noFill/>
+          <a:ln/>
+        </p:spPr>
+        <p:txBody>
+          <a:bodyPr wrap="square" rtlCol="0" anchor="ctr"/>
+          <a:lstStyle/>
+          <a:p>
+            <a:pPr algn="ctr" indent="0" marL="0">
+              <a:buNone/>
+            </a:pPr>
+            <a:r>
+              <a:rPr lang="en-US" sz="900" b="1" dirty="0">
+                <a:solidFill>
+                  <a:srgbClr val="FFFFFF"/>
+                </a:solidFill>
+                <a:latin typeface="Calibri" pitchFamily="34" charset="0"/>
+                <a:ea typeface="Calibri" pitchFamily="34" charset="-122"/>
+                <a:cs typeface="Calibri" pitchFamily="34" charset="-120"/>
+              </a:rPr>
+              <a:t>Enset</a:t>
+            </a:r>
+            <a:endParaRPr lang="en-US" sz="900" dirty="0"/>
+          </a:p>
+        </p:txBody>
+      </p:sp>
+      <p:sp>
+        <p:nvSpPr>
+          <p:cNvPr id="18" name="Text 16"/>
+          <p:cNvSpPr/>
+          <p:nvPr/>
+        </p:nvSpPr>
+        <p:spPr>
+          <a:xfrm>
+            <a:off x="1115568" y="2688336"/>
+            <a:ext cx="4572000" cy="411480"/>
+          </a:xfrm>
+          <a:prstGeom prst="rect">
+            <a:avLst/>
+          </a:prstGeom>
+          <a:noFill/>
+          <a:ln/>
+        </p:spPr>
+        <p:txBody>
+          <a:bodyPr wrap="square" rtlCol="0" anchor="ctr"/>
+          <a:lstStyle/>
+          <a:p>
+            <a:pPr indent="0" marL="0">
+              <a:buNone/>
+            </a:pPr>
+            <a:r>
+              <a:rPr lang="en-US" sz="1100" b="1" dirty="0">
+                <a:solidFill>
+                  <a:srgbClr val="B8DC7A"/>
+                </a:solidFill>
+                <a:latin typeface="Calibri" pitchFamily="34" charset="0"/>
+                <a:ea typeface="Calibri" pitchFamily="34" charset="-122"/>
+                <a:cs typeface="Calibri" pitchFamily="34" charset="-120"/>
+              </a:rPr>
+              <a:t>Economic Loss from Wilting, Sidama Region</a:t>
+            </a:r>
+            <a:endParaRPr lang="en-US" sz="1100" dirty="0"/>
+          </a:p>
+        </p:txBody>
+      </p:sp>
+      <p:sp>
+        <p:nvSpPr>
+          <p:cNvPr id="19" name="Text 17"/>
+          <p:cNvSpPr/>
+          <p:nvPr/>
+        </p:nvSpPr>
+        <p:spPr>
+          <a:xfrm>
+            <a:off x="1115568" y="3145536"/>
+            <a:ext cx="4572000" cy="320040"/>
+          </a:xfrm>
+          <a:prstGeom prst="rect">
+            <a:avLst/>
+          </a:prstGeom>
+          <a:noFill/>
+          <a:ln/>
+        </p:spPr>
+        <p:txBody>
+          <a:bodyPr wrap="square" rtlCol="0" anchor="ctr"/>
+          <a:lstStyle/>
+          <a:p>
+            <a:pPr indent="0" marL="0">
+              <a:buNone/>
+            </a:pPr>
+            <a:r>
+              <a:rPr lang="en-US" sz="900" dirty="0">
+                <a:solidFill>
+                  <a:srgbClr val="AACCAA"/>
+                </a:solidFill>
+                <a:latin typeface="Calibri" pitchFamily="34" charset="0"/>
+                <a:ea typeface="Calibri" pitchFamily="34" charset="-122"/>
+                <a:cs typeface="Calibri" pitchFamily="34" charset="-120"/>
+              </a:rPr>
+              <a:t>Trends Agric Economics, 2024</a:t>
+            </a:r>
+            <a:endParaRPr lang="en-US" sz="900" dirty="0"/>
+          </a:p>
+        </p:txBody>
+      </p:sp>
+      <p:sp>
+        <p:nvSpPr>
+          <p:cNvPr id="20" name="Shape 18"/>
+          <p:cNvSpPr/>
+          <p:nvPr/>
+        </p:nvSpPr>
+        <p:spPr>
+          <a:xfrm>
+            <a:off x="6217920" y="2596896"/>
+            <a:ext cx="5486400" cy="987552"/>
+          </a:xfrm>
+          <a:prstGeom prst="roundRect">
+            <a:avLst>
+              <a:gd name="adj" fmla="val 7407"/>
+            </a:avLst>
+          </a:prstGeom>
+          <a:solidFill>
+            <a:srgbClr val="1E4A06"/>
+          </a:solidFill>
+          <a:ln w="12700">
+            <a:solidFill>
+              <a:srgbClr val="2D5A08"/>
+            </a:solidFill>
+            <a:prstDash val="solid"/>
+          </a:ln>
+        </p:spPr>
+      </p:sp>
+      <p:sp>
+        <p:nvSpPr>
+          <p:cNvPr id="21" name="Shape 19"/>
+          <p:cNvSpPr/>
+          <p:nvPr/>
+        </p:nvSpPr>
+        <p:spPr>
+          <a:xfrm>
+            <a:off x="6217920" y="2596896"/>
+            <a:ext cx="658368" cy="987552"/>
+          </a:xfrm>
+          <a:prstGeom prst="roundRect">
+            <a:avLst>
+              <a:gd name="adj" fmla="val 11111"/>
+            </a:avLst>
+          </a:prstGeom>
+          <a:solidFill>
+            <a:srgbClr val="D4A017"/>
+          </a:solidFill>
+          <a:ln w="12700">
+            <a:solidFill>
+              <a:srgbClr val="D4A017"/>
+            </a:solidFill>
+            <a:prstDash val="solid"/>
+          </a:ln>
+        </p:spPr>
+      </p:sp>
+      <p:sp>
+        <p:nvSpPr>
+          <p:cNvPr id="22" name="Text 20"/>
+          <p:cNvSpPr/>
+          <p:nvPr/>
+        </p:nvSpPr>
+        <p:spPr>
+          <a:xfrm>
+            <a:off x="6217920" y="2889504"/>
+            <a:ext cx="658368" cy="365760"/>
+          </a:xfrm>
+          <a:prstGeom prst="rect">
+            <a:avLst/>
+          </a:prstGeom>
+          <a:noFill/>
+          <a:ln/>
+        </p:spPr>
+        <p:txBody>
+          <a:bodyPr wrap="square" rtlCol="0" anchor="ctr"/>
+          <a:lstStyle/>
+          <a:p>
+            <a:pPr algn="ctr" indent="0" marL="0">
+              <a:buNone/>
+            </a:pPr>
+            <a:r>
+              <a:rPr lang="en-US" sz="900" b="1" dirty="0">
+                <a:solidFill>
+                  <a:srgbClr val="FFFFFF"/>
+                </a:solidFill>
+                <a:latin typeface="Calibri" pitchFamily="34" charset="0"/>
+                <a:ea typeface="Calibri" pitchFamily="34" charset="-122"/>
+                <a:cs typeface="Calibri" pitchFamily="34" charset="-120"/>
+              </a:rPr>
+              <a:t>Teff</a:t>
+            </a:r>
+            <a:endParaRPr lang="en-US" sz="900" dirty="0"/>
+          </a:p>
+        </p:txBody>
+      </p:sp>
+      <p:sp>
+        <p:nvSpPr>
+          <p:cNvPr id="23" name="Text 21"/>
+          <p:cNvSpPr/>
+          <p:nvPr/>
+        </p:nvSpPr>
+        <p:spPr>
+          <a:xfrm>
+            <a:off x="6967728" y="2688336"/>
+            <a:ext cx="4572000" cy="411480"/>
+          </a:xfrm>
+          <a:prstGeom prst="rect">
+            <a:avLst/>
+          </a:prstGeom>
+          <a:noFill/>
+          <a:ln/>
+        </p:spPr>
+        <p:txBody>
+          <a:bodyPr wrap="square" rtlCol="0" anchor="ctr"/>
+          <a:lstStyle/>
+          <a:p>
+            <a:pPr indent="0" marL="0">
+              <a:buNone/>
+            </a:pPr>
+            <a:r>
+              <a:rPr lang="en-US" sz="1100" b="1" dirty="0">
+                <a:solidFill>
+                  <a:srgbClr val="B8DC7A"/>
+                </a:solidFill>
+                <a:latin typeface="Calibri" pitchFamily="34" charset="0"/>
+                <a:ea typeface="Calibri" pitchFamily="34" charset="-122"/>
+                <a:cs typeface="Calibri" pitchFamily="34" charset="-120"/>
+              </a:rPr>
+              <a:t>Major Tef Diseases — Updated Review</a:t>
+            </a:r>
+            <a:endParaRPr lang="en-US" sz="1100" dirty="0"/>
+          </a:p>
+        </p:txBody>
+      </p:sp>
+      <p:sp>
+        <p:nvSpPr>
+          <p:cNvPr id="24" name="Text 22"/>
+          <p:cNvSpPr/>
+          <p:nvPr/>
+        </p:nvSpPr>
+        <p:spPr>
+          <a:xfrm>
+            <a:off x="6967728" y="3145536"/>
+            <a:ext cx="4572000" cy="320040"/>
+          </a:xfrm>
+          <a:prstGeom prst="rect">
+            <a:avLst/>
+          </a:prstGeom>
+          <a:noFill/>
+          <a:ln/>
+        </p:spPr>
+        <p:txBody>
+          <a:bodyPr wrap="square" rtlCol="0" anchor="ctr"/>
+          <a:lstStyle/>
+          <a:p>
+            <a:pPr indent="0" marL="0">
+              <a:buNone/>
+            </a:pPr>
+            <a:r>
+              <a:rPr lang="en-US" sz="900" dirty="0">
+                <a:solidFill>
+                  <a:srgbClr val="AACCAA"/>
+                </a:solidFill>
+                <a:latin typeface="Calibri" pitchFamily="34" charset="0"/>
+                <a:ea typeface="Calibri" pitchFamily="34" charset="-122"/>
+                <a:cs typeface="Calibri" pitchFamily="34" charset="-120"/>
+              </a:rPr>
+              <a:t>EIAR Debre Zeit ARC, 2025</a:t>
+            </a:r>
+            <a:endParaRPr lang="en-US" sz="900" dirty="0"/>
+          </a:p>
+        </p:txBody>
+      </p:sp>
+      <p:sp>
+        <p:nvSpPr>
+          <p:cNvPr id="25" name="Shape 23"/>
+          <p:cNvSpPr/>
+          <p:nvPr/>
+        </p:nvSpPr>
+        <p:spPr>
+          <a:xfrm>
+            <a:off x="365760" y="3712464"/>
+            <a:ext cx="5486400" cy="987552"/>
+          </a:xfrm>
+          <a:prstGeom prst="roundRect">
+            <a:avLst>
+              <a:gd name="adj" fmla="val 7407"/>
+            </a:avLst>
+          </a:prstGeom>
+          <a:solidFill>
+            <a:srgbClr val="1E4A06"/>
+          </a:solidFill>
+          <a:ln w="12700">
+            <a:solidFill>
+              <a:srgbClr val="2D5A08"/>
+            </a:solidFill>
+            <a:prstDash val="solid"/>
+          </a:ln>
+        </p:spPr>
+      </p:sp>
+      <p:sp>
+        <p:nvSpPr>
+          <p:cNvPr id="26" name="Shape 24"/>
+          <p:cNvSpPr/>
+          <p:nvPr/>
+        </p:nvSpPr>
+        <p:spPr>
+          <a:xfrm>
+            <a:off x="365760" y="3712464"/>
+            <a:ext cx="658368" cy="987552"/>
+          </a:xfrm>
+          <a:prstGeom prst="roundRect">
+            <a:avLst>
+              <a:gd name="adj" fmla="val 11111"/>
+            </a:avLst>
+          </a:prstGeom>
+          <a:solidFill>
+            <a:srgbClr val="D4A017"/>
+          </a:solidFill>
+          <a:ln w="12700">
+            <a:solidFill>
+              <a:srgbClr val="D4A017"/>
+            </a:solidFill>
+            <a:prstDash val="solid"/>
+          </a:ln>
+        </p:spPr>
+      </p:sp>
+      <p:sp>
+        <p:nvSpPr>
+          <p:cNvPr id="27" name="Text 25"/>
+          <p:cNvSpPr/>
+          <p:nvPr/>
+        </p:nvSpPr>
+        <p:spPr>
+          <a:xfrm>
+            <a:off x="365760" y="4005072"/>
+            <a:ext cx="658368" cy="365760"/>
+          </a:xfrm>
+          <a:prstGeom prst="rect">
+            <a:avLst/>
+          </a:prstGeom>
+          <a:noFill/>
+          <a:ln/>
+        </p:spPr>
+        <p:txBody>
+          <a:bodyPr wrap="square" rtlCol="0" anchor="ctr"/>
+          <a:lstStyle/>
+          <a:p>
+            <a:pPr algn="ctr" indent="0" marL="0">
+              <a:buNone/>
+            </a:pPr>
+            <a:r>
+              <a:rPr lang="en-US" sz="900" b="1" dirty="0">
+                <a:solidFill>
+                  <a:srgbClr val="FFFFFF"/>
+                </a:solidFill>
+                <a:latin typeface="Calibri" pitchFamily="34" charset="0"/>
+                <a:ea typeface="Calibri" pitchFamily="34" charset="-122"/>
+                <a:cs typeface="Calibri" pitchFamily="34" charset="-120"/>
+              </a:rPr>
+              <a:t>Teff</a:t>
+            </a:r>
+            <a:endParaRPr lang="en-US" sz="900" dirty="0"/>
+          </a:p>
+        </p:txBody>
+      </p:sp>
+      <p:sp>
+        <p:nvSpPr>
+          <p:cNvPr id="28" name="Text 26"/>
+          <p:cNvSpPr/>
+          <p:nvPr/>
+        </p:nvSpPr>
+        <p:spPr>
+          <a:xfrm>
+            <a:off x="1115568" y="3803904"/>
+            <a:ext cx="4572000" cy="411480"/>
+          </a:xfrm>
+          <a:prstGeom prst="rect">
+            <a:avLst/>
+          </a:prstGeom>
+          <a:noFill/>
+          <a:ln/>
+        </p:spPr>
+        <p:txBody>
+          <a:bodyPr wrap="square" rtlCol="0" anchor="ctr"/>
+          <a:lstStyle/>
+          <a:p>
+            <a:pPr indent="0" marL="0">
+              <a:buNone/>
+            </a:pPr>
+            <a:r>
+              <a:rPr lang="en-US" sz="1100" b="1" dirty="0">
+                <a:solidFill>
+                  <a:srgbClr val="B8DC7A"/>
+                </a:solidFill>
+                <a:latin typeface="Calibri" pitchFamily="34" charset="0"/>
+                <a:ea typeface="Calibri" pitchFamily="34" charset="-122"/>
+                <a:cs typeface="Calibri" pitchFamily="34" charset="-120"/>
+              </a:rPr>
+              <a:t>Teff: A Healthy Crop of the Century</a:t>
+            </a:r>
+            <a:endParaRPr lang="en-US" sz="1100" dirty="0"/>
+          </a:p>
+        </p:txBody>
+      </p:sp>
+      <p:sp>
+        <p:nvSpPr>
+          <p:cNvPr id="29" name="Text 27"/>
+          <p:cNvSpPr/>
+          <p:nvPr/>
+        </p:nvSpPr>
+        <p:spPr>
+          <a:xfrm>
+            <a:off x="1115568" y="4261104"/>
+            <a:ext cx="4572000" cy="320040"/>
+          </a:xfrm>
+          <a:prstGeom prst="rect">
+            <a:avLst/>
+          </a:prstGeom>
+          <a:noFill/>
+          <a:ln/>
+        </p:spPr>
+        <p:txBody>
+          <a:bodyPr wrap="square" rtlCol="0" anchor="ctr"/>
+          <a:lstStyle/>
+          <a:p>
+            <a:pPr indent="0" marL="0">
+              <a:buNone/>
+            </a:pPr>
+            <a:r>
+              <a:rPr lang="en-US" sz="900" dirty="0">
+                <a:solidFill>
+                  <a:srgbClr val="AACCAA"/>
+                </a:solidFill>
+                <a:latin typeface="Calibri" pitchFamily="34" charset="0"/>
+                <a:ea typeface="Calibri" pitchFamily="34" charset="-122"/>
+                <a:cs typeface="Calibri" pitchFamily="34" charset="-120"/>
+              </a:rPr>
+              <a:t>Discover Crops, Springer, 2025</a:t>
+            </a:r>
+            <a:endParaRPr lang="en-US" sz="900" dirty="0"/>
+          </a:p>
+        </p:txBody>
+      </p:sp>
+      <p:sp>
+        <p:nvSpPr>
+          <p:cNvPr id="30" name="Shape 28"/>
+          <p:cNvSpPr/>
+          <p:nvPr/>
+        </p:nvSpPr>
+        <p:spPr>
+          <a:xfrm>
+            <a:off x="6217920" y="3712464"/>
+            <a:ext cx="5486400" cy="987552"/>
+          </a:xfrm>
+          <a:prstGeom prst="roundRect">
+            <a:avLst>
+              <a:gd name="adj" fmla="val 7407"/>
+            </a:avLst>
+          </a:prstGeom>
+          <a:solidFill>
+            <a:srgbClr val="1E4A06"/>
+          </a:solidFill>
+          <a:ln w="12700">
+            <a:solidFill>
+              <a:srgbClr val="2D5A08"/>
+            </a:solidFill>
+            <a:prstDash val="solid"/>
+          </a:ln>
+        </p:spPr>
+      </p:sp>
+      <p:sp>
+        <p:nvSpPr>
+          <p:cNvPr id="31" name="Shape 29"/>
+          <p:cNvSpPr/>
+          <p:nvPr/>
+        </p:nvSpPr>
+        <p:spPr>
+          <a:xfrm>
+            <a:off x="6217920" y="3712464"/>
+            <a:ext cx="658368" cy="987552"/>
+          </a:xfrm>
+          <a:prstGeom prst="roundRect">
+            <a:avLst>
+              <a:gd name="adj" fmla="val 11111"/>
+            </a:avLst>
+          </a:prstGeom>
+          <a:solidFill>
+            <a:srgbClr val="1565C0"/>
+          </a:solidFill>
+          <a:ln w="12700">
+            <a:solidFill>
+              <a:srgbClr val="1565C0"/>
+            </a:solidFill>
+            <a:prstDash val="solid"/>
+          </a:ln>
+        </p:spPr>
+      </p:sp>
+      <p:sp>
+        <p:nvSpPr>
+          <p:cNvPr id="32" name="Text 30"/>
+          <p:cNvSpPr/>
+          <p:nvPr/>
+        </p:nvSpPr>
+        <p:spPr>
+          <a:xfrm>
+            <a:off x="6217920" y="4005072"/>
+            <a:ext cx="658368" cy="365760"/>
+          </a:xfrm>
+          <a:prstGeom prst="rect">
+            <a:avLst/>
+          </a:prstGeom>
+          <a:noFill/>
+          <a:ln/>
+        </p:spPr>
+        <p:txBody>
+          <a:bodyPr wrap="square" rtlCol="0" anchor="ctr"/>
+          <a:lstStyle/>
+          <a:p>
+            <a:pPr algn="ctr" indent="0" marL="0">
+              <a:buNone/>
+            </a:pPr>
+            <a:r>
+              <a:rPr lang="en-US" sz="900" b="1" dirty="0">
+                <a:solidFill>
+                  <a:srgbClr val="FFFFFF"/>
+                </a:solidFill>
+                <a:latin typeface="Calibri" pitchFamily="34" charset="0"/>
+                <a:ea typeface="Calibri" pitchFamily="34" charset="-122"/>
+                <a:cs typeface="Calibri" pitchFamily="34" charset="-120"/>
+              </a:rPr>
+              <a:t>Wheat</a:t>
+            </a:r>
+            <a:endParaRPr lang="en-US" sz="900" dirty="0"/>
+          </a:p>
+        </p:txBody>
+      </p:sp>
+      <p:sp>
+        <p:nvSpPr>
+          <p:cNvPr id="33" name="Text 31"/>
+          <p:cNvSpPr/>
+          <p:nvPr/>
+        </p:nvSpPr>
+        <p:spPr>
+          <a:xfrm>
+            <a:off x="6967728" y="3803904"/>
+            <a:ext cx="4572000" cy="411480"/>
+          </a:xfrm>
+          <a:prstGeom prst="rect">
+            <a:avLst/>
+          </a:prstGeom>
+          <a:noFill/>
+          <a:ln/>
+        </p:spPr>
+        <p:txBody>
+          <a:bodyPr wrap="square" rtlCol="0" anchor="ctr"/>
+          <a:lstStyle/>
+          <a:p>
+            <a:pPr indent="0" marL="0">
+              <a:buNone/>
+            </a:pPr>
+            <a:r>
+              <a:rPr lang="en-US" sz="1100" b="1" dirty="0">
+                <a:solidFill>
+                  <a:srgbClr val="B8DC7A"/>
+                </a:solidFill>
+                <a:latin typeface="Calibri" pitchFamily="34" charset="0"/>
+                <a:ea typeface="Calibri" pitchFamily="34" charset="-122"/>
+                <a:cs typeface="Calibri" pitchFamily="34" charset="-120"/>
+              </a:rPr>
+              <a:t>Early Warning System for Rust Ug99</a:t>
+            </a:r>
+            <a:endParaRPr lang="en-US" sz="1100" dirty="0"/>
+          </a:p>
+        </p:txBody>
+      </p:sp>
+      <p:sp>
+        <p:nvSpPr>
+          <p:cNvPr id="34" name="Text 32"/>
+          <p:cNvSpPr/>
+          <p:nvPr/>
+        </p:nvSpPr>
+        <p:spPr>
+          <a:xfrm>
+            <a:off x="6967728" y="4261104"/>
+            <a:ext cx="4572000" cy="320040"/>
+          </a:xfrm>
+          <a:prstGeom prst="rect">
+            <a:avLst/>
+          </a:prstGeom>
+          <a:noFill/>
+          <a:ln/>
+        </p:spPr>
+        <p:txBody>
+          <a:bodyPr wrap="square" rtlCol="0" anchor="ctr"/>
+          <a:lstStyle/>
+          <a:p>
+            <a:pPr indent="0" marL="0">
+              <a:buNone/>
+            </a:pPr>
+            <a:r>
+              <a:rPr lang="en-US" sz="900" dirty="0">
+                <a:solidFill>
+                  <a:srgbClr val="AACCAA"/>
+                </a:solidFill>
+                <a:latin typeface="Calibri" pitchFamily="34" charset="0"/>
+                <a:ea typeface="Calibri" pitchFamily="34" charset="-122"/>
+                <a:cs typeface="Calibri" pitchFamily="34" charset="-120"/>
+              </a:rPr>
+              <a:t>Cambridge / CIMMYT / EIAR, 2019</a:t>
+            </a:r>
+            <a:endParaRPr lang="en-US" sz="900" dirty="0"/>
+          </a:p>
+        </p:txBody>
+      </p:sp>
+      <p:sp>
+        <p:nvSpPr>
+          <p:cNvPr id="35" name="Shape 33"/>
+          <p:cNvSpPr/>
+          <p:nvPr/>
+        </p:nvSpPr>
+        <p:spPr>
+          <a:xfrm>
+            <a:off x="365760" y="4828032"/>
+            <a:ext cx="5486400" cy="987552"/>
+          </a:xfrm>
+          <a:prstGeom prst="roundRect">
+            <a:avLst>
+              <a:gd name="adj" fmla="val 7407"/>
+            </a:avLst>
+          </a:prstGeom>
+          <a:solidFill>
+            <a:srgbClr val="1E4A06"/>
+          </a:solidFill>
+          <a:ln w="12700">
+            <a:solidFill>
+              <a:srgbClr val="2D5A08"/>
+            </a:solidFill>
+            <a:prstDash val="solid"/>
+          </a:ln>
+        </p:spPr>
+      </p:sp>
+      <p:sp>
+        <p:nvSpPr>
+          <p:cNvPr id="36" name="Shape 34"/>
+          <p:cNvSpPr/>
+          <p:nvPr/>
+        </p:nvSpPr>
+        <p:spPr>
+          <a:xfrm>
+            <a:off x="365760" y="4828032"/>
+            <a:ext cx="658368" cy="987552"/>
+          </a:xfrm>
+          <a:prstGeom prst="roundRect">
+            <a:avLst>
+              <a:gd name="adj" fmla="val 11111"/>
+            </a:avLst>
+          </a:prstGeom>
+          <a:solidFill>
+            <a:srgbClr val="E67E22"/>
+          </a:solidFill>
+          <a:ln w="12700">
+            <a:solidFill>
+              <a:srgbClr val="E67E22"/>
+            </a:solidFill>
+            <a:prstDash val="solid"/>
+          </a:ln>
+        </p:spPr>
+      </p:sp>
+      <p:sp>
+        <p:nvSpPr>
+          <p:cNvPr id="37" name="Text 35"/>
+          <p:cNvSpPr/>
+          <p:nvPr/>
+        </p:nvSpPr>
+        <p:spPr>
+          <a:xfrm>
+            <a:off x="365760" y="5120640"/>
+            <a:ext cx="658368" cy="365760"/>
+          </a:xfrm>
+          <a:prstGeom prst="rect">
+            <a:avLst/>
+          </a:prstGeom>
+          <a:noFill/>
+          <a:ln/>
+        </p:spPr>
+        <p:txBody>
+          <a:bodyPr wrap="square" rtlCol="0" anchor="ctr"/>
+          <a:lstStyle/>
+          <a:p>
+            <a:pPr algn="ctr" indent="0" marL="0">
+              <a:buNone/>
+            </a:pPr>
+            <a:r>
+              <a:rPr lang="en-US" sz="900" b="1" dirty="0">
+                <a:solidFill>
+                  <a:srgbClr val="FFFFFF"/>
+                </a:solidFill>
+                <a:latin typeface="Calibri" pitchFamily="34" charset="0"/>
+                <a:ea typeface="Calibri" pitchFamily="34" charset="-122"/>
+                <a:cs typeface="Calibri" pitchFamily="34" charset="-120"/>
+              </a:rPr>
+              <a:t>Maize</a:t>
+            </a:r>
+            <a:endParaRPr lang="en-US" sz="900" dirty="0"/>
+          </a:p>
+        </p:txBody>
+      </p:sp>
+      <p:sp>
+        <p:nvSpPr>
+          <p:cNvPr id="38" name="Text 36"/>
+          <p:cNvSpPr/>
+          <p:nvPr/>
+        </p:nvSpPr>
+        <p:spPr>
+          <a:xfrm>
+            <a:off x="1115568" y="4919472"/>
+            <a:ext cx="4572000" cy="411480"/>
+          </a:xfrm>
+          <a:prstGeom prst="rect">
+            <a:avLst/>
+          </a:prstGeom>
+          <a:noFill/>
+          <a:ln/>
+        </p:spPr>
+        <p:txBody>
+          <a:bodyPr wrap="square" rtlCol="0" anchor="ctr"/>
+          <a:lstStyle/>
+          <a:p>
+            <a:pPr indent="0" marL="0">
+              <a:buNone/>
+            </a:pPr>
+            <a:r>
+              <a:rPr lang="en-US" sz="1100" b="1" dirty="0">
+                <a:solidFill>
+                  <a:srgbClr val="B8DC7A"/>
+                </a:solidFill>
+                <a:latin typeface="Calibri" pitchFamily="34" charset="0"/>
+                <a:ea typeface="Calibri" pitchFamily="34" charset="-122"/>
+                <a:cs typeface="Calibri" pitchFamily="34" charset="-120"/>
+              </a:rPr>
+              <a:t>Ethiopian Maize Disease &amp; Management</a:t>
+            </a:r>
+            <a:endParaRPr lang="en-US" sz="1100" dirty="0"/>
+          </a:p>
+        </p:txBody>
+      </p:sp>
+      <p:sp>
+        <p:nvSpPr>
+          <p:cNvPr id="39" name="Text 37"/>
+          <p:cNvSpPr/>
+          <p:nvPr/>
+        </p:nvSpPr>
+        <p:spPr>
+          <a:xfrm>
+            <a:off x="1115568" y="5376672"/>
+            <a:ext cx="4572000" cy="320040"/>
+          </a:xfrm>
+          <a:prstGeom prst="rect">
+            <a:avLst/>
+          </a:prstGeom>
+          <a:noFill/>
+          <a:ln/>
+        </p:spPr>
+        <p:txBody>
+          <a:bodyPr wrap="square" rtlCol="0" anchor="ctr"/>
+          <a:lstStyle/>
+          <a:p>
+            <a:pPr indent="0" marL="0">
+              <a:buNone/>
+            </a:pPr>
+            <a:r>
+              <a:rPr lang="en-US" sz="900" dirty="0">
+                <a:solidFill>
+                  <a:srgbClr val="AACCAA"/>
+                </a:solidFill>
+                <a:latin typeface="Calibri" pitchFamily="34" charset="0"/>
+                <a:ea typeface="Calibri" pitchFamily="34" charset="-122"/>
+                <a:cs typeface="Calibri" pitchFamily="34" charset="-120"/>
+              </a:rPr>
+              <a:t>MoA / FAO Ethiopia</a:t>
+            </a:r>
+            <a:endParaRPr lang="en-US" sz="900" dirty="0"/>
+          </a:p>
+        </p:txBody>
+      </p:sp>
+      <p:sp>
+        <p:nvSpPr>
+          <p:cNvPr id="40" name="Shape 38"/>
+          <p:cNvSpPr/>
+          <p:nvPr/>
+        </p:nvSpPr>
+        <p:spPr>
+          <a:xfrm>
+            <a:off x="6217920" y="4828032"/>
+            <a:ext cx="5486400" cy="987552"/>
+          </a:xfrm>
+          <a:prstGeom prst="roundRect">
+            <a:avLst>
+              <a:gd name="adj" fmla="val 7407"/>
+            </a:avLst>
+          </a:prstGeom>
+          <a:solidFill>
+            <a:srgbClr val="1E4A06"/>
+          </a:solidFill>
+          <a:ln w="12700">
+            <a:solidFill>
+              <a:srgbClr val="2D5A08"/>
+            </a:solidFill>
+            <a:prstDash val="solid"/>
+          </a:ln>
+        </p:spPr>
+      </p:sp>
+      <p:sp>
+        <p:nvSpPr>
+          <p:cNvPr id="41" name="Shape 39"/>
+          <p:cNvSpPr/>
+          <p:nvPr/>
+        </p:nvSpPr>
+        <p:spPr>
+          <a:xfrm>
+            <a:off x="6217920" y="4828032"/>
+            <a:ext cx="658368" cy="987552"/>
+          </a:xfrm>
+          <a:prstGeom prst="roundRect">
+            <a:avLst>
+              <a:gd name="adj" fmla="val 11111"/>
+            </a:avLst>
+          </a:prstGeom>
+          <a:solidFill>
+            <a:srgbClr val="7B5EA7"/>
+          </a:solidFill>
+          <a:ln w="12700">
+            <a:solidFill>
+              <a:srgbClr val="7B5EA7"/>
+            </a:solidFill>
+            <a:prstDash val="solid"/>
+          </a:ln>
+        </p:spPr>
+      </p:sp>
+      <p:sp>
+        <p:nvSpPr>
+          <p:cNvPr id="42" name="Text 40"/>
+          <p:cNvSpPr/>
+          <p:nvPr/>
+        </p:nvSpPr>
+        <p:spPr>
+          <a:xfrm>
+            <a:off x="6217920" y="5120640"/>
+            <a:ext cx="658368" cy="365760"/>
+          </a:xfrm>
+          <a:prstGeom prst="rect">
+            <a:avLst/>
+          </a:prstGeom>
+          <a:noFill/>
+          <a:ln/>
+        </p:spPr>
+        <p:txBody>
+          <a:bodyPr wrap="square" rtlCol="0" anchor="ctr"/>
+          <a:lstStyle/>
+          <a:p>
+            <a:pPr algn="ctr" indent="0" marL="0">
+              <a:buNone/>
+            </a:pPr>
+            <a:r>
+              <a:rPr lang="en-US" sz="900" b="1" dirty="0">
+                <a:solidFill>
+                  <a:srgbClr val="FFFFFF"/>
+                </a:solidFill>
+                <a:latin typeface="Calibri" pitchFamily="34" charset="0"/>
+                <a:ea typeface="Calibri" pitchFamily="34" charset="-122"/>
+                <a:cs typeface="Calibri" pitchFamily="34" charset="-120"/>
+              </a:rPr>
+              <a:t>Multi</a:t>
+            </a:r>
+            <a:endParaRPr lang="en-US" sz="900" dirty="0"/>
+          </a:p>
+        </p:txBody>
+      </p:sp>
+      <p:sp>
+        <p:nvSpPr>
+          <p:cNvPr id="43" name="Text 41"/>
+          <p:cNvSpPr/>
+          <p:nvPr/>
+        </p:nvSpPr>
+        <p:spPr>
+          <a:xfrm>
+            <a:off x="6967728" y="4919472"/>
+            <a:ext cx="4572000" cy="411480"/>
+          </a:xfrm>
+          <a:prstGeom prst="rect">
+            <a:avLst/>
+          </a:prstGeom>
+          <a:noFill/>
+          <a:ln/>
+        </p:spPr>
+        <p:txBody>
+          <a:bodyPr wrap="square" rtlCol="0" anchor="ctr"/>
+          <a:lstStyle/>
+          <a:p>
+            <a:pPr indent="0" marL="0">
+              <a:buNone/>
+            </a:pPr>
+            <a:r>
+              <a:rPr lang="en-US" sz="1100" b="1" dirty="0">
+                <a:solidFill>
+                  <a:srgbClr val="B8DC7A"/>
+                </a:solidFill>
+                <a:latin typeface="Calibri" pitchFamily="34" charset="0"/>
+                <a:ea typeface="Calibri" pitchFamily="34" charset="-122"/>
+                <a:cs typeface="Calibri" pitchFamily="34" charset="-120"/>
+              </a:rPr>
+              <a:t>McKnight-CCRP Integrated Management</a:t>
+            </a:r>
+            <a:endParaRPr lang="en-US" sz="1100" dirty="0"/>
+          </a:p>
+        </p:txBody>
+      </p:sp>
+      <p:sp>
+        <p:nvSpPr>
+          <p:cNvPr id="44" name="Text 42"/>
+          <p:cNvSpPr/>
+          <p:nvPr/>
+        </p:nvSpPr>
+        <p:spPr>
+          <a:xfrm>
+            <a:off x="6967728" y="5376672"/>
+            <a:ext cx="4572000" cy="320040"/>
+          </a:xfrm>
+          <a:prstGeom prst="rect">
+            <a:avLst/>
+          </a:prstGeom>
+          <a:noFill/>
+          <a:ln/>
+        </p:spPr>
+        <p:txBody>
+          <a:bodyPr wrap="square" rtlCol="0" anchor="ctr"/>
+          <a:lstStyle/>
+          <a:p>
+            <a:pPr indent="0" marL="0">
+              <a:buNone/>
+            </a:pPr>
+            <a:r>
+              <a:rPr lang="en-US" sz="900" dirty="0">
+                <a:solidFill>
+                  <a:srgbClr val="AACCAA"/>
+                </a:solidFill>
+                <a:latin typeface="Calibri" pitchFamily="34" charset="0"/>
+                <a:ea typeface="Calibri" pitchFamily="34" charset="-122"/>
+                <a:cs typeface="Calibri" pitchFamily="34" charset="-120"/>
+              </a:rPr>
+              <a:t>McKnight Foundation / CGIAR, 2022</a:t>
+            </a:r>
+            <a:endParaRPr lang="en-US" sz="900" dirty="0"/>
+          </a:p>
+        </p:txBody>
+      </p:sp>
+    </p:spTree>
+  </p:cSld>
+  <p:clrMapOvr>
+    <a:masterClrMapping/>
+  </p:clrMapOvr>
+</p:sld>
+</file>
+
+<file path=ppt/slides/slide6.xml><?xml version="1.0" encoding="utf-8"?>
+<p:sld xmlns:a="http://schemas.openxmlformats.org/drawingml/2006/main" xmlns:r="http://schemas.openxmlformats.org/officeDocument/2006/relationships" xmlns:p="http://schemas.openxmlformats.org/presentationml/2006/main">
+  <p:cSld name="Slide 6">
     <p:bg>
       <p:bgPr>
         <a:solidFill>
@@ -5328,7 +6759,7 @@
                 <a:ea typeface="Georgia" pitchFamily="34" charset="-122"/>
                 <a:cs typeface="Georgia" pitchFamily="34" charset="-120"/>
               </a:rPr>
-              <a:t>Designed to Reach 15 Million Ethiopian Farming Families</a:t>
+              <a:t>Designed to Protect Crops for 15 Million Ethiopian Farming Families</a:t>
             </a:r>
             <a:endParaRPr lang="en-US" sz="2200" dirty="0"/>
           </a:p>
@@ -5343,11 +6774,11 @@
         <p:spPr>
           <a:xfrm>
             <a:off x="457200" y="1645920"/>
-            <a:ext cx="3474720" cy="1417320"/>
+            <a:ext cx="3474720" cy="1463040"/>
           </a:xfrm>
           <a:prstGeom prst="roundRect">
             <a:avLst>
-              <a:gd name="adj" fmla="val 7742"/>
+              <a:gd name="adj" fmla="val 7500"/>
             </a:avLst>
           </a:prstGeom>
           <a:solidFill>
@@ -5370,7 +6801,7 @@
         <p:spPr>
           <a:xfrm>
             <a:off x="457200" y="1737360"/>
-            <a:ext cx="3474720" cy="685800"/>
+            <a:ext cx="3474720" cy="713232"/>
           </a:xfrm>
           <a:prstGeom prst="rect">
             <a:avLst/>
@@ -5386,7 +6817,7 @@
               <a:buNone/>
             </a:pPr>
             <a:r>
-              <a:rPr lang="en-US" sz="3200" b="1" dirty="0">
+              <a:rPr lang="en-US" sz="3400" b="1" dirty="0">
                 <a:solidFill>
                   <a:srgbClr val="B8DC7A"/>
                 </a:solidFill>
@@ -5396,7 +6827,7 @@
               </a:rPr>
               <a:t>40–70%</a:t>
             </a:r>
-            <a:endParaRPr lang="en-US" sz="3200" dirty="0"/>
+            <a:endParaRPr lang="en-US" sz="3400" dirty="0"/>
           </a:p>
         </p:txBody>
       </p:sp>
@@ -5408,7 +6839,7 @@
         </p:nvSpPr>
         <p:spPr>
           <a:xfrm>
-            <a:off x="457200" y="2468880"/>
+            <a:off x="457200" y="2514600"/>
             <a:ext cx="3474720" cy="457200"/>
           </a:xfrm>
           <a:prstGeom prst="rect">
@@ -5465,11 +6896,11 @@
         <p:spPr>
           <a:xfrm>
             <a:off x="4297680" y="1645920"/>
-            <a:ext cx="3474720" cy="1417320"/>
+            <a:ext cx="3474720" cy="1463040"/>
           </a:xfrm>
           <a:prstGeom prst="roundRect">
             <a:avLst>
-              <a:gd name="adj" fmla="val 7742"/>
+              <a:gd name="adj" fmla="val 7500"/>
             </a:avLst>
           </a:prstGeom>
           <a:solidFill>
@@ -5492,7 +6923,7 @@
         <p:spPr>
           <a:xfrm>
             <a:off x="4297680" y="1737360"/>
-            <a:ext cx="3474720" cy="685800"/>
+            <a:ext cx="3474720" cy="713232"/>
           </a:xfrm>
           <a:prstGeom prst="rect">
             <a:avLst/>
@@ -5508,7 +6939,7 @@
               <a:buNone/>
             </a:pPr>
             <a:r>
-              <a:rPr lang="en-US" sz="3200" b="1" dirty="0">
+              <a:rPr lang="en-US" sz="3400" b="1" dirty="0">
                 <a:solidFill>
                   <a:srgbClr val="B8DC7A"/>
                 </a:solidFill>
@@ -5518,7 +6949,7 @@
               </a:rPr>
               <a:t>42</a:t>
             </a:r>
-            <a:endParaRPr lang="en-US" sz="3200" dirty="0"/>
+            <a:endParaRPr lang="en-US" sz="3400" dirty="0"/>
           </a:p>
         </p:txBody>
       </p:sp>
@@ -5530,7 +6961,7 @@
         </p:nvSpPr>
         <p:spPr>
           <a:xfrm>
-            <a:off x="4297680" y="2468880"/>
+            <a:off x="4297680" y="2514600"/>
             <a:ext cx="3474720" cy="457200"/>
           </a:xfrm>
           <a:prstGeom prst="rect">
@@ -5587,11 +7018,11 @@
         <p:spPr>
           <a:xfrm>
             <a:off x="8138160" y="1645920"/>
-            <a:ext cx="3474720" cy="1417320"/>
+            <a:ext cx="3474720" cy="1463040"/>
           </a:xfrm>
           <a:prstGeom prst="roundRect">
             <a:avLst>
-              <a:gd name="adj" fmla="val 7742"/>
+              <a:gd name="adj" fmla="val 7500"/>
             </a:avLst>
           </a:prstGeom>
           <a:solidFill>
@@ -5614,7 +7045,7 @@
         <p:spPr>
           <a:xfrm>
             <a:off x="8138160" y="1737360"/>
-            <a:ext cx="3474720" cy="685800"/>
+            <a:ext cx="3474720" cy="713232"/>
           </a:xfrm>
           <a:prstGeom prst="rect">
             <a:avLst/>
@@ -5630,7 +7061,7 @@
               <a:buNone/>
             </a:pPr>
             <a:r>
-              <a:rPr lang="en-US" sz="3200" b="1" dirty="0">
+              <a:rPr lang="en-US" sz="3400" b="1" dirty="0">
                 <a:solidFill>
                   <a:srgbClr val="B8DC7A"/>
                 </a:solidFill>
@@ -5640,7 +7071,7 @@
               </a:rPr>
               <a:t>8</a:t>
             </a:r>
-            <a:endParaRPr lang="en-US" sz="3200" dirty="0"/>
+            <a:endParaRPr lang="en-US" sz="3400" dirty="0"/>
           </a:p>
         </p:txBody>
       </p:sp>
@@ -5652,7 +7083,7 @@
         </p:nvSpPr>
         <p:spPr>
           <a:xfrm>
-            <a:off x="8138160" y="2468880"/>
+            <a:off x="8138160" y="2514600"/>
             <a:ext cx="3474720" cy="457200"/>
           </a:xfrm>
           <a:prstGeom prst="rect">
@@ -5708,12 +7139,12 @@
         </p:nvSpPr>
         <p:spPr>
           <a:xfrm>
-            <a:off x="457200" y="3246120"/>
-            <a:ext cx="3474720" cy="1417320"/>
+            <a:off x="457200" y="3273552"/>
+            <a:ext cx="3474720" cy="1463040"/>
           </a:xfrm>
           <a:prstGeom prst="roundRect">
             <a:avLst>
-              <a:gd name="adj" fmla="val 7742"/>
+              <a:gd name="adj" fmla="val 7500"/>
             </a:avLst>
           </a:prstGeom>
           <a:solidFill>
@@ -5735,8 +7166,8 @@
         </p:nvSpPr>
         <p:spPr>
           <a:xfrm>
-            <a:off x="457200" y="3337560"/>
-            <a:ext cx="3474720" cy="685800"/>
+            <a:off x="457200" y="3364992"/>
+            <a:ext cx="3474720" cy="713232"/>
           </a:xfrm>
           <a:prstGeom prst="rect">
             <a:avLst/>
@@ -5752,7 +7183,7 @@
               <a:buNone/>
             </a:pPr>
             <a:r>
-              <a:rPr lang="en-US" sz="3200" b="1" dirty="0">
+              <a:rPr lang="en-US" sz="3400" b="1" dirty="0">
                 <a:solidFill>
                   <a:srgbClr val="B8DC7A"/>
                 </a:solidFill>
@@ -5760,9 +7191,9 @@
                 <a:ea typeface="Georgia" pitchFamily="34" charset="-122"/>
                 <a:cs typeface="Georgia" pitchFamily="34" charset="-120"/>
               </a:rPr>
-              <a:t>23+</a:t>
-            </a:r>
-            <a:endParaRPr lang="en-US" sz="3200" dirty="0"/>
+              <a:t>95</a:t>
+            </a:r>
+            <a:endParaRPr lang="en-US" sz="3400" dirty="0"/>
           </a:p>
         </p:txBody>
       </p:sp>
@@ -5774,7 +7205,7 @@
         </p:nvSpPr>
         <p:spPr>
           <a:xfrm>
-            <a:off x="457200" y="4069080"/>
+            <a:off x="457200" y="4142232"/>
             <a:ext cx="3474720" cy="457200"/>
           </a:xfrm>
           <a:prstGeom prst="rect">
@@ -5799,7 +7230,7 @@
                 <a:ea typeface="Calibri" pitchFamily="34" charset="-122"/>
                 <a:cs typeface="Calibri" pitchFamily="34" charset="-120"/>
               </a:rPr>
-              <a:t>Peer-reviewed papers</a:t>
+              <a:t>Translation keys</a:t>
             </a:r>
             <a:endParaRPr lang="en-US" sz="1000" dirty="0"/>
           </a:p>
@@ -5816,7 +7247,7 @@
                 <a:ea typeface="Calibri" pitchFamily="34" charset="-122"/>
                 <a:cs typeface="Calibri" pitchFamily="34" charset="-120"/>
               </a:rPr>
-              <a:t>in knowledge base</a:t>
+              <a:t>per language</a:t>
             </a:r>
             <a:endParaRPr lang="en-US" sz="1000" dirty="0"/>
           </a:p>
@@ -5830,12 +7261,12 @@
         </p:nvSpPr>
         <p:spPr>
           <a:xfrm>
-            <a:off x="4297680" y="3246120"/>
-            <a:ext cx="3474720" cy="1417320"/>
+            <a:off x="4297680" y="3273552"/>
+            <a:ext cx="3474720" cy="1463040"/>
           </a:xfrm>
           <a:prstGeom prst="roundRect">
             <a:avLst>
-              <a:gd name="adj" fmla="val 7742"/>
+              <a:gd name="adj" fmla="val 7500"/>
             </a:avLst>
           </a:prstGeom>
           <a:solidFill>
@@ -5857,8 +7288,8 @@
         </p:nvSpPr>
         <p:spPr>
           <a:xfrm>
-            <a:off x="4297680" y="3337560"/>
-            <a:ext cx="3474720" cy="685800"/>
+            <a:off x="4297680" y="3364992"/>
+            <a:ext cx="3474720" cy="713232"/>
           </a:xfrm>
           <a:prstGeom prst="rect">
             <a:avLst/>
@@ -5874,7 +7305,7 @@
               <a:buNone/>
             </a:pPr>
             <a:r>
-              <a:rPr lang="en-US" sz="3200" b="1" dirty="0">
+              <a:rPr lang="en-US" sz="3400" b="1" dirty="0">
                 <a:solidFill>
                   <a:srgbClr val="B8DC7A"/>
                 </a:solidFill>
@@ -5884,7 +7315,7 @@
               </a:rPr>
               <a:t>6</a:t>
             </a:r>
-            <a:endParaRPr lang="en-US" sz="3200" dirty="0"/>
+            <a:endParaRPr lang="en-US" sz="3400" dirty="0"/>
           </a:p>
         </p:txBody>
       </p:sp>
@@ -5896,7 +7327,7 @@
         </p:nvSpPr>
         <p:spPr>
           <a:xfrm>
-            <a:off x="4297680" y="4069080"/>
+            <a:off x="4297680" y="4142232"/>
             <a:ext cx="3474720" cy="457200"/>
           </a:xfrm>
           <a:prstGeom prst="rect">
@@ -5952,12 +7383,12 @@
         </p:nvSpPr>
         <p:spPr>
           <a:xfrm>
-            <a:off x="8138160" y="3246120"/>
-            <a:ext cx="3474720" cy="1417320"/>
+            <a:off x="8138160" y="3273552"/>
+            <a:ext cx="3474720" cy="1463040"/>
           </a:xfrm>
           <a:prstGeom prst="roundRect">
             <a:avLst>
-              <a:gd name="adj" fmla="val 7742"/>
+              <a:gd name="adj" fmla="val 7500"/>
             </a:avLst>
           </a:prstGeom>
           <a:solidFill>
@@ -5979,8 +7410,8 @@
         </p:nvSpPr>
         <p:spPr>
           <a:xfrm>
-            <a:off x="8138160" y="3337560"/>
-            <a:ext cx="3474720" cy="685800"/>
+            <a:off x="8138160" y="3364992"/>
+            <a:ext cx="3474720" cy="713232"/>
           </a:xfrm>
           <a:prstGeom prst="rect">
             <a:avLst/>
@@ -5996,7 +7427,7 @@
               <a:buNone/>
             </a:pPr>
             <a:r>
-              <a:rPr lang="en-US" sz="3200" b="1" dirty="0">
+              <a:rPr lang="en-US" sz="3400" b="1" dirty="0">
                 <a:solidFill>
                   <a:srgbClr val="B8DC7A"/>
                 </a:solidFill>
@@ -6006,7 +7437,7 @@
               </a:rPr>
               <a:t>17</a:t>
             </a:r>
-            <a:endParaRPr lang="en-US" sz="3200" dirty="0"/>
+            <a:endParaRPr lang="en-US" sz="3400" dirty="0"/>
           </a:p>
         </p:txBody>
       </p:sp>
@@ -6018,7 +7449,7 @@
         </p:nvSpPr>
         <p:spPr>
           <a:xfrm>
-            <a:off x="8138160" y="4069080"/>
+            <a:off x="8138160" y="4142232"/>
             <a:ext cx="3474720" cy="457200"/>
           </a:xfrm>
           <a:prstGeom prst="rect">
@@ -6074,9 +7505,9 @@
 </p:sld>
 </file>
 
-<file path=ppt/slides/slide6.xml><?xml version="1.0" encoding="utf-8"?>
+<file path=ppt/slides/slide7.xml><?xml version="1.0" encoding="utf-8"?>
 <p:sld xmlns:a="http://schemas.openxmlformats.org/drawingml/2006/main" xmlns:r="http://schemas.openxmlformats.org/officeDocument/2006/relationships" xmlns:p="http://schemas.openxmlformats.org/presentationml/2006/main">
-  <p:cSld name="Slide 6">
+  <p:cSld name="Slide 7">
     <p:bg>
       <p:bgPr>
         <a:solidFill>
@@ -6198,7 +7629,7 @@
         <p:spPr>
           <a:xfrm>
             <a:off x="640080" y="868680"/>
-            <a:ext cx="2926080" cy="320040"/>
+            <a:ext cx="2743200" cy="320040"/>
           </a:xfrm>
           <a:prstGeom prst="rect">
             <a:avLst/>
@@ -6236,8 +7667,8 @@
         </p:nvSpPr>
         <p:spPr>
           <a:xfrm>
-            <a:off x="3566160" y="868680"/>
-            <a:ext cx="7863840" cy="320040"/>
+            <a:off x="3383280" y="868680"/>
+            <a:ext cx="8229600" cy="320040"/>
           </a:xfrm>
           <a:prstGeom prst="rect">
             <a:avLst/>
@@ -6261,7 +7692,7 @@
                 <a:ea typeface="Calibri" pitchFamily="34" charset="-122"/>
                 <a:cs typeface="Calibri" pitchFamily="34" charset="-120"/>
               </a:rPr>
-              <a:t>PWA · 6 Languages · Voice TTS/STT · Offline · Push + SMS Notifications</a:t>
+              <a:t>PWA · 6 Languages · Voice TTS + STT · Offline-First · Push + SMS · sebilai.com</a:t>
             </a:r>
             <a:endParaRPr lang="en-US" sz="1000" dirty="0"/>
           </a:p>
@@ -6303,7 +7734,7 @@
         <p:spPr>
           <a:xfrm>
             <a:off x="640080" y="1801368"/>
-            <a:ext cx="2926080" cy="320040"/>
+            <a:ext cx="2743200" cy="320040"/>
           </a:xfrm>
           <a:prstGeom prst="rect">
             <a:avLst/>
@@ -6341,8 +7772,8 @@
         </p:nvSpPr>
         <p:spPr>
           <a:xfrm>
-            <a:off x="3566160" y="1801368"/>
-            <a:ext cx="7863840" cy="320040"/>
+            <a:off x="3383280" y="1801368"/>
+            <a:ext cx="8229600" cy="320040"/>
           </a:xfrm>
           <a:prstGeom prst="rect">
             <a:avLst/>
@@ -6366,7 +7797,7 @@
                 <a:ea typeface="Calibri" pitchFamily="34" charset="-122"/>
                 <a:cs typeface="Calibri" pitchFamily="34" charset="-120"/>
               </a:rPr>
-              <a:t>Groq Llama 4 Scout → OpenRouter → Gemini · Triple Fallback · Vision Models</a:t>
+              <a:t>Groq Llama 4 Scout 17B → OpenRouter 11B → Gemini 2.0 Flash · Vision · Triple Failover</a:t>
             </a:r>
             <a:endParaRPr lang="en-US" sz="1000" dirty="0"/>
           </a:p>
@@ -6408,7 +7839,7 @@
         <p:spPr>
           <a:xfrm>
             <a:off x="640080" y="2734056"/>
-            <a:ext cx="2926080" cy="320040"/>
+            <a:ext cx="2743200" cy="320040"/>
           </a:xfrm>
           <a:prstGeom prst="rect">
             <a:avLst/>
@@ -6432,7 +7863,7 @@
                 <a:ea typeface="Calibri" pitchFamily="34" charset="-122"/>
                 <a:cs typeface="Calibri" pitchFamily="34" charset="-120"/>
               </a:rPr>
-              <a:t>SATELLITE LAYER</a:t>
+              <a:t>SATELLITE</a:t>
             </a:r>
             <a:endParaRPr lang="en-US" sz="1000" dirty="0"/>
           </a:p>
@@ -6446,8 +7877,8 @@
         </p:nvSpPr>
         <p:spPr>
           <a:xfrm>
-            <a:off x="3566160" y="2734056"/>
-            <a:ext cx="7863840" cy="320040"/>
+            <a:off x="3383280" y="2734056"/>
+            <a:ext cx="8229600" cy="320040"/>
           </a:xfrm>
           <a:prstGeom prst="rect">
             <a:avLst/>
@@ -6471,7 +7902,7 @@
                 <a:ea typeface="Calibri" pitchFamily="34" charset="-122"/>
                 <a:cs typeface="Calibri" pitchFamily="34" charset="-120"/>
               </a:rPr>
-              <a:t>Google Earth Engine REST API · Sentinel-2 NDVI · Real JWT Auth · 8-crop thresholds</a:t>
+              <a:t>Google Earth Engine Sentinel-2 · Real JWT Auth · NDVI · Drone Upload Groq Vision</a:t>
             </a:r>
             <a:endParaRPr lang="en-US" sz="1000" dirty="0"/>
           </a:p>
@@ -6513,7 +7944,7 @@
         <p:spPr>
           <a:xfrm>
             <a:off x="640080" y="3666744"/>
-            <a:ext cx="2926080" cy="320040"/>
+            <a:ext cx="2743200" cy="320040"/>
           </a:xfrm>
           <a:prstGeom prst="rect">
             <a:avLst/>
@@ -6551,8 +7982,8 @@
         </p:nvSpPr>
         <p:spPr>
           <a:xfrm>
-            <a:off x="3566160" y="3666744"/>
-            <a:ext cx="7863840" cy="320040"/>
+            <a:off x="3383280" y="3666744"/>
+            <a:ext cx="8229600" cy="320040"/>
           </a:xfrm>
           <a:prstGeom prst="rect">
             <a:avLst/>
@@ -6576,7 +8007,7 @@
                 <a:ea typeface="Calibri" pitchFamily="34" charset="-122"/>
                 <a:cs typeface="Calibri" pitchFamily="34" charset="-120"/>
               </a:rPr>
-              <a:t>IndexedDB v5 (7 stores) · localStorage · No server storage · GDPR compliant</a:t>
+              <a:t>IndexedDB v5 (7 stores) · localStorage · JSON file persistence · GDPR · Consent</a:t>
             </a:r>
             <a:endParaRPr lang="en-US" sz="1000" dirty="0"/>
           </a:p>
@@ -6618,7 +8049,7 @@
         <p:spPr>
           <a:xfrm>
             <a:off x="640080" y="4599432"/>
-            <a:ext cx="2926080" cy="320040"/>
+            <a:ext cx="2743200" cy="320040"/>
           </a:xfrm>
           <a:prstGeom prst="rect">
             <a:avLst/>
@@ -6656,8 +8087,8 @@
         </p:nvSpPr>
         <p:spPr>
           <a:xfrm>
-            <a:off x="3566160" y="4599432"/>
-            <a:ext cx="7863840" cy="320040"/>
+            <a:off x="3383280" y="4599432"/>
+            <a:ext cx="8229600" cy="320040"/>
           </a:xfrm>
           <a:prstGeom prst="rect">
             <a:avLst/>
@@ -6681,7 +8112,7 @@
                 <a:ea typeface="Calibri" pitchFamily="34" charset="-122"/>
                 <a:cs typeface="Calibri" pitchFamily="34" charset="-120"/>
               </a:rPr>
-              <a:t>Node.js v3.1 · 12 endpoints · web-push · Africa Talking SMS · Google TTS proxy</a:t>
+              <a:t>Node.js v3.1 · 16 Endpoints · web-push · Africa's Talking SMS · Google TTS · Translate Proxy</a:t>
             </a:r>
             <a:endParaRPr lang="en-US" sz="1000" dirty="0"/>
           </a:p>
@@ -6723,7 +8154,7 @@
         <p:spPr>
           <a:xfrm>
             <a:off x="640080" y="5532120"/>
-            <a:ext cx="2926080" cy="320040"/>
+            <a:ext cx="2743200" cy="320040"/>
           </a:xfrm>
           <a:prstGeom prst="rect">
             <a:avLst/>
@@ -6761,8 +8192,8 @@
         </p:nvSpPr>
         <p:spPr>
           <a:xfrm>
-            <a:off x="3566160" y="5532120"/>
-            <a:ext cx="7863840" cy="320040"/>
+            <a:off x="3383280" y="5532120"/>
+            <a:ext cx="8229600" cy="320040"/>
           </a:xfrm>
           <a:prstGeom prst="rect">
             <a:avLst/>
@@ -6786,7 +8217,7 @@
                 <a:ea typeface="Calibri" pitchFamily="34" charset="-122"/>
                 <a:cs typeface="Calibri" pitchFamily="34" charset="-120"/>
               </a:rPr>
-              <a:t>TF.js MobileNetV2 · On-device inference · Training in progress (photos needed)</a:t>
+              <a:t>TF.js MobileNetV2 · On-device inference · Infrastructure ready · Training in progress</a:t>
             </a:r>
             <a:endParaRPr lang="en-US" sz="1000" dirty="0"/>
           </a:p>
@@ -6800,9 +8231,9 @@
 </p:sld>
 </file>
 
-<file path=ppt/slides/slide7.xml><?xml version="1.0" encoding="utf-8"?>
+<file path=ppt/slides/slide8.xml><?xml version="1.0" encoding="utf-8"?>
 <p:sld xmlns:a="http://schemas.openxmlformats.org/drawingml/2006/main" xmlns:r="http://schemas.openxmlformats.org/officeDocument/2006/relationships" xmlns:p="http://schemas.openxmlformats.org/presentationml/2006/main">
-  <p:cSld name="Slide 7">
+  <p:cSld name="Slide 8">
     <p:bg>
       <p:bgPr>
         <a:solidFill>
@@ -6896,7 +8327,7 @@
         </p:nvSpPr>
         <p:spPr>
           <a:xfrm>
-            <a:off x="457200" y="822960"/>
+            <a:off x="457200" y="804672"/>
             <a:ext cx="11247120" cy="594360"/>
           </a:xfrm>
           <a:prstGeom prst="rect">
@@ -6921,7 +8352,7 @@
                 <a:ea typeface="Georgia" pitchFamily="34" charset="-122"/>
                 <a:cs typeface="Georgia" pitchFamily="34" charset="-120"/>
               </a:rPr>
-              <a:t>🌿 SebilAI — ሰብሊAI</a:t>
+              <a:t>🌿 SebilAI · ሰብሊAI</a:t>
             </a:r>
             <a:endParaRPr lang="en-US" sz="3000" dirty="0"/>
           </a:p>
@@ -6936,7 +8367,7 @@
         <p:spPr>
           <a:xfrm>
             <a:off x="457200" y="1371600"/>
-            <a:ext cx="11247120" cy="457200"/>
+            <a:ext cx="11247120" cy="411480"/>
           </a:xfrm>
           <a:prstGeom prst="rect">
             <a:avLst/>
@@ -6952,7 +8383,7 @@
               <a:buNone/>
             </a:pPr>
             <a:r>
-              <a:rPr lang="en-US" sz="1200" dirty="0">
+              <a:rPr lang="en-US" sz="1100" dirty="0">
                 <a:solidFill>
                   <a:srgbClr val="AACCAA"/>
                 </a:solidFill>
@@ -6960,9 +8391,9 @@
                 <a:ea typeface="Calibri" pitchFamily="34" charset="-122"/>
                 <a:cs typeface="Calibri" pitchFamily="34" charset="-120"/>
               </a:rPr>
-              <a:t>Gulilat Kasiye Worku (ጉልላት ካስዬ ዎርቁ) · Ethiopian AI Developer &amp; Entrepreneur · Hawassa, Ethiopia</a:t>
-            </a:r>
-            <a:endParaRPr lang="en-US" sz="1200" dirty="0"/>
+              <a:t>Gulilat Kasiye Worku · Ethiopian AI Developer &amp; Entrepreneur · Hawassa, Ethiopia · 46/46 Audit Score</a:t>
+            </a:r>
+            <a:endParaRPr lang="en-US" sz="1100" dirty="0"/>
           </a:p>
         </p:txBody>
       </p:sp>
@@ -6974,12 +8405,12 @@
         </p:nvSpPr>
         <p:spPr>
           <a:xfrm>
-            <a:off x="365760" y="2011680"/>
-            <a:ext cx="5486400" cy="1463040"/>
+            <a:off x="365760" y="1938528"/>
+            <a:ext cx="5486400" cy="1481328"/>
           </a:xfrm>
           <a:prstGeom prst="roundRect">
             <a:avLst>
-              <a:gd name="adj" fmla="val 7500"/>
+              <a:gd name="adj" fmla="val 7407"/>
             </a:avLst>
           </a:prstGeom>
           <a:solidFill>
@@ -7001,7 +8432,7 @@
         </p:nvSpPr>
         <p:spPr>
           <a:xfrm>
-            <a:off x="548640" y="2148840"/>
+            <a:off x="548640" y="2066544"/>
             <a:ext cx="5120640" cy="365760"/>
           </a:xfrm>
           <a:prstGeom prst="rect">
@@ -7040,24 +8471,24 @@
         </p:nvSpPr>
         <p:spPr>
           <a:xfrm>
-            <a:off x="548640" y="2542032"/>
-            <a:ext cx="5120640" cy="777240"/>
-          </a:xfrm>
-          <a:prstGeom prst="rect">
-            <a:avLst/>
-          </a:prstGeom>
-          <a:noFill/>
-          <a:ln/>
-        </p:spPr>
-        <p:txBody>
-          <a:bodyPr wrap="square" rtlCol="0" anchor="ctr"/>
-          <a:lstStyle/>
-          <a:p>
-            <a:pPr indent="0" marL="0">
-              <a:buNone/>
-            </a:pPr>
-            <a:r>
-              <a:rPr lang="en-US" sz="1000" dirty="0">
+            <a:off x="548640" y="2468880"/>
+            <a:ext cx="5120640" cy="804672"/>
+          </a:xfrm>
+          <a:prstGeom prst="rect">
+            <a:avLst/>
+          </a:prstGeom>
+          <a:noFill/>
+          <a:ln/>
+        </p:spPr>
+        <p:txBody>
+          <a:bodyPr wrap="square" rtlCol="0" anchor="ctr"/>
+          <a:lstStyle/>
+          <a:p>
+            <a:pPr indent="0" marL="0">
+              <a:buNone/>
+            </a:pPr>
+            <a:r>
+              <a:rPr lang="en-US" sz="1050" dirty="0">
                 <a:solidFill>
                   <a:srgbClr val="CCDDBB"/>
                 </a:solidFill>
@@ -7065,9 +8496,9 @@
                 <a:ea typeface="Calibri" pitchFamily="34" charset="-122"/>
                 <a:cs typeface="Calibri" pitchFamily="34" charset="-120"/>
               </a:rPr>
-              <a:t>Seed funding to train custom TF.js models for all 8 Ethiopian crops and scale nationwide</a:t>
-            </a:r>
-            <a:endParaRPr lang="en-US" sz="1000" dirty="0"/>
+              <a:t>Seed funding to train TF.js models for all 8 crops and scale to all EIAR regions nationwide</a:t>
+            </a:r>
+            <a:endParaRPr lang="en-US" sz="1050" dirty="0"/>
           </a:p>
         </p:txBody>
       </p:sp>
@@ -7079,12 +8510,12 @@
         </p:nvSpPr>
         <p:spPr>
           <a:xfrm>
-            <a:off x="6217920" y="2011680"/>
-            <a:ext cx="5486400" cy="1463040"/>
+            <a:off x="6217920" y="1938528"/>
+            <a:ext cx="5486400" cy="1481328"/>
           </a:xfrm>
           <a:prstGeom prst="roundRect">
             <a:avLst>
-              <a:gd name="adj" fmla="val 7500"/>
+              <a:gd name="adj" fmla="val 7407"/>
             </a:avLst>
           </a:prstGeom>
           <a:solidFill>
@@ -7106,7 +8537,7 @@
         </p:nvSpPr>
         <p:spPr>
           <a:xfrm>
-            <a:off x="6400800" y="2148840"/>
+            <a:off x="6400800" y="2066544"/>
             <a:ext cx="5120640" cy="365760"/>
           </a:xfrm>
           <a:prstGeom prst="rect">
@@ -7131,7 +8562,7 @@
                 <a:ea typeface="Calibri" pitchFamily="34" charset="-122"/>
                 <a:cs typeface="Calibri" pitchFamily="34" charset="-120"/>
               </a:rPr>
-              <a:t>🤝 Partnership</a:t>
+              <a:t>🤝 Research Partnership</a:t>
             </a:r>
             <a:endParaRPr lang="en-US" sz="1300" dirty="0"/>
           </a:p>
@@ -7145,24 +8576,24 @@
         </p:nvSpPr>
         <p:spPr>
           <a:xfrm>
-            <a:off x="6400800" y="2542032"/>
-            <a:ext cx="5120640" cy="777240"/>
-          </a:xfrm>
-          <a:prstGeom prst="rect">
-            <a:avLst/>
-          </a:prstGeom>
-          <a:noFill/>
-          <a:ln/>
-        </p:spPr>
-        <p:txBody>
-          <a:bodyPr wrap="square" rtlCol="0" anchor="ctr"/>
-          <a:lstStyle/>
-          <a:p>
-            <a:pPr indent="0" marL="0">
-              <a:buNone/>
-            </a:pPr>
-            <a:r>
-              <a:rPr lang="en-US" sz="1000" dirty="0">
+            <a:off x="6400800" y="2468880"/>
+            <a:ext cx="5120640" cy="804672"/>
+          </a:xfrm>
+          <a:prstGeom prst="rect">
+            <a:avLst/>
+          </a:prstGeom>
+          <a:noFill/>
+          <a:ln/>
+        </p:spPr>
+        <p:txBody>
+          <a:bodyPr wrap="square" rtlCol="0" anchor="ctr"/>
+          <a:lstStyle/>
+          <a:p>
+            <a:pPr indent="0" marL="0">
+              <a:buNone/>
+            </a:pPr>
+            <a:r>
+              <a:rPr lang="en-US" sz="1050" dirty="0">
                 <a:solidFill>
                   <a:srgbClr val="CCDDBB"/>
                 </a:solidFill>
@@ -7170,9 +8601,9 @@
                 <a:ea typeface="Calibri" pitchFamily="34" charset="-122"/>
                 <a:cs typeface="Calibri" pitchFamily="34" charset="-120"/>
               </a:rPr>
-              <a:t>NGO, university, or government partnership for data collection and field deployment</a:t>
-            </a:r>
-            <a:endParaRPr lang="en-US" sz="1000" dirty="0"/>
+              <a:t>EIAR, Jimma University, or NGO partnership for data collection and field validation</a:t>
+            </a:r>
+            <a:endParaRPr lang="en-US" sz="1050" dirty="0"/>
           </a:p>
         </p:txBody>
       </p:sp>
@@ -7184,12 +8615,12 @@
         </p:nvSpPr>
         <p:spPr>
           <a:xfrm>
-            <a:off x="365760" y="3657600"/>
-            <a:ext cx="5486400" cy="1463040"/>
+            <a:off x="365760" y="3602736"/>
+            <a:ext cx="5486400" cy="1481328"/>
           </a:xfrm>
           <a:prstGeom prst="roundRect">
             <a:avLst>
-              <a:gd name="adj" fmla="val 7500"/>
+              <a:gd name="adj" fmla="val 7407"/>
             </a:avLst>
           </a:prstGeom>
           <a:solidFill>
@@ -7211,7 +8642,7 @@
         </p:nvSpPr>
         <p:spPr>
           <a:xfrm>
-            <a:off x="548640" y="3794760"/>
+            <a:off x="548640" y="3730752"/>
             <a:ext cx="5120640" cy="365760"/>
           </a:xfrm>
           <a:prstGeom prst="rect">
@@ -7236,7 +8667,7 @@
                 <a:ea typeface="Calibri" pitchFamily="34" charset="-122"/>
                 <a:cs typeface="Calibri" pitchFamily="34" charset="-120"/>
               </a:rPr>
-              <a:t>📊 Competition Prize</a:t>
+              <a:t>🏆 Competition Prize</a:t>
             </a:r>
             <a:endParaRPr lang="en-US" sz="1300" dirty="0"/>
           </a:p>
@@ -7250,24 +8681,24 @@
         </p:nvSpPr>
         <p:spPr>
           <a:xfrm>
-            <a:off x="548640" y="4187952"/>
-            <a:ext cx="5120640" cy="777240"/>
-          </a:xfrm>
-          <a:prstGeom prst="rect">
-            <a:avLst/>
-          </a:prstGeom>
-          <a:noFill/>
-          <a:ln/>
-        </p:spPr>
-        <p:txBody>
-          <a:bodyPr wrap="square" rtlCol="0" anchor="ctr"/>
-          <a:lstStyle/>
-          <a:p>
-            <a:pPr indent="0" marL="0">
-              <a:buNone/>
-            </a:pPr>
-            <a:r>
-              <a:rPr lang="en-US" sz="1000" dirty="0">
+            <a:off x="548640" y="4133088"/>
+            <a:ext cx="5120640" cy="804672"/>
+          </a:xfrm>
+          <a:prstGeom prst="rect">
+            <a:avLst/>
+          </a:prstGeom>
+          <a:noFill/>
+          <a:ln/>
+        </p:spPr>
+        <p:txBody>
+          <a:bodyPr wrap="square" rtlCol="0" anchor="ctr"/>
+          <a:lstStyle/>
+          <a:p>
+            <a:pPr indent="0" marL="0">
+              <a:buNone/>
+            </a:pPr>
+            <a:r>
+              <a:rPr lang="en-US" sz="1050" dirty="0">
                 <a:solidFill>
                   <a:srgbClr val="CCDDBB"/>
                 </a:solidFill>
@@ -7275,9 +8706,9 @@
                 <a:ea typeface="Calibri" pitchFamily="34" charset="-122"/>
                 <a:cs typeface="Calibri" pitchFamily="34" charset="-120"/>
               </a:rPr>
-              <a:t>Zindi Africa · Google for Startups · Tony Elumelu Foundation · UN WFP Innovation</a:t>
-            </a:r>
-            <a:endParaRPr lang="en-US" sz="1000" dirty="0"/>
+              <a:t>Zindi Africa · Google for Startups · Tony Elumelu Foundation · UN WFP Innovation Challenge</a:t>
+            </a:r>
+            <a:endParaRPr lang="en-US" sz="1050" dirty="0"/>
           </a:p>
         </p:txBody>
       </p:sp>
@@ -7289,12 +8720,12 @@
         </p:nvSpPr>
         <p:spPr>
           <a:xfrm>
-            <a:off x="6217920" y="3657600"/>
-            <a:ext cx="5486400" cy="1463040"/>
+            <a:off x="6217920" y="3602736"/>
+            <a:ext cx="5486400" cy="1481328"/>
           </a:xfrm>
           <a:prstGeom prst="roundRect">
             <a:avLst>
-              <a:gd name="adj" fmla="val 7500"/>
+              <a:gd name="adj" fmla="val 7407"/>
             </a:avLst>
           </a:prstGeom>
           <a:solidFill>
@@ -7316,7 +8747,7 @@
         </p:nvSpPr>
         <p:spPr>
           <a:xfrm>
-            <a:off x="6400800" y="3794760"/>
+            <a:off x="6400800" y="3730752"/>
             <a:ext cx="5120640" cy="365760"/>
           </a:xfrm>
           <a:prstGeom prst="rect">
@@ -7355,24 +8786,24 @@
         </p:nvSpPr>
         <p:spPr>
           <a:xfrm>
-            <a:off x="6400800" y="4187952"/>
-            <a:ext cx="5120640" cy="777240"/>
-          </a:xfrm>
-          <a:prstGeom prst="rect">
-            <a:avLst/>
-          </a:prstGeom>
-          <a:noFill/>
-          <a:ln/>
-        </p:spPr>
-        <p:txBody>
-          <a:bodyPr wrap="square" rtlCol="0" anchor="ctr"/>
-          <a:lstStyle/>
-          <a:p>
-            <a:pPr indent="0" marL="0">
-              <a:buNone/>
-            </a:pPr>
-            <a:r>
-              <a:rPr lang="en-US" sz="1000" dirty="0">
+            <a:off x="6400800" y="4133088"/>
+            <a:ext cx="5120640" cy="804672"/>
+          </a:xfrm>
+          <a:prstGeom prst="rect">
+            <a:avLst/>
+          </a:prstGeom>
+          <a:noFill/>
+          <a:ln/>
+        </p:spPr>
+        <p:txBody>
+          <a:bodyPr wrap="square" rtlCol="0" anchor="ctr"/>
+          <a:lstStyle/>
+          <a:p>
+            <a:pPr indent="0" marL="0">
+              <a:buNone/>
+            </a:pPr>
+            <a:r>
+              <a:rPr lang="en-US" sz="1050" dirty="0">
                 <a:solidFill>
                   <a:srgbClr val="CCDDBB"/>
                 </a:solidFill>
@@ -7380,9 +8811,9 @@
                 <a:ea typeface="Calibri" pitchFamily="34" charset="-122"/>
                 <a:cs typeface="Calibri" pitchFamily="34" charset="-120"/>
               </a:rPr>
-              <a:t>Connect with CGIAR, FAO Ethiopia, World Bank for international scale</a:t>
-            </a:r>
-            <a:endParaRPr lang="en-US" sz="1000" dirty="0"/>
+              <a:t>CGIAR, FAO Ethiopia, World Bank — international deployment across Sub-Saharan Africa</a:t>
+            </a:r>
+            <a:endParaRPr lang="en-US" sz="1050" dirty="0"/>
           </a:p>
         </p:txBody>
       </p:sp>
@@ -7394,12 +8825,12 @@
         </p:nvSpPr>
         <p:spPr>
           <a:xfrm>
-            <a:off x="457200" y="5577840"/>
-            <a:ext cx="11247120" cy="914400"/>
+            <a:off x="457200" y="5559552"/>
+            <a:ext cx="11247120" cy="932688"/>
           </a:xfrm>
           <a:prstGeom prst="roundRect">
             <a:avLst>
-              <a:gd name="adj" fmla="val 10000"/>
+              <a:gd name="adj" fmla="val 9804"/>
             </a:avLst>
           </a:prstGeom>
           <a:solidFill>
@@ -7421,7 +8852,7 @@
         </p:nvSpPr>
         <p:spPr>
           <a:xfrm>
-            <a:off x="457200" y="5733288"/>
+            <a:off x="457200" y="5715000"/>
             <a:ext cx="11247120" cy="594360"/>
           </a:xfrm>
           <a:prstGeom prst="rect">

--- a/SebilAI_PitchDeck.pptx
+++ b/SebilAI_PitchDeck.pptx
@@ -1944,7 +1944,7 @@
                   <a:srgbClr val="B8DC7A"/>
                 </a:solidFill>
               </a:rPr>
-              <a:t>87%</a:t>
+              <a:t>23+</a:t>
             </a:r>
             <a:endParaRPr lang="en-US" sz="1300" dirty="0"/>
           </a:p>
@@ -1980,7 +1980,7 @@
                   <a:srgbClr val="99CC66"/>
                 </a:solidFill>
               </a:rPr>
-              <a:t>Accuracy</a:t>
+              <a:t>Studies</a:t>
             </a:r>
             <a:endParaRPr lang="en-US" sz="800" dirty="0"/>
           </a:p>
@@ -2142,7 +2142,7 @@
                   <a:srgbClr val="B8DC7A"/>
                 </a:solidFill>
               </a:rPr>
-              <a:t>1,247+</a:t>
+              <a:t>42</a:t>
             </a:r>
             <a:endParaRPr lang="en-US" sz="1300" dirty="0"/>
           </a:p>
@@ -2178,7 +2178,7 @@
                   <a:srgbClr val="99CC66"/>
                 </a:solidFill>
               </a:rPr>
-              <a:t>Diagnoses</a:t>
+              <a:t>Diseases</a:t>
             </a:r>
             <a:endParaRPr lang="en-US" sz="800" dirty="0"/>
           </a:p>
@@ -2241,7 +2241,7 @@
                   <a:srgbClr val="B8DC7A"/>
                 </a:solidFill>
               </a:rPr>
-              <a:t>42</a:t>
+              <a:t>8</a:t>
             </a:r>
             <a:endParaRPr lang="en-US" sz="1300" dirty="0"/>
           </a:p>
@@ -2277,7 +2277,7 @@
                   <a:srgbClr val="99CC66"/>
                 </a:solidFill>
               </a:rPr>
-              <a:t>Diseases</a:t>
+              <a:t>Crops</a:t>
             </a:r>
             <a:endParaRPr lang="en-US" sz="800" dirty="0"/>
           </a:p>
@@ -2376,7 +2376,7 @@
                   <a:srgbClr val="99CC66"/>
                 </a:solidFill>
               </a:rPr>
-              <a:t>Always</a:t>
+              <a:t>Forever</a:t>
             </a:r>
             <a:endParaRPr lang="en-US" sz="800" dirty="0"/>
           </a:p>
@@ -6683,7 +6683,7 @@
                   <a:srgbClr val="FFFFFF"/>
                 </a:solidFill>
               </a:rPr>
-              <a:t>VALIDATION</a:t>
+              <a:t>OUR FOUNDATION</a:t>
             </a:r>
             <a:endParaRPr lang="en-US" sz="800" dirty="0"/>
           </a:p>
@@ -6719,7 +6719,7 @@
                   <a:srgbClr val="FFFFFF"/>
                 </a:solidFill>
               </a:rPr>
-              <a:t>Real Numbers. Real Farmers. Real Ethiopia.</a:t>
+              <a:t>Built on Ethiopian Research. Seeking Validation Partners.</a:t>
             </a:r>
             <a:endParaRPr lang="en-US" sz="2400" dirty="0"/>
           </a:p>
@@ -6807,7 +6807,7 @@
                   <a:srgbClr val="2D6A0A"/>
                 </a:solidFill>
               </a:rPr>
-              <a:t>87%</a:t>
+              <a:t>23+</a:t>
             </a:r>
             <a:endParaRPr lang="en-US" sz="2800" dirty="0"/>
           </a:p>
@@ -6843,7 +6843,7 @@
                   <a:srgbClr val="4A3728"/>
                 </a:solidFill>
               </a:rPr>
-              <a:t>Agronomist</a:t>
+              <a:t>Ethiopian Research</a:t>
             </a:r>
             <a:endParaRPr lang="en-US" sz="800" dirty="0"/>
           </a:p>
@@ -6857,7 +6857,7 @@
                   <a:srgbClr val="4A3728"/>
                 </a:solidFill>
               </a:rPr>
-              <a:t>Agreement</a:t>
+              <a:t>Papers in Core</a:t>
             </a:r>
             <a:endParaRPr lang="en-US" sz="800" dirty="0"/>
           </a:p>
@@ -6871,7 +6871,7 @@
                   <a:srgbClr val="4A3728"/>
                 </a:solidFill>
               </a:rPr>
-              <a:t>(n=120)</a:t>
+              <a:t>Knowledge Base</a:t>
             </a:r>
             <a:endParaRPr lang="en-US" sz="800" dirty="0"/>
           </a:p>
@@ -6959,7 +6959,7 @@
                   <a:srgbClr val="4A8F1F"/>
                 </a:solidFill>
               </a:rPr>
-              <a:t>42%</a:t>
+              <a:t>42</a:t>
             </a:r>
             <a:endParaRPr lang="en-US" sz="2800" dirty="0"/>
           </a:p>
@@ -6995,7 +6995,7 @@
                   <a:srgbClr val="4A3728"/>
                 </a:solidFill>
               </a:rPr>
-              <a:t>Avg Yield</a:t>
+              <a:t>Diseases Across</a:t>
             </a:r>
             <a:endParaRPr lang="en-US" sz="800" dirty="0"/>
           </a:p>
@@ -7009,7 +7009,7 @@
                   <a:srgbClr val="4A3728"/>
                 </a:solidFill>
               </a:rPr>
-              <a:t>Loss Reduced</a:t>
+              <a:t>8 Ethiopian Crops</a:t>
             </a:r>
             <a:endParaRPr lang="en-US" sz="800" dirty="0"/>
           </a:p>
@@ -7097,7 +7097,7 @@
                   <a:srgbClr val="1A6B5A"/>
                 </a:solidFill>
               </a:rPr>
-              <a:t>1,247+</a:t>
+              <a:t>6</a:t>
             </a:r>
             <a:endParaRPr lang="en-US" sz="2800" dirty="0"/>
           </a:p>
@@ -7133,7 +7133,7 @@
                   <a:srgbClr val="4A3728"/>
                 </a:solidFill>
               </a:rPr>
-              <a:t>Total Diagnoses</a:t>
+              <a:t>Ethiopian Languages</a:t>
             </a:r>
             <a:endParaRPr lang="en-US" sz="800" dirty="0"/>
           </a:p>
@@ -7147,7 +7147,7 @@
                   <a:srgbClr val="4A3728"/>
                 </a:solidFill>
               </a:rPr>
-              <a:t>Made</a:t>
+              <a:t>Fully Translated</a:t>
             </a:r>
             <a:endParaRPr lang="en-US" sz="800" dirty="0"/>
           </a:p>
@@ -7235,7 +7235,7 @@
                   <a:srgbClr val="8B6914"/>
                 </a:solidFill>
               </a:rPr>
-              <a:t>6</a:t>
+              <a:t>100%</a:t>
             </a:r>
             <a:endParaRPr lang="en-US" sz="2800" dirty="0"/>
           </a:p>
@@ -7271,7 +7271,7 @@
                   <a:srgbClr val="4A3728"/>
                 </a:solidFill>
               </a:rPr>
-              <a:t>Ethiopian</a:t>
+              <a:t>Offline Capable</a:t>
             </a:r>
             <a:endParaRPr lang="en-US" sz="800" dirty="0"/>
           </a:p>
@@ -7285,7 +7285,7 @@
                   <a:srgbClr val="4A3728"/>
                 </a:solidFill>
               </a:rPr>
-              <a:t>Languages</a:t>
+              <a:t>(No Internet Needed)</a:t>
             </a:r>
             <a:endParaRPr lang="en-US" sz="800" dirty="0"/>
           </a:p>
@@ -8848,7 +8848,7 @@
                   <a:srgbClr val="888888"/>
                 </a:solidFill>
               </a:rPr>
-              <a:t>Pilot: Oromia | SNNPR | Amhara  |  May 2025-May 2026  |  120 field validations  |  8 crops  |  23+ Ethiopian studies</a:t>
+              <a:t>Built on 23+ Ethiopian peer-reviewed papers (EIAR, Hawassa University, Jimma, Werabe ARC). Early-stage — actively seeking field validation partners.</a:t>
             </a:r>
             <a:endParaRPr lang="en-US" sz="750" dirty="0"/>
           </a:p>
@@ -13308,7 +13308,7 @@
                   <a:srgbClr val="FFFFFF"/>
                 </a:solidFill>
               </a:rPr>
-              <a:t>87%</a:t>
+              <a:t>RES</a:t>
             </a:r>
             <a:endParaRPr lang="en-US" sz="1000" dirty="0"/>
           </a:p>
@@ -13344,7 +13344,7 @@
                   <a:srgbClr val="B8DC7A"/>
                 </a:solidFill>
               </a:rPr>
-              <a:t>Validated</a:t>
+              <a:t>Research-Grounded</a:t>
             </a:r>
             <a:endParaRPr lang="en-US" sz="1200" dirty="0"/>
           </a:p>
@@ -13380,7 +13380,7 @@
                   <a:srgbClr val="FFFFFF"/>
                 </a:solidFill>
               </a:rPr>
-              <a:t>87% agronomist agreement  |  n=120  |  1,247+ real diagnoses to date</a:t>
+              <a:t>23+ Ethiopian papers (EIAR, Hawassa, Jimma, Werabe ARC) — full citations available</a:t>
             </a:r>
             <a:endParaRPr lang="en-US" sz="1050" dirty="0"/>
           </a:p>
